--- a/Report/03-毕业答辩/鄢玺毕业答辩.pptx
+++ b/Report/03-毕业答辩/鄢玺毕业答辩.pptx
@@ -9,25 +9,25 @@
   </p:notesMasterIdLst>
   <p:sldIdLst>
     <p:sldId id="256" r:id="rId3"/>
-    <p:sldId id="257" r:id="rId5"/>
-    <p:sldId id="258" r:id="rId6"/>
-    <p:sldId id="259" r:id="rId7"/>
-    <p:sldId id="260" r:id="rId8"/>
-    <p:sldId id="261" r:id="rId9"/>
-    <p:sldId id="262" r:id="rId10"/>
-    <p:sldId id="263" r:id="rId11"/>
-    <p:sldId id="264" r:id="rId12"/>
-    <p:sldId id="265" r:id="rId13"/>
-    <p:sldId id="266" r:id="rId14"/>
-    <p:sldId id="267" r:id="rId15"/>
-    <p:sldId id="268" r:id="rId16"/>
-    <p:sldId id="269" r:id="rId17"/>
-    <p:sldId id="270" r:id="rId18"/>
+    <p:sldId id="257" r:id="rId10"/>
+    <p:sldId id="258" r:id="rId11"/>
+    <p:sldId id="259" r:id="rId12"/>
+    <p:sldId id="260" r:id="rId13"/>
+    <p:sldId id="261" r:id="rId14"/>
+    <p:sldId id="262" r:id="rId15"/>
+    <p:sldId id="263" r:id="rId16"/>
+    <p:sldId id="264" r:id="rId17"/>
+    <p:sldId id="265" r:id="rId18"/>
+    <p:sldId id="266" r:id="rId19"/>
+    <p:sldId id="267" r:id="rId20"/>
+    <p:sldId id="268" r:id="rId21"/>
+    <p:sldId id="269" r:id="rId22"/>
+    <p:sldId id="270" r:id="rId23"/>
   </p:sldIdLst>
   <p:sldSz cx="10946130" cy="6858000"/>
   <p:notesSz cx="6858000" cy="9144000"/>
   <p:custDataLst>
-    <p:tags r:id="rId23"/>
+    <p:tags r:id="rId28"/>
   </p:custDataLst>
   <p:defaultTextStyle>
     <a:defPPr>
@@ -2646,7 +2646,7 @@
                   <a:srgbClr val="C00000"/>
                 </a:solidFill>
                 <a:latin typeface="Times New Roman" panose="02020503050405090304" charset="0"/>
-                <a:ea typeface="微软雅黑" panose="020B0703020204020201" pitchFamily="34" charset="-122"/>
+                <a:ea typeface="微软雅黑" panose="020B0503020204020204" pitchFamily="34" charset="-122"/>
                 <a:cs typeface="Times New Roman" panose="02020503050405090304" charset="0"/>
               </a:defRPr>
             </a:lvl1pPr>
@@ -6326,9 +6326,9 @@
           </a:xfrm>
         </p:spPr>
         <p:txBody>
-          <a:bodyPr wrap="square" lIns="0" tIns="0" rIns="0" bIns="0" anchor="ctr" anchorCtr="0"/>
-          <a:p>
-            <a:pPr algn="ctr" defTabSz="914400">
+          <a:bodyPr anchor="ctr" anchorCtr="0" wrap="square" lIns="0" rIns="0" tIns="0" bIns="0"/>
+          <a:p>
+            <a:pPr defTabSz="914400" algn="ctr">
               <a:lnSpc>
                 <a:spcPct val="100000"/>
               </a:lnSpc>
@@ -6360,6 +6360,27 @@
       </p:sp>
       <p:sp>
         <p:nvSpPr>
+          <p:cNvPr id="59394" name="副标题 2050"/>
+          <p:cNvSpPr>
+            <a:spLocks noGrp="1"/>
+          </p:cNvSpPr>
+          <p:nvPr>
+            <p:ph type="subTitle" idx="1"/>
+          </p:nvPr>
+        </p:nvSpPr>
+        <p:spPr>
+          <a:xfrm>
+            <a:off x="1550988" y="4540885"/>
+            <a:ext cx="8423275" cy="711200"/>
+          </a:xfrm>
+        </p:spPr>
+        <p:txBody>
+          <a:bodyPr anchor="b" anchorCtr="0"/>
+          <a:p/>
+        </p:txBody>
+      </p:sp>
+      <p:sp>
+        <p:nvSpPr>
           <p:cNvPr id="59395" name="TextBox 59394"/>
           <p:cNvSpPr txBox="1"/>
           <p:nvPr/>
@@ -6375,7 +6396,7 @@
           <a:noFill/>
         </p:spPr>
         <p:txBody>
-          <a:bodyPr wrap="square" lIns="0" tIns="0" rIns="0" bIns="0" anchor="ctr">
+          <a:bodyPr wrap="square" anchor="ctr" lIns="0" rIns="0" tIns="0" bIns="0">
             <a:spAutoFit/>
           </a:bodyPr>
           <a:lstStyle/>
@@ -6396,11 +6417,6 @@
               </a:rPr>
               <a:t>鄢玺</a:t>
             </a:r>
-            <a:endParaRPr sz="3000" b="1" i="0" u="none">
-              <a:solidFill>
-                <a:srgbClr val="FFFFFF"/>
-              </a:solidFill>
-            </a:endParaRPr>
           </a:p>
           <a:p>
             <a:pPr algn="ctr">
@@ -6419,11 +6435,6 @@
               </a:rPr>
               <a:t>导师：张福新</a:t>
             </a:r>
-            <a:endParaRPr sz="3000" b="1" i="0" u="none">
-              <a:solidFill>
-                <a:srgbClr val="FFFFFF"/>
-              </a:solidFill>
-            </a:endParaRPr>
           </a:p>
           <a:p>
             <a:pPr algn="ctr">
@@ -6442,11 +6453,6 @@
               </a:rPr>
               <a:t>2026年6月</a:t>
             </a:r>
-            <a:endParaRPr sz="3200" b="1" i="0" u="none">
-              <a:solidFill>
-                <a:srgbClr val="FFFFFF"/>
-              </a:solidFill>
-            </a:endParaRPr>
           </a:p>
         </p:txBody>
       </p:sp>
@@ -6459,7 +6465,7 @@
 </file>
 
 <file path=ppt/slides/slide10.xml><?xml version="1.0" encoding="utf-8"?>
-<p:sld xmlns:a="http://schemas.openxmlformats.org/drawingml/2006/main" xmlns:r="http://schemas.openxmlformats.org/officeDocument/2006/relationships" xmlns:p="http://schemas.openxmlformats.org/presentationml/2006/main">
+<p:sld xmlns:a="http://schemas.openxmlformats.org/drawingml/2006/main" xmlns:p="http://schemas.openxmlformats.org/presentationml/2006/main" xmlns:r="http://schemas.openxmlformats.org/officeDocument/2006/relationships">
   <p:cSld>
     <p:spTree>
       <p:nvGrpSpPr>
@@ -6480,7 +6486,7 @@
         </p:nvSpPr>
         <p:spPr/>
         <p:txBody>
-          <a:bodyPr wrap="square" lIns="0" tIns="0" rIns="0" bIns="0" anchor="ctr"/>
+          <a:bodyPr wrap="square" anchor="ctr" lIns="0" rIns="0" tIns="0" bIns="0"/>
           <a:lstStyle/>
           <a:p>
             <a:pPr algn="l">
@@ -6499,11 +6505,6 @@
               </a:rPr>
               <a:t>三项正式方案的单次结果总览</a:t>
             </a:r>
-            <a:endParaRPr sz="2800" b="1" i="0" u="none">
-              <a:solidFill>
-                <a:srgbClr val="003366"/>
-              </a:solidFill>
-            </a:endParaRPr>
           </a:p>
         </p:txBody>
       </p:sp>
@@ -6514,12 +6515,53 @@
             <a:spLocks noGrp="1"/>
           </p:cNvSpPr>
           <p:nvPr>
-            <p:ph type="body" sz="half" idx="1"/>
+            <p:ph type="body" idx="1" sz="half"/>
           </p:nvPr>
         </p:nvSpPr>
         <p:spPr/>
         <p:txBody>
-          <a:bodyPr wrap="square" tIns="91440" bIns="91440" anchor="t"/>
+          <a:bodyPr/>
+          <a:lstStyle/>
+          <a:p/>
+        </p:txBody>
+      </p:sp>
+      <p:sp>
+        <p:nvSpPr>
+          <p:cNvPr id="4" name="Content Placeholder 3"/>
+          <p:cNvSpPr>
+            <a:spLocks noGrp="1"/>
+          </p:cNvSpPr>
+          <p:nvPr>
+            <p:ph idx="2" sz="half"/>
+          </p:nvPr>
+        </p:nvSpPr>
+        <p:spPr/>
+        <p:txBody>
+          <a:bodyPr/>
+          <a:lstStyle/>
+          <a:p/>
+        </p:txBody>
+      </p:sp>
+      <p:sp>
+        <p:nvSpPr>
+          <p:cNvPr id="5" name="TextBox 4"/>
+          <p:cNvSpPr txBox="1"/>
+          <p:nvPr/>
+        </p:nvSpPr>
+        <p:spPr>
+          <a:xfrm>
+            <a:off x="768096" y="1847088"/>
+            <a:ext cx="4160520" cy="4005072"/>
+          </a:xfrm>
+          <a:prstGeom prst="rect">
+            <a:avLst/>
+          </a:prstGeom>
+          <a:noFill/>
+        </p:spPr>
+        <p:txBody>
+          <a:bodyPr wrap="square" anchor="t" tIns="91440" bIns="91440">
+            <a:spAutoFit/>
+          </a:bodyPr>
           <a:lstStyle/>
           <a:p>
             <a:pPr algn="l">
@@ -6536,13 +6578,8 @@
                   <a:srgbClr val="002A57"/>
                 </a:solidFill>
               </a:rPr>
-              <a:t>基于 2026-03-13 同日 final-comparison 数据集，在统一基线下比较三项正式方案。</a:t>
-            </a:r>
-            <a:endParaRPr sz="1500" b="1" i="0" u="none">
-              <a:solidFill>
-                <a:srgbClr val="002A57"/>
-              </a:solidFill>
-            </a:endParaRPr>
+              <a:t>统一 baseline 下，同日三项正式方案的收益层级已经足够清晰。</a:t>
+            </a:r>
           </a:p>
           <a:p>
             <a:pPr algn="l">
@@ -6559,13 +6596,8 @@
                   <a:srgbClr val="003366"/>
                 </a:solidFill>
               </a:rPr>
-              <a:t>方案一：JIT 热度阈值调整，pmd +3.30%，方向正确但稳定性不足。</a:t>
-            </a:r>
-            <a:endParaRPr sz="1600" b="0" i="0" u="none">
-              <a:solidFill>
-                <a:srgbClr val="003366"/>
-              </a:solidFill>
-            </a:endParaRPr>
+              <a:t>方案一：JIT 热度阈值调整，pmd +3.30%，但复测稳定性不足。</a:t>
+            </a:r>
           </a:p>
           <a:p>
             <a:pPr algn="l">
@@ -6582,13 +6614,8 @@
                   <a:srgbClr val="003366"/>
                 </a:solidFill>
               </a:rPr>
-              <a:t>方案二：字符串搬运批量化，pmd +0.86%，但 lu.small -8.89%。</a:t>
-            </a:r>
-            <a:endParaRPr sz="1600" b="0" i="0" u="none">
-              <a:solidFill>
-                <a:srgbClr val="003366"/>
-              </a:solidFill>
-            </a:endParaRPr>
+              <a:t>方案二：字符串搬运批量化，pmd +0.86%，同时 lu.small -8.89%。</a:t>
+            </a:r>
           </a:p>
           <a:p>
             <a:pPr algn="l">
@@ -6605,74 +6632,29 @@
                   <a:srgbClr val="003366"/>
                 </a:solidFill>
               </a:rPr>
-              <a:t>方案三：LSX 浮点 SIMD，lu.small +44.40%，当前证据最完整。</a:t>
-            </a:r>
-            <a:endParaRPr sz="1600" b="0" i="0" u="none">
-              <a:solidFill>
-                <a:srgbClr val="003366"/>
-              </a:solidFill>
-            </a:endParaRPr>
-          </a:p>
-          <a:p>
-            <a:pPr algn="l">
-              <a:spcBef>
-                <a:spcPts val="0"/>
-              </a:spcBef>
-              <a:spcAft>
-                <a:spcPts val="500"/>
-              </a:spcAft>
-            </a:pPr>
-            <a:r>
-              <a:rPr sz="1600" b="0" i="0" u="none">
-                <a:solidFill>
-                  <a:srgbClr val="003366"/>
-                </a:solidFill>
-              </a:rPr>
-              <a:t>判断标准不是“谁能提分”，而是“谁能形成可解释、可复现结论”。</a:t>
-            </a:r>
-            <a:endParaRPr sz="1600" b="0" i="0" u="none">
-              <a:solidFill>
-                <a:srgbClr val="003366"/>
-              </a:solidFill>
-            </a:endParaRPr>
-          </a:p>
-        </p:txBody>
-      </p:sp>
-      <p:sp>
-        <p:nvSpPr>
-          <p:cNvPr id="4" name="Content Placeholder 3"/>
-          <p:cNvSpPr>
-            <a:spLocks noGrp="1"/>
-          </p:cNvSpPr>
-          <p:nvPr>
-            <p:ph sz="half" idx="2"/>
-          </p:nvPr>
-        </p:nvSpPr>
-        <p:spPr/>
-        <p:txBody>
-          <a:bodyPr/>
-          <a:lstStyle/>
-          <a:p/>
+              <a:t>方案三：LSX 浮点 SIMD，lu.small +44.40%，且证据链最完整。</a:t>
+            </a:r>
+          </a:p>
         </p:txBody>
       </p:sp>
       <p:pic>
         <p:nvPicPr>
-          <p:cNvPr id="5" name="Picture 4" descr="final-comparison-speedup.png"/>
+          <p:cNvPr id="6" name="Picture 5" descr="final-comparison-speedup.png"/>
           <p:cNvPicPr>
             <a:picLocks noChangeAspect="1"/>
           </p:cNvPicPr>
           <p:nvPr/>
         </p:nvPicPr>
         <p:blipFill>
-          <a:blip r:embed="rId1"/>
+          <a:blip r:embed="rId2"/>
           <a:stretch>
             <a:fillRect/>
           </a:stretch>
         </p:blipFill>
         <p:spPr>
           <a:xfrm>
-            <a:off x="5541478" y="2996517"/>
-            <a:ext cx="4652105" cy="2009552"/>
+            <a:off x="5010912" y="2771814"/>
+            <a:ext cx="5074920" cy="2192194"/>
           </a:xfrm>
           <a:prstGeom prst="rect">
             <a:avLst/>
@@ -6688,7 +6670,7 @@
 </file>
 
 <file path=ppt/slides/slide11.xml><?xml version="1.0" encoding="utf-8"?>
-<p:sld xmlns:a="http://schemas.openxmlformats.org/drawingml/2006/main" xmlns:r="http://schemas.openxmlformats.org/officeDocument/2006/relationships" xmlns:p="http://schemas.openxmlformats.org/presentationml/2006/main">
+<p:sld xmlns:a="http://schemas.openxmlformats.org/drawingml/2006/main" xmlns:p="http://schemas.openxmlformats.org/presentationml/2006/main" xmlns:r="http://schemas.openxmlformats.org/officeDocument/2006/relationships">
   <p:cSld>
     <p:spTree>
       <p:nvGrpSpPr>
@@ -6709,7 +6691,7 @@
         </p:nvSpPr>
         <p:spPr/>
         <p:txBody>
-          <a:bodyPr wrap="square" lIns="0" tIns="0" rIns="0" bIns="0" anchor="ctr"/>
+          <a:bodyPr wrap="square" anchor="ctr" lIns="0" rIns="0" tIns="0" bIns="0"/>
           <a:lstStyle/>
           <a:p>
             <a:pPr algn="l">
@@ -6728,11 +6710,6 @@
               </a:rPr>
               <a:t>稳定主结论：LSX 浮点 SIMD 向量化</a:t>
             </a:r>
-            <a:endParaRPr sz="2800" b="1" i="0" u="none">
-              <a:solidFill>
-                <a:srgbClr val="003366"/>
-              </a:solidFill>
-            </a:endParaRPr>
           </a:p>
         </p:txBody>
       </p:sp>
@@ -6743,12 +6720,53 @@
             <a:spLocks noGrp="1"/>
           </p:cNvSpPr>
           <p:nvPr>
-            <p:ph type="body" sz="half" idx="1"/>
+            <p:ph type="body" idx="1" sz="half"/>
           </p:nvPr>
         </p:nvSpPr>
         <p:spPr/>
         <p:txBody>
-          <a:bodyPr wrap="square" tIns="91440" bIns="91440" anchor="t"/>
+          <a:bodyPr/>
+          <a:lstStyle/>
+          <a:p/>
+        </p:txBody>
+      </p:sp>
+      <p:sp>
+        <p:nvSpPr>
+          <p:cNvPr id="4" name="Content Placeholder 3"/>
+          <p:cNvSpPr>
+            <a:spLocks noGrp="1"/>
+          </p:cNvSpPr>
+          <p:nvPr>
+            <p:ph idx="2" sz="half"/>
+          </p:nvPr>
+        </p:nvSpPr>
+        <p:spPr/>
+        <p:txBody>
+          <a:bodyPr/>
+          <a:lstStyle/>
+          <a:p/>
+        </p:txBody>
+      </p:sp>
+      <p:sp>
+        <p:nvSpPr>
+          <p:cNvPr id="5" name="TextBox 4"/>
+          <p:cNvSpPr txBox="1"/>
+          <p:nvPr/>
+        </p:nvSpPr>
+        <p:spPr>
+          <a:xfrm>
+            <a:off x="768096" y="1847088"/>
+            <a:ext cx="4160520" cy="3840480"/>
+          </a:xfrm>
+          <a:prstGeom prst="rect">
+            <a:avLst/>
+          </a:prstGeom>
+          <a:noFill/>
+        </p:spPr>
+        <p:txBody>
+          <a:bodyPr wrap="square" anchor="t" tIns="91440" bIns="91440">
+            <a:spAutoFit/>
+          </a:bodyPr>
           <a:lstStyle/>
           <a:p>
             <a:pPr algn="l">
@@ -6765,13 +6783,8 @@
                   <a:srgbClr val="002A57"/>
                 </a:solidFill>
               </a:rPr>
-              <a:t>为 optimizing compiler 补齐最小可用 LSX 浮点 lowering，是当前最稳的主收益来源。</a:t>
-            </a:r>
-            <a:endParaRPr sz="1500" b="1" i="0" u="none">
-              <a:solidFill>
-                <a:srgbClr val="002A57"/>
-              </a:solidFill>
-            </a:endParaRPr>
+              <a:t>LSX 浮点 SIMD 是当前唯一同时满足收益、解释性与复现性的正式方案。</a:t>
+            </a:r>
           </a:p>
           <a:p>
             <a:pPr algn="l">
@@ -6788,13 +6801,8 @@
                   <a:srgbClr val="003366"/>
                 </a:solidFill>
               </a:rPr>
-              <a:t>覆盖 float32/float64 的 load/store/replicate/add/sub/mul。</a:t>
-            </a:r>
-            <a:endParaRPr sz="1600" b="0" i="0" u="none">
-              <a:solidFill>
-                <a:srgbClr val="003366"/>
-              </a:solidFill>
-            </a:endParaRPr>
+              <a:t>补齐 float32/float64 的核心 lowering，直接命中 lu.small 主热点。</a:t>
+            </a:r>
           </a:p>
           <a:p>
             <a:pPr algn="l">
@@ -6811,13 +6819,8 @@
                   <a:srgbClr val="003366"/>
                 </a:solidFill>
               </a:rPr>
-              <a:t>直接命中 scimark.lu.small 的规则 dense linear algebra 内核。</a:t>
-            </a:r>
-            <a:endParaRPr sz="1600" b="0" i="0" u="none">
-              <a:solidFill>
-                <a:srgbClr val="003366"/>
-              </a:solidFill>
-            </a:endParaRPr>
+              <a:t>正式单次结果：46.22 → 66.74 ops/m，增益 +44.40%。</a:t>
+            </a:r>
           </a:p>
           <a:p>
             <a:pPr algn="l">
@@ -6834,66 +6837,21 @@
                   <a:srgbClr val="003366"/>
                 </a:solidFill>
               </a:rPr>
-              <a:t>正式单次结果：46.22 → 66.74 ops/m（+44.40%）。</a:t>
-            </a:r>
-            <a:endParaRPr sz="1600" b="0" i="0" u="none">
-              <a:solidFill>
-                <a:srgbClr val="003366"/>
-              </a:solidFill>
-            </a:endParaRPr>
-          </a:p>
-          <a:p>
-            <a:pPr algn="l">
-              <a:spcBef>
-                <a:spcPts val="0"/>
-              </a:spcBef>
-              <a:spcAft>
-                <a:spcPts val="500"/>
-              </a:spcAft>
-            </a:pPr>
-            <a:r>
-              <a:rPr sz="1600" b="0" i="0" u="none">
-                <a:solidFill>
-                  <a:srgbClr val="003366"/>
-                </a:solidFill>
-              </a:rPr>
-              <a:t>同日 3 轮复测：均值 +45.70%，标准差仅 0.50 ops/m。</a:t>
-            </a:r>
-            <a:endParaRPr sz="1600" b="0" i="0" u="none">
-              <a:solidFill>
-                <a:srgbClr val="003366"/>
-              </a:solidFill>
-            </a:endParaRPr>
-          </a:p>
-        </p:txBody>
-      </p:sp>
-      <p:sp>
-        <p:nvSpPr>
-          <p:cNvPr id="4" name="Content Placeholder 3"/>
-          <p:cNvSpPr>
-            <a:spLocks noGrp="1"/>
-          </p:cNvSpPr>
-          <p:nvPr>
-            <p:ph sz="half" idx="2"/>
-          </p:nvPr>
-        </p:nvSpPr>
-        <p:spPr/>
-        <p:txBody>
-          <a:bodyPr/>
-          <a:lstStyle/>
-          <a:p/>
-        </p:txBody>
-      </p:sp>
-      <p:sp>
-        <p:nvSpPr>
-          <p:cNvPr id="5" name="Rounded Rectangle 4"/>
+              <a:t>同日 3 轮复测均值 +45.70%，标准差仅 0.50 ops/m。</a:t>
+            </a:r>
+          </a:p>
+        </p:txBody>
+      </p:sp>
+      <p:sp>
+        <p:nvSpPr>
+          <p:cNvPr id="6" name="Rounded Rectangle 5"/>
           <p:cNvSpPr/>
           <p:nvPr/>
         </p:nvSpPr>
         <p:spPr>
           <a:xfrm>
-            <a:off x="868680" y="5166360"/>
-            <a:ext cx="1554480" cy="658368"/>
+            <a:off x="868680" y="5084064"/>
+            <a:ext cx="1755648" cy="694944"/>
           </a:xfrm>
           <a:prstGeom prst="roundRect">
             <a:avLst/>
@@ -6922,7 +6880,7 @@
           </a:fontRef>
         </p:style>
         <p:txBody>
-          <a:bodyPr wrap="square" lIns="45720" rIns="45720" rtlCol="0" anchor="ctr"/>
+          <a:bodyPr rtlCol="0" anchor="ctr" wrap="square" lIns="45720" rIns="45720"/>
           <a:lstStyle/>
           <a:p>
             <a:pPr algn="ctr">
@@ -6941,11 +6899,6 @@
               </a:rPr>
               <a:t>单次增益</a:t>
             </a:r>
-            <a:endParaRPr sz="1300" b="1" i="0" u="none">
-              <a:solidFill>
-                <a:srgbClr val="003366"/>
-              </a:solidFill>
-            </a:endParaRPr>
           </a:p>
           <a:p>
             <a:pPr algn="ctr">
@@ -6964,24 +6917,19 @@
               </a:rPr>
               <a:t>+44.40%</a:t>
             </a:r>
-            <a:endParaRPr sz="2000" b="1" i="0" u="none">
-              <a:solidFill>
-                <a:srgbClr val="002A57"/>
-              </a:solidFill>
-            </a:endParaRPr>
-          </a:p>
-        </p:txBody>
-      </p:sp>
-      <p:sp>
-        <p:nvSpPr>
-          <p:cNvPr id="6" name="Rounded Rectangle 5"/>
+          </a:p>
+        </p:txBody>
+      </p:sp>
+      <p:sp>
+        <p:nvSpPr>
+          <p:cNvPr id="7" name="Rounded Rectangle 6"/>
           <p:cNvSpPr/>
           <p:nvPr/>
         </p:nvSpPr>
         <p:spPr>
           <a:xfrm>
-            <a:off x="2560320" y="5166360"/>
-            <a:ext cx="1737360" cy="658368"/>
+            <a:off x="2788920" y="5084064"/>
+            <a:ext cx="1920240" cy="694944"/>
           </a:xfrm>
           <a:prstGeom prst="roundRect">
             <a:avLst/>
@@ -7010,7 +6958,7 @@
           </a:fontRef>
         </p:style>
         <p:txBody>
-          <a:bodyPr wrap="square" lIns="45720" rIns="45720" rtlCol="0" anchor="ctr"/>
+          <a:bodyPr rtlCol="0" anchor="ctr" wrap="square" lIns="45720" rIns="45720"/>
           <a:lstStyle/>
           <a:p>
             <a:pPr algn="ctr">
@@ -7029,11 +6977,6 @@
               </a:rPr>
               <a:t>复测均值</a:t>
             </a:r>
-            <a:endParaRPr sz="1300" b="1" i="0" u="none">
-              <a:solidFill>
-                <a:srgbClr val="003366"/>
-              </a:solidFill>
-            </a:endParaRPr>
           </a:p>
           <a:p>
             <a:pPr algn="ctr">
@@ -7052,11 +6995,593 @@
               </a:rPr>
               <a:t>+45.70%</a:t>
             </a:r>
-            <a:endParaRPr sz="2000" b="1" i="0" u="none">
-              <a:solidFill>
-                <a:srgbClr val="002A57"/>
-              </a:solidFill>
-            </a:endParaRPr>
+          </a:p>
+        </p:txBody>
+      </p:sp>
+      <p:pic>
+        <p:nvPicPr>
+          <p:cNvPr id="8" name="Picture 7" descr="statistical-validation-stripplot.png"/>
+          <p:cNvPicPr>
+            <a:picLocks noChangeAspect="1"/>
+          </p:cNvPicPr>
+          <p:nvPr/>
+        </p:nvPicPr>
+        <p:blipFill>
+          <a:blip r:embed="rId2"/>
+          <a:stretch>
+            <a:fillRect/>
+          </a:stretch>
+        </p:blipFill>
+        <p:spPr>
+          <a:xfrm>
+            <a:off x="5010912" y="2756311"/>
+            <a:ext cx="5074920" cy="2223201"/>
+          </a:xfrm>
+          <a:prstGeom prst="rect">
+            <a:avLst/>
+          </a:prstGeom>
+        </p:spPr>
+      </p:pic>
+    </p:spTree>
+  </p:cSld>
+  <p:clrMapOvr>
+    <a:masterClrMapping/>
+  </p:clrMapOvr>
+</p:sld>
+</file>
+
+<file path=ppt/slides/slide12.xml><?xml version="1.0" encoding="utf-8"?>
+<p:sld xmlns:a="http://schemas.openxmlformats.org/drawingml/2006/main" xmlns:p="http://schemas.openxmlformats.org/presentationml/2006/main" xmlns:r="http://schemas.openxmlformats.org/officeDocument/2006/relationships">
+  <p:cSld>
+    <p:spTree>
+      <p:nvGrpSpPr>
+        <p:cNvPr id="1" name=""/>
+        <p:cNvGrpSpPr/>
+        <p:nvPr/>
+      </p:nvGrpSpPr>
+      <p:grpSpPr/>
+      <p:sp>
+        <p:nvSpPr>
+          <p:cNvPr id="2" name="Title 1"/>
+          <p:cNvSpPr>
+            <a:spLocks noGrp="1"/>
+          </p:cNvSpPr>
+          <p:nvPr>
+            <p:ph type="title"/>
+          </p:nvPr>
+        </p:nvSpPr>
+        <p:spPr/>
+        <p:txBody>
+          <a:bodyPr wrap="square" anchor="ctr" lIns="0" rIns="0" tIns="0" bIns="0"/>
+          <a:lstStyle/>
+          <a:p>
+            <a:pPr algn="l">
+              <a:spcBef>
+                <a:spcPts val="0"/>
+              </a:spcBef>
+              <a:spcAft>
+                <a:spcPts val="500"/>
+              </a:spcAft>
+            </a:pPr>
+            <a:r>
+              <a:rPr sz="2800" b="1" i="0" u="none">
+                <a:solidFill>
+                  <a:srgbClr val="003366"/>
+                </a:solidFill>
+              </a:rPr>
+              <a:t>收益边界与方法论结论</a:t>
+            </a:r>
+          </a:p>
+        </p:txBody>
+      </p:sp>
+      <p:sp>
+        <p:nvSpPr>
+          <p:cNvPr id="3" name="Text Placeholder 2"/>
+          <p:cNvSpPr>
+            <a:spLocks noGrp="1"/>
+          </p:cNvSpPr>
+          <p:nvPr>
+            <p:ph type="body" idx="1" sz="half"/>
+          </p:nvPr>
+        </p:nvSpPr>
+        <p:spPr/>
+        <p:txBody>
+          <a:bodyPr wrap="square" anchor="t" tIns="91440" bIns="91440"/>
+          <a:lstStyle/>
+          <a:p>
+            <a:pPr algn="l">
+              <a:spcBef>
+                <a:spcPts val="0"/>
+              </a:spcBef>
+              <a:spcAft>
+                <a:spcPts val="800"/>
+              </a:spcAft>
+            </a:pPr>
+            <a:r>
+              <a:rPr sz="1500" b="1" i="0" u="none">
+                <a:solidFill>
+                  <a:srgbClr val="002A57"/>
+                </a:solidFill>
+              </a:rPr>
+              <a:t>优化是否值得保留，取决于收益边界是否清晰、证据链是否完整。</a:t>
+            </a:r>
+          </a:p>
+          <a:p>
+            <a:pPr algn="l">
+              <a:spcBef>
+                <a:spcPts val="0"/>
+              </a:spcBef>
+              <a:spcAft>
+                <a:spcPts val="500"/>
+              </a:spcAft>
+            </a:pPr>
+            <a:r>
+              <a:rPr sz="1600" b="0" i="0" u="none">
+                <a:solidFill>
+                  <a:srgbClr val="003366"/>
+                </a:solidFill>
+              </a:rPr>
+              <a:t>方案一在 pmd 上存在正收益样本，但复测均值尚未稳定转正。</a:t>
+            </a:r>
+          </a:p>
+          <a:p>
+            <a:pPr algn="l">
+              <a:spcBef>
+                <a:spcPts val="0"/>
+              </a:spcBef>
+              <a:spcAft>
+                <a:spcPts val="500"/>
+              </a:spcAft>
+            </a:pPr>
+            <a:r>
+              <a:rPr sz="1600" b="0" i="0" u="none">
+                <a:solidFill>
+                  <a:srgbClr val="003366"/>
+                </a:solidFill>
+              </a:rPr>
+              <a:t>方案二说明“局部热点下降”不等于“全局 benchmark 提升”。</a:t>
+            </a:r>
+          </a:p>
+          <a:p>
+            <a:pPr algn="l">
+              <a:spcBef>
+                <a:spcPts val="0"/>
+              </a:spcBef>
+              <a:spcAft>
+                <a:spcPts val="500"/>
+              </a:spcAft>
+            </a:pPr>
+            <a:r>
+              <a:rPr sz="1600" b="0" i="0" u="none">
+                <a:solidFill>
+                  <a:srgbClr val="003366"/>
+                </a:solidFill>
+              </a:rPr>
+              <a:t>方案三收益集中在规则浮点循环，并不会自动推广到所有数值 workload。</a:t>
+            </a:r>
+          </a:p>
+          <a:p>
+            <a:pPr algn="l">
+              <a:spcBef>
+                <a:spcPts val="0"/>
+              </a:spcBef>
+              <a:spcAft>
+                <a:spcPts val="500"/>
+              </a:spcAft>
+            </a:pPr>
+            <a:r>
+              <a:rPr sz="1600" b="0" i="0" u="none">
+                <a:solidFill>
+                  <a:srgbClr val="003366"/>
+                </a:solidFill>
+              </a:rPr>
+              <a:t>因此，LoongArch 平台 ART 优化应优先命中主导热点，并严格控制副作用。</a:t>
+            </a:r>
+          </a:p>
+        </p:txBody>
+      </p:sp>
+      <p:sp>
+        <p:nvSpPr>
+          <p:cNvPr id="4" name="Content Placeholder 3"/>
+          <p:cNvSpPr>
+            <a:spLocks noGrp="1"/>
+          </p:cNvSpPr>
+          <p:nvPr>
+            <p:ph idx="2" sz="half"/>
+          </p:nvPr>
+        </p:nvSpPr>
+        <p:spPr/>
+        <p:txBody>
+          <a:bodyPr/>
+          <a:lstStyle/>
+          <a:p/>
+        </p:txBody>
+      </p:sp>
+      <p:pic>
+        <p:nvPicPr>
+          <p:cNvPr id="5" name="Picture 4" descr="final-comparison-heatmap.png"/>
+          <p:cNvPicPr>
+            <a:picLocks noChangeAspect="1"/>
+          </p:cNvPicPr>
+          <p:nvPr/>
+        </p:nvPicPr>
+        <p:blipFill>
+          <a:blip r:embed="rId2"/>
+          <a:stretch>
+            <a:fillRect/>
+          </a:stretch>
+        </p:blipFill>
+        <p:spPr>
+          <a:xfrm>
+            <a:off x="5541478" y="3000524"/>
+            <a:ext cx="4652105" cy="2001539"/>
+          </a:xfrm>
+          <a:prstGeom prst="rect">
+            <a:avLst/>
+          </a:prstGeom>
+        </p:spPr>
+      </p:pic>
+    </p:spTree>
+  </p:cSld>
+  <p:clrMapOvr>
+    <a:masterClrMapping/>
+  </p:clrMapOvr>
+</p:sld>
+</file>
+
+<file path=ppt/slides/slide13.xml><?xml version="1.0" encoding="utf-8"?>
+<p:sld xmlns:a="http://schemas.openxmlformats.org/drawingml/2006/main" xmlns:p="http://schemas.openxmlformats.org/presentationml/2006/main" xmlns:r="http://schemas.openxmlformats.org/officeDocument/2006/relationships">
+  <p:cSld>
+    <p:spTree>
+      <p:nvGrpSpPr>
+        <p:cNvPr id="1" name=""/>
+        <p:cNvGrpSpPr/>
+        <p:nvPr/>
+      </p:nvGrpSpPr>
+      <p:grpSpPr/>
+      <p:sp>
+        <p:nvSpPr>
+          <p:cNvPr id="2" name="Title 1"/>
+          <p:cNvSpPr>
+            <a:spLocks noGrp="1"/>
+          </p:cNvSpPr>
+          <p:nvPr>
+            <p:ph type="title"/>
+          </p:nvPr>
+        </p:nvSpPr>
+        <p:spPr/>
+        <p:txBody>
+          <a:bodyPr wrap="square" anchor="ctr" lIns="0" rIns="0" tIns="0" bIns="0"/>
+          <a:lstStyle/>
+          <a:p>
+            <a:pPr algn="l">
+              <a:spcBef>
+                <a:spcPts val="0"/>
+              </a:spcBef>
+              <a:spcAft>
+                <a:spcPts val="500"/>
+              </a:spcAft>
+            </a:pPr>
+            <a:r>
+              <a:rPr sz="3000" b="1" i="0" u="none">
+                <a:solidFill>
+                  <a:srgbClr val="002A57"/>
+                </a:solidFill>
+              </a:rPr>
+              <a:t>四、总结与展望</a:t>
+            </a:r>
+          </a:p>
+        </p:txBody>
+      </p:sp>
+      <p:sp>
+        <p:nvSpPr>
+          <p:cNvPr id="3" name="Text Placeholder 2"/>
+          <p:cNvSpPr>
+            <a:spLocks noGrp="1"/>
+          </p:cNvSpPr>
+          <p:nvPr>
+            <p:ph type="body" idx="1"/>
+          </p:nvPr>
+        </p:nvSpPr>
+        <p:spPr/>
+        <p:txBody>
+          <a:bodyPr wrap="square" anchor="ctr" lIns="0" rIns="0" tIns="0" bIns="0"/>
+          <a:lstStyle/>
+          <a:p>
+            <a:pPr algn="l">
+              <a:spcBef>
+                <a:spcPts val="0"/>
+              </a:spcBef>
+              <a:spcAft>
+                <a:spcPts val="500"/>
+              </a:spcAft>
+            </a:pPr>
+            <a:r>
+              <a:rPr sz="1800" b="0" i="0" u="none">
+                <a:solidFill>
+                  <a:srgbClr val="5B6470"/>
+                </a:solidFill>
+              </a:rPr>
+              <a:t>论文结论、方法价值与后续工作</a:t>
+            </a:r>
+          </a:p>
+        </p:txBody>
+      </p:sp>
+    </p:spTree>
+  </p:cSld>
+  <p:clrMapOvr>
+    <a:masterClrMapping/>
+  </p:clrMapOvr>
+</p:sld>
+</file>
+
+<file path=ppt/slides/slide14.xml><?xml version="1.0" encoding="utf-8"?>
+<p:sld xmlns:a="http://schemas.openxmlformats.org/drawingml/2006/main" xmlns:p="http://schemas.openxmlformats.org/presentationml/2006/main" xmlns:r="http://schemas.openxmlformats.org/officeDocument/2006/relationships">
+  <p:cSld>
+    <p:spTree>
+      <p:nvGrpSpPr>
+        <p:cNvPr id="1" name=""/>
+        <p:cNvGrpSpPr/>
+        <p:nvPr/>
+      </p:nvGrpSpPr>
+      <p:grpSpPr/>
+      <p:sp>
+        <p:nvSpPr>
+          <p:cNvPr id="2" name="Title 1"/>
+          <p:cNvSpPr>
+            <a:spLocks noGrp="1"/>
+          </p:cNvSpPr>
+          <p:nvPr>
+            <p:ph type="title"/>
+          </p:nvPr>
+        </p:nvSpPr>
+        <p:spPr/>
+        <p:txBody>
+          <a:bodyPr wrap="square" anchor="ctr" lIns="0" rIns="0" tIns="0" bIns="0"/>
+          <a:lstStyle/>
+          <a:p>
+            <a:pPr algn="l">
+              <a:spcBef>
+                <a:spcPts val="0"/>
+              </a:spcBef>
+              <a:spcAft>
+                <a:spcPts val="500"/>
+              </a:spcAft>
+            </a:pPr>
+            <a:r>
+              <a:rPr sz="2800" b="1" i="0" u="none">
+                <a:solidFill>
+                  <a:srgbClr val="003366"/>
+                </a:solidFill>
+              </a:rPr>
+              <a:t>总结与展望</a:t>
+            </a:r>
+          </a:p>
+        </p:txBody>
+      </p:sp>
+      <p:sp>
+        <p:nvSpPr>
+          <p:cNvPr id="3" name="Text Placeholder 2"/>
+          <p:cNvSpPr>
+            <a:spLocks noGrp="1"/>
+          </p:cNvSpPr>
+          <p:nvPr>
+            <p:ph type="body" idx="1"/>
+          </p:nvPr>
+        </p:nvSpPr>
+        <p:spPr/>
+        <p:txBody>
+          <a:bodyPr wrap="square" anchor="ctr" lIns="0" rIns="0" tIns="0" bIns="0"/>
+          <a:lstStyle/>
+          <a:p>
+            <a:pPr algn="l">
+              <a:spcBef>
+                <a:spcPts val="0"/>
+              </a:spcBef>
+              <a:spcAft>
+                <a:spcPts val="500"/>
+              </a:spcAft>
+            </a:pPr>
+            <a:r>
+              <a:rPr sz="1900" b="1" i="0" u="none">
+                <a:solidFill>
+                  <a:srgbClr val="002A57"/>
+                </a:solidFill>
+              </a:rPr>
+              <a:t>论文主结论</a:t>
+            </a:r>
+          </a:p>
+        </p:txBody>
+      </p:sp>
+      <p:sp>
+        <p:nvSpPr>
+          <p:cNvPr id="4" name="Content Placeholder 3"/>
+          <p:cNvSpPr>
+            <a:spLocks noGrp="1"/>
+          </p:cNvSpPr>
+          <p:nvPr>
+            <p:ph idx="2" sz="half"/>
+          </p:nvPr>
+        </p:nvSpPr>
+        <p:spPr/>
+        <p:txBody>
+          <a:bodyPr wrap="square" anchor="t" tIns="91440" bIns="91440"/>
+          <a:lstStyle/>
+          <a:p>
+            <a:pPr algn="l">
+              <a:spcBef>
+                <a:spcPts val="0"/>
+              </a:spcBef>
+              <a:spcAft>
+                <a:spcPts val="500"/>
+              </a:spcAft>
+            </a:pPr>
+            <a:r>
+              <a:rPr sz="1600" b="0" i="0" u="none">
+                <a:solidFill>
+                  <a:srgbClr val="003366"/>
+                </a:solidFill>
+              </a:rPr>
+              <a:t>AOSP 15 ART 在 LoongArch 平台上的执行引擎适配是可行的。</a:t>
+            </a:r>
+          </a:p>
+          <a:p>
+            <a:pPr algn="l">
+              <a:spcBef>
+                <a:spcPts val="0"/>
+              </a:spcBef>
+              <a:spcAft>
+                <a:spcPts val="500"/>
+              </a:spcAft>
+            </a:pPr>
+            <a:r>
+              <a:rPr sz="1600" b="0" i="0" u="none">
+                <a:solidFill>
+                  <a:srgbClr val="003366"/>
+                </a:solidFill>
+              </a:rPr>
+              <a:t>统一验证链路与固定 baseline 是性能研究具备解释价值的前提。</a:t>
+            </a:r>
+          </a:p>
+          <a:p>
+            <a:pPr algn="l">
+              <a:spcBef>
+                <a:spcPts val="0"/>
+              </a:spcBef>
+              <a:spcAft>
+                <a:spcPts val="500"/>
+              </a:spcAft>
+            </a:pPr>
+            <a:r>
+              <a:rPr sz="1600" b="0" i="0" u="none">
+                <a:solidFill>
+                  <a:srgbClr val="003366"/>
+                </a:solidFill>
+              </a:rPr>
+              <a:t>只有命中主导热点、边界清晰且可复现的方案才值得保留。</a:t>
+            </a:r>
+          </a:p>
+        </p:txBody>
+      </p:sp>
+      <p:sp>
+        <p:nvSpPr>
+          <p:cNvPr id="5" name="Text Placeholder 4"/>
+          <p:cNvSpPr>
+            <a:spLocks noGrp="1"/>
+          </p:cNvSpPr>
+          <p:nvPr>
+            <p:ph type="body" idx="3" sz="quarter"/>
+          </p:nvPr>
+        </p:nvSpPr>
+        <p:spPr/>
+        <p:txBody>
+          <a:bodyPr wrap="square" anchor="ctr" lIns="0" rIns="0" tIns="0" bIns="0"/>
+          <a:lstStyle/>
+          <a:p>
+            <a:pPr algn="l">
+              <a:spcBef>
+                <a:spcPts val="0"/>
+              </a:spcBef>
+              <a:spcAft>
+                <a:spcPts val="500"/>
+              </a:spcAft>
+            </a:pPr>
+            <a:r>
+              <a:rPr sz="1900" b="1" i="0" u="none">
+                <a:solidFill>
+                  <a:srgbClr val="002A57"/>
+                </a:solidFill>
+              </a:rPr>
+              <a:t>后续工作</a:t>
+            </a:r>
+          </a:p>
+        </p:txBody>
+      </p:sp>
+      <p:sp>
+        <p:nvSpPr>
+          <p:cNvPr id="6" name="Content Placeholder 5"/>
+          <p:cNvSpPr>
+            <a:spLocks noGrp="1"/>
+          </p:cNvSpPr>
+          <p:nvPr>
+            <p:ph idx="4" sz="quarter"/>
+          </p:nvPr>
+        </p:nvSpPr>
+        <p:spPr/>
+        <p:txBody>
+          <a:bodyPr wrap="square" anchor="t" tIns="91440" bIns="91440"/>
+          <a:lstStyle/>
+          <a:p>
+            <a:pPr algn="l">
+              <a:spcBef>
+                <a:spcPts val="0"/>
+              </a:spcBef>
+              <a:spcAft>
+                <a:spcPts val="500"/>
+              </a:spcAft>
+            </a:pPr>
+            <a:r>
+              <a:rPr sz="1600" b="0" i="0" u="none">
+                <a:solidFill>
+                  <a:srgbClr val="003366"/>
+                </a:solidFill>
+              </a:rPr>
+              <a:t>完善 AOT / 安装期编译支持。</a:t>
+            </a:r>
+          </a:p>
+          <a:p>
+            <a:pPr algn="l">
+              <a:spcBef>
+                <a:spcPts val="0"/>
+              </a:spcBef>
+              <a:spcAft>
+                <a:spcPts val="500"/>
+              </a:spcAft>
+            </a:pPr>
+            <a:r>
+              <a:rPr sz="1600" b="0" i="0" u="none">
+                <a:solidFill>
+                  <a:srgbClr val="003366"/>
+                </a:solidFill>
+              </a:rPr>
+              <a:t>扩展 LSX / LASX 能力与更高层门控。</a:t>
+            </a:r>
+          </a:p>
+          <a:p>
+            <a:pPr algn="l">
+              <a:spcBef>
+                <a:spcPts val="0"/>
+              </a:spcBef>
+              <a:spcAft>
+                <a:spcPts val="500"/>
+              </a:spcAft>
+            </a:pPr>
+            <a:r>
+              <a:rPr sz="1600" b="0" i="0" u="none">
+                <a:solidFill>
+                  <a:srgbClr val="003366"/>
+                </a:solidFill>
+              </a:rPr>
+              <a:t>引入更多 benchmark 与应用级验证。</a:t>
+            </a:r>
+          </a:p>
+          <a:p>
+            <a:pPr algn="l">
+              <a:spcBef>
+                <a:spcPts val="0"/>
+              </a:spcBef>
+              <a:spcAft>
+                <a:spcPts val="500"/>
+              </a:spcAft>
+            </a:pPr>
+            <a:r>
+              <a:rPr sz="1600" b="0" i="0" u="none">
+                <a:solidFill>
+                  <a:srgbClr val="003366"/>
+                </a:solidFill>
+              </a:rPr>
+              <a:t>增强低扰动观测与运行时因果分析。</a:t>
+            </a:r>
           </a:p>
         </p:txBody>
       </p:sp>
@@ -7068,14 +7593,14 @@
         </p:nvSpPr>
         <p:spPr>
           <a:xfrm>
-            <a:off x="4480560" y="5166360"/>
-            <a:ext cx="1325880" cy="658368"/>
+            <a:off x="841248" y="5596128"/>
+            <a:ext cx="8732520" cy="347472"/>
           </a:xfrm>
           <a:prstGeom prst="roundRect">
             <a:avLst/>
           </a:prstGeom>
           <a:solidFill>
-            <a:srgbClr val="DCEFD8"/>
+            <a:srgbClr val="F7FBFB"/>
           </a:solidFill>
           <a:ln w="15240">
             <a:solidFill>
@@ -7098,31 +7623,8 @@
           </a:fontRef>
         </p:style>
         <p:txBody>
-          <a:bodyPr wrap="square" lIns="45720" rIns="45720" rtlCol="0" anchor="ctr"/>
-          <a:lstStyle/>
-          <a:p>
-            <a:pPr algn="ctr">
-              <a:spcBef>
-                <a:spcPts val="0"/>
-              </a:spcBef>
-              <a:spcAft>
-                <a:spcPts val="200"/>
-              </a:spcAft>
-            </a:pPr>
-            <a:r>
-              <a:rPr sz="1300" b="1" i="0" u="none">
-                <a:solidFill>
-                  <a:srgbClr val="003366"/>
-                </a:solidFill>
-              </a:rPr>
-              <a:t>标准差</a:t>
-            </a:r>
-            <a:endParaRPr sz="1300" b="1" i="0" u="none">
-              <a:solidFill>
-                <a:srgbClr val="003366"/>
-              </a:solidFill>
-            </a:endParaRPr>
-          </a:p>
+          <a:bodyPr rtlCol="0" anchor="ctr" wrap="square" lIns="18288" rIns="18288" tIns="18288" bIns="18288"/>
+          <a:lstStyle/>
           <a:p>
             <a:pPr algn="ctr">
               <a:spcBef>
@@ -7133,45 +7635,16 @@
               </a:spcAft>
             </a:pPr>
             <a:r>
-              <a:rPr sz="2000" b="1" i="0" u="none">
+              <a:rPr sz="1300" b="1" i="0" u="none">
                 <a:solidFill>
                   <a:srgbClr val="002A57"/>
                 </a:solidFill>
               </a:rPr>
-              <a:t>0.50</a:t>
-            </a:r>
-            <a:endParaRPr sz="2000" b="1" i="0" u="none">
-              <a:solidFill>
-                <a:srgbClr val="002A57"/>
-              </a:solidFill>
-            </a:endParaRPr>
-          </a:p>
-        </p:txBody>
-      </p:sp>
-      <p:pic>
-        <p:nvPicPr>
-          <p:cNvPr id="8" name="Picture 7" descr="statistical-validation-stripplot.png"/>
-          <p:cNvPicPr>
-            <a:picLocks noChangeAspect="1"/>
-          </p:cNvPicPr>
-          <p:nvPr/>
-        </p:nvPicPr>
-        <p:blipFill>
-          <a:blip r:embed="rId1"/>
-          <a:stretch>
-            <a:fillRect/>
-          </a:stretch>
-        </p:blipFill>
-        <p:spPr>
-          <a:xfrm>
-            <a:off x="5541478" y="2982305"/>
-            <a:ext cx="4652105" cy="2037976"/>
-          </a:xfrm>
-          <a:prstGeom prst="rect">
-            <a:avLst/>
-          </a:prstGeom>
-        </p:spPr>
-      </p:pic>
+              <a:t>本文的核心产出不仅是工程闭环，更是“什么值得保留、为什么成立、边界在哪里”的研究方法。</a:t>
+            </a:r>
+          </a:p>
+        </p:txBody>
+      </p:sp>
     </p:spTree>
   </p:cSld>
   <p:clrMapOvr>
@@ -7180,8 +7653,8 @@
 </p:sld>
 </file>
 
-<file path=ppt/slides/slide12.xml><?xml version="1.0" encoding="utf-8"?>
-<p:sld xmlns:a="http://schemas.openxmlformats.org/drawingml/2006/main" xmlns:r="http://schemas.openxmlformats.org/officeDocument/2006/relationships" xmlns:p="http://schemas.openxmlformats.org/presentationml/2006/main">
+<file path=ppt/slides/slide15.xml><?xml version="1.0" encoding="utf-8"?>
+<p:sld xmlns:a="http://schemas.openxmlformats.org/drawingml/2006/main" xmlns:p="http://schemas.openxmlformats.org/presentationml/2006/main" xmlns:r="http://schemas.openxmlformats.org/officeDocument/2006/relationships">
   <p:cSld>
     <p:spTree>
       <p:nvGrpSpPr>
@@ -7202,7 +7675,7 @@
         </p:nvSpPr>
         <p:spPr/>
         <p:txBody>
-          <a:bodyPr wrap="square" lIns="0" tIns="0" rIns="0" bIns="0" anchor="ctr"/>
+          <a:bodyPr wrap="square" anchor="ctr" lIns="0" rIns="0" tIns="0" bIns="0"/>
           <a:lstStyle/>
           <a:p>
             <a:pPr algn="l">
@@ -7214,18 +7687,13 @@
               </a:spcAft>
             </a:pPr>
             <a:r>
-              <a:rPr sz="2800" b="1" i="0" u="none">
-                <a:solidFill>
-                  <a:srgbClr val="003366"/>
-                </a:solidFill>
-              </a:rPr>
-              <a:t>收益边界与方法论结论</a:t>
-            </a:r>
-            <a:endParaRPr sz="2800" b="1" i="0" u="none">
-              <a:solidFill>
-                <a:srgbClr val="003366"/>
-              </a:solidFill>
-            </a:endParaRPr>
+              <a:rPr sz="3000" b="1" i="0" u="none">
+                <a:solidFill>
+                  <a:srgbClr val="002A57"/>
+                </a:solidFill>
+              </a:rPr>
+              <a:t>感谢聆听！</a:t>
+            </a:r>
           </a:p>
         </p:txBody>
       </p:sp>
@@ -7236,12 +7704,12 @@
             <a:spLocks noGrp="1"/>
           </p:cNvSpPr>
           <p:nvPr>
-            <p:ph type="body" sz="half" idx="1"/>
+            <p:ph type="body" idx="1"/>
           </p:nvPr>
         </p:nvSpPr>
         <p:spPr/>
         <p:txBody>
-          <a:bodyPr wrap="square" tIns="91440" bIns="91440" anchor="t"/>
+          <a:bodyPr wrap="square" anchor="ctr" lIns="0" rIns="0" tIns="0" bIns="0"/>
           <a:lstStyle/>
           <a:p>
             <a:pPr algn="l">
@@ -7253,18 +7721,13 @@
               </a:spcAft>
             </a:pPr>
             <a:r>
-              <a:rPr sz="1500" b="1" i="0" u="none">
-                <a:solidFill>
-                  <a:srgbClr val="002A57"/>
-                </a:solidFill>
-              </a:rPr>
-              <a:t>优化是否值得保留，取决于收益边界是否清晰、证据链是否完整。</a:t>
-            </a:r>
-            <a:endParaRPr sz="1500" b="1" i="0" u="none">
-              <a:solidFill>
-                <a:srgbClr val="002A57"/>
-              </a:solidFill>
-            </a:endParaRPr>
+              <a:rPr sz="2000" b="1" i="0" u="none">
+                <a:solidFill>
+                  <a:srgbClr val="003366"/>
+                </a:solidFill>
+              </a:rPr>
+              <a:t>请各位老师批评指正</a:t>
+            </a:r>
           </a:p>
           <a:p>
             <a:pPr algn="l">
@@ -7278,17 +7741,46 @@
             <a:r>
               <a:rPr sz="1600" b="0" i="0" u="none">
                 <a:solidFill>
-                  <a:srgbClr val="003366"/>
-                </a:solidFill>
-              </a:rPr>
-              <a:t>方案一在 pmd 上存在正收益样本，但复测均值尚未稳定转正。</a:t>
-            </a:r>
-            <a:endParaRPr sz="1600" b="0" i="0" u="none">
-              <a:solidFill>
-                <a:srgbClr val="003366"/>
-              </a:solidFill>
-            </a:endParaRPr>
-          </a:p>
+                  <a:srgbClr val="5B6470"/>
+                </a:solidFill>
+              </a:rPr>
+              <a:t>Q&amp;A</a:t>
+            </a:r>
+          </a:p>
+        </p:txBody>
+      </p:sp>
+    </p:spTree>
+  </p:cSld>
+  <p:clrMapOvr>
+    <a:masterClrMapping/>
+  </p:clrMapOvr>
+</p:sld>
+</file>
+
+<file path=ppt/slides/slide2.xml><?xml version="1.0" encoding="utf-8"?>
+<p:sld xmlns:a="http://schemas.openxmlformats.org/drawingml/2006/main" xmlns:p="http://schemas.openxmlformats.org/presentationml/2006/main" xmlns:r="http://schemas.openxmlformats.org/officeDocument/2006/relationships">
+  <p:cSld>
+    <p:spTree>
+      <p:nvGrpSpPr>
+        <p:cNvPr id="1" name=""/>
+        <p:cNvGrpSpPr/>
+        <p:nvPr/>
+      </p:nvGrpSpPr>
+      <p:grpSpPr/>
+      <p:sp>
+        <p:nvSpPr>
+          <p:cNvPr id="2" name="Title 1"/>
+          <p:cNvSpPr>
+            <a:spLocks noGrp="1"/>
+          </p:cNvSpPr>
+          <p:nvPr>
+            <p:ph type="title"/>
+          </p:nvPr>
+        </p:nvSpPr>
+        <p:spPr/>
+        <p:txBody>
+          <a:bodyPr wrap="square" anchor="ctr" lIns="0" rIns="0" tIns="0" bIns="0"/>
+          <a:lstStyle/>
           <a:p>
             <a:pPr algn="l">
               <a:spcBef>
@@ -7299,18 +7791,107 @@
               </a:spcAft>
             </a:pPr>
             <a:r>
-              <a:rPr sz="1600" b="0" i="0" u="none">
+              <a:rPr sz="2800" b="1" i="0" u="none">
                 <a:solidFill>
                   <a:srgbClr val="003366"/>
                 </a:solidFill>
               </a:rPr>
-              <a:t>方案二说明“局部热点下降”不等于“全局 benchmark 提升”。</a:t>
-            </a:r>
-            <a:endParaRPr sz="1600" b="0" i="0" u="none">
-              <a:solidFill>
-                <a:srgbClr val="003366"/>
-              </a:solidFill>
-            </a:endParaRPr>
+              <a:t>答辩提纲</a:t>
+            </a:r>
+          </a:p>
+        </p:txBody>
+      </p:sp>
+      <p:sp>
+        <p:nvSpPr>
+          <p:cNvPr id="3" name="Content Placeholder 2"/>
+          <p:cNvSpPr>
+            <a:spLocks noGrp="1"/>
+          </p:cNvSpPr>
+          <p:nvPr>
+            <p:ph idx="1"/>
+          </p:nvPr>
+        </p:nvSpPr>
+        <p:spPr/>
+        <p:txBody>
+          <a:bodyPr wrap="square" anchor="ctr" lIns="164592" rIns="164592" tIns="164592" bIns="164592"/>
+          <a:lstStyle/>
+          <a:p>
+            <a:pPr algn="l">
+              <a:spcBef>
+                <a:spcPts val="0"/>
+              </a:spcBef>
+              <a:spcAft>
+                <a:spcPts val="1200"/>
+              </a:spcAft>
+            </a:pPr>
+            <a:r>
+              <a:rPr sz="1900" b="1" i="0" u="none">
+                <a:solidFill>
+                  <a:srgbClr val="002A57"/>
+                </a:solidFill>
+              </a:rPr>
+              <a:t>01  </a:t>
+            </a:r>
+            <a:r>
+              <a:rPr sz="1900" b="1" i="0" u="none">
+                <a:solidFill>
+                  <a:srgbClr val="003366"/>
+                </a:solidFill>
+              </a:rPr>
+              <a:t>研究背景与目标</a:t>
+            </a:r>
+          </a:p>
+          <a:p>
+            <a:pPr algn="l">
+              <a:spcBef>
+                <a:spcPts val="0"/>
+              </a:spcBef>
+              <a:spcAft>
+                <a:spcPts val="1200"/>
+              </a:spcAft>
+            </a:pPr>
+            <a:r>
+              <a:rPr sz="1900" b="1" i="0" u="none">
+                <a:solidFill>
+                  <a:srgbClr val="002A57"/>
+                </a:solidFill>
+              </a:rPr>
+              <a:t>02  </a:t>
+            </a:r>
+            <a:r>
+              <a:rPr sz="1900" b="1" i="0" u="none">
+                <a:solidFill>
+                  <a:srgbClr val="003366"/>
+                </a:solidFill>
+              </a:rPr>
+              <a:t>执行引擎适配与验证</a:t>
+            </a:r>
+          </a:p>
+          <a:p>
+            <a:pPr algn="l">
+              <a:spcBef>
+                <a:spcPts val="0"/>
+              </a:spcBef>
+              <a:spcAft>
+                <a:spcPts val="1200"/>
+              </a:spcAft>
+            </a:pPr>
+            <a:r>
+              <a:rPr sz="1900" b="1" i="0" u="none">
+                <a:solidFill>
+                  <a:srgbClr val="002A57"/>
+                </a:solidFill>
+              </a:rPr>
+              <a:t>03  </a:t>
+            </a:r>
+            <a:r>
+              <a:rPr sz="1900" b="1" i="0" u="none">
+                <a:solidFill>
+                  <a:srgbClr val="003366"/>
+                </a:solidFill>
+              </a:rPr>
+              <a:t>性能优化研究与结果</a:t>
+            </a:r>
           </a:p>
           <a:p>
             <a:pPr algn="l">
@@ -7322,19 +7903,56 @@
               </a:spcAft>
             </a:pPr>
             <a:r>
-              <a:rPr sz="1600" b="0" i="0" u="none">
+              <a:rPr sz="1900" b="1" i="0" u="none">
+                <a:solidFill>
+                  <a:srgbClr val="002A57"/>
+                </a:solidFill>
+              </a:rPr>
+              <a:t>04  </a:t>
+            </a:r>
+            <a:r>
+              <a:rPr sz="1900" b="1" i="0" u="none">
                 <a:solidFill>
                   <a:srgbClr val="003366"/>
                 </a:solidFill>
               </a:rPr>
-              <a:t>方案三收益集中在规则浮点循环，并不会自动推广到所有数值 workload。</a:t>
-            </a:r>
-            <a:endParaRPr sz="1600" b="0" i="0" u="none">
-              <a:solidFill>
-                <a:srgbClr val="003366"/>
-              </a:solidFill>
-            </a:endParaRPr>
-          </a:p>
+              <a:t>总结与展望</a:t>
+            </a:r>
+          </a:p>
+        </p:txBody>
+      </p:sp>
+    </p:spTree>
+  </p:cSld>
+  <p:clrMapOvr>
+    <a:masterClrMapping/>
+  </p:clrMapOvr>
+</p:sld>
+</file>
+
+<file path=ppt/slides/slide3.xml><?xml version="1.0" encoding="utf-8"?>
+<p:sld xmlns:a="http://schemas.openxmlformats.org/drawingml/2006/main" xmlns:p="http://schemas.openxmlformats.org/presentationml/2006/main" xmlns:r="http://schemas.openxmlformats.org/officeDocument/2006/relationships">
+  <p:cSld>
+    <p:spTree>
+      <p:nvGrpSpPr>
+        <p:cNvPr id="1" name=""/>
+        <p:cNvGrpSpPr/>
+        <p:nvPr/>
+      </p:nvGrpSpPr>
+      <p:grpSpPr/>
+      <p:sp>
+        <p:nvSpPr>
+          <p:cNvPr id="2" name="Title 1"/>
+          <p:cNvSpPr>
+            <a:spLocks noGrp="1"/>
+          </p:cNvSpPr>
+          <p:nvPr>
+            <p:ph type="title"/>
+          </p:nvPr>
+        </p:nvSpPr>
+        <p:spPr/>
+        <p:txBody>
+          <a:bodyPr wrap="square" anchor="ctr" lIns="0" rIns="0" tIns="0" bIns="0"/>
+          <a:lstStyle/>
           <a:p>
             <a:pPr algn="l">
               <a:spcBef>
@@ -7345,62 +7963,50 @@
               </a:spcAft>
             </a:pPr>
             <a:r>
-              <a:rPr sz="1600" b="0" i="0" u="none">
-                <a:solidFill>
-                  <a:srgbClr val="003366"/>
-                </a:solidFill>
-              </a:rPr>
-              <a:t>因此，LoongArch 平台 ART 优化应优先命中主导热点，并严格控制副作用。</a:t>
-            </a:r>
-            <a:endParaRPr sz="1600" b="0" i="0" u="none">
-              <a:solidFill>
-                <a:srgbClr val="003366"/>
-              </a:solidFill>
-            </a:endParaRPr>
-          </a:p>
-        </p:txBody>
-      </p:sp>
-      <p:sp>
-        <p:nvSpPr>
-          <p:cNvPr id="4" name="Content Placeholder 3"/>
-          <p:cNvSpPr>
-            <a:spLocks noGrp="1"/>
-          </p:cNvSpPr>
-          <p:nvPr>
-            <p:ph sz="half" idx="2"/>
+              <a:rPr sz="3000" b="1" i="0" u="none">
+                <a:solidFill>
+                  <a:srgbClr val="002A57"/>
+                </a:solidFill>
+              </a:rPr>
+              <a:t>一、研究背景与目标</a:t>
+            </a:r>
+          </a:p>
+        </p:txBody>
+      </p:sp>
+      <p:sp>
+        <p:nvSpPr>
+          <p:cNvPr id="3" name="Text Placeholder 2"/>
+          <p:cNvSpPr>
+            <a:spLocks noGrp="1"/>
+          </p:cNvSpPr>
+          <p:nvPr>
+            <p:ph type="body" idx="1"/>
           </p:nvPr>
         </p:nvSpPr>
         <p:spPr/>
         <p:txBody>
-          <a:bodyPr/>
-          <a:lstStyle/>
-          <a:p/>
-        </p:txBody>
-      </p:sp>
-      <p:pic>
-        <p:nvPicPr>
-          <p:cNvPr id="5" name="Picture 4" descr="final-comparison-heatmap.png"/>
-          <p:cNvPicPr>
-            <a:picLocks noChangeAspect="1"/>
-          </p:cNvPicPr>
-          <p:nvPr/>
-        </p:nvPicPr>
-        <p:blipFill>
-          <a:blip r:embed="rId1"/>
-          <a:stretch>
-            <a:fillRect/>
-          </a:stretch>
-        </p:blipFill>
-        <p:spPr>
-          <a:xfrm>
-            <a:off x="5541478" y="3000524"/>
-            <a:ext cx="4652105" cy="2001539"/>
-          </a:xfrm>
-          <a:prstGeom prst="rect">
-            <a:avLst/>
-          </a:prstGeom>
-        </p:spPr>
-      </p:pic>
+          <a:bodyPr wrap="square" anchor="ctr" lIns="0" rIns="0" tIns="0" bIns="0"/>
+          <a:lstStyle/>
+          <a:p>
+            <a:pPr algn="l">
+              <a:spcBef>
+                <a:spcPts val="0"/>
+              </a:spcBef>
+              <a:spcAft>
+                <a:spcPts val="500"/>
+              </a:spcAft>
+            </a:pPr>
+            <a:r>
+              <a:rPr sz="1800" b="0" i="0" u="none">
+                <a:solidFill>
+                  <a:srgbClr val="5B6470"/>
+                </a:solidFill>
+              </a:rPr>
+              <a:t>问题定义、研究主线与论文贡献</a:t>
+            </a:r>
+          </a:p>
+        </p:txBody>
+      </p:sp>
     </p:spTree>
   </p:cSld>
   <p:clrMapOvr>
@@ -7409,8 +8015,8 @@
 </p:sld>
 </file>
 
-<file path=ppt/slides/slide13.xml><?xml version="1.0" encoding="utf-8"?>
-<p:sld xmlns:a="http://schemas.openxmlformats.org/drawingml/2006/main" xmlns:r="http://schemas.openxmlformats.org/officeDocument/2006/relationships" xmlns:p="http://schemas.openxmlformats.org/presentationml/2006/main">
+<file path=ppt/slides/slide4.xml><?xml version="1.0" encoding="utf-8"?>
+<p:sld xmlns:a="http://schemas.openxmlformats.org/drawingml/2006/main" xmlns:p="http://schemas.openxmlformats.org/presentationml/2006/main" xmlns:r="http://schemas.openxmlformats.org/officeDocument/2006/relationships">
   <p:cSld>
     <p:spTree>
       <p:nvGrpSpPr>
@@ -7431,7 +8037,7 @@
         </p:nvSpPr>
         <p:spPr/>
         <p:txBody>
-          <a:bodyPr wrap="square" lIns="0" tIns="0" rIns="0" bIns="0" anchor="ctr"/>
+          <a:bodyPr wrap="square" anchor="ctr" lIns="0" rIns="0" tIns="0" bIns="0"/>
           <a:lstStyle/>
           <a:p>
             <a:pPr algn="l">
@@ -7443,18 +8049,13 @@
               </a:spcAft>
             </a:pPr>
             <a:r>
-              <a:rPr sz="3000" b="1" i="0" u="none">
-                <a:solidFill>
-                  <a:srgbClr val="002A57"/>
-                </a:solidFill>
-              </a:rPr>
-              <a:t>四、总结与展望</a:t>
-            </a:r>
-            <a:endParaRPr sz="3000" b="1" i="0" u="none">
-              <a:solidFill>
-                <a:srgbClr val="002A57"/>
-              </a:solidFill>
-            </a:endParaRPr>
+              <a:rPr sz="2800" b="1" i="0" u="none">
+                <a:solidFill>
+                  <a:srgbClr val="003366"/>
+                </a:solidFill>
+              </a:rPr>
+              <a:t>问题定义与主要贡献</a:t>
+            </a:r>
           </a:p>
         </p:txBody>
       </p:sp>
@@ -7470,7 +8071,7 @@
         </p:nvSpPr>
         <p:spPr/>
         <p:txBody>
-          <a:bodyPr wrap="square" lIns="0" tIns="0" rIns="0" bIns="0" anchor="ctr"/>
+          <a:bodyPr wrap="square" anchor="ctr" lIns="0" rIns="0" tIns="0" bIns="0"/>
           <a:lstStyle/>
           <a:p>
             <a:pPr algn="l">
@@ -7482,52 +8083,29 @@
               </a:spcAft>
             </a:pPr>
             <a:r>
-              <a:rPr sz="1800" b="0" i="0" u="none">
-                <a:solidFill>
-                  <a:srgbClr val="5B6470"/>
-                </a:solidFill>
-              </a:rPr>
-              <a:t>论文结论、方法价值与后续工作</a:t>
-            </a:r>
-            <a:endParaRPr sz="1800" b="0" i="0" u="none">
-              <a:solidFill>
-                <a:srgbClr val="5B6470"/>
-              </a:solidFill>
-            </a:endParaRPr>
-          </a:p>
-        </p:txBody>
-      </p:sp>
-    </p:spTree>
-  </p:cSld>
-  <p:clrMapOvr>
-    <a:masterClrMapping/>
-  </p:clrMapOvr>
-</p:sld>
-</file>
-
-<file path=ppt/slides/slide14.xml><?xml version="1.0" encoding="utf-8"?>
-<p:sld xmlns:a="http://schemas.openxmlformats.org/drawingml/2006/main" xmlns:r="http://schemas.openxmlformats.org/officeDocument/2006/relationships" xmlns:p="http://schemas.openxmlformats.org/presentationml/2006/main">
-  <p:cSld>
-    <p:spTree>
-      <p:nvGrpSpPr>
-        <p:cNvPr id="1" name=""/>
-        <p:cNvGrpSpPr/>
-        <p:nvPr/>
-      </p:nvGrpSpPr>
-      <p:grpSpPr/>
-      <p:sp>
-        <p:nvSpPr>
-          <p:cNvPr id="2" name="Title 1"/>
-          <p:cNvSpPr>
-            <a:spLocks noGrp="1"/>
-          </p:cNvSpPr>
-          <p:nvPr>
-            <p:ph type="title"/>
+              <a:rPr sz="1900" b="1" i="0" u="none">
+                <a:solidFill>
+                  <a:srgbClr val="002A57"/>
+                </a:solidFill>
+              </a:rPr>
+              <a:t>核心问题</a:t>
+            </a:r>
+          </a:p>
+        </p:txBody>
+      </p:sp>
+      <p:sp>
+        <p:nvSpPr>
+          <p:cNvPr id="4" name="Content Placeholder 3"/>
+          <p:cNvSpPr>
+            <a:spLocks noGrp="1"/>
+          </p:cNvSpPr>
+          <p:nvPr>
+            <p:ph idx="2" sz="half"/>
           </p:nvPr>
         </p:nvSpPr>
         <p:spPr/>
         <p:txBody>
-          <a:bodyPr wrap="square" lIns="0" tIns="0" rIns="0" bIns="0" anchor="ctr"/>
+          <a:bodyPr wrap="square" anchor="t" tIns="91440" bIns="91440"/>
           <a:lstStyle/>
           <a:p>
             <a:pPr algn="l">
@@ -7539,35 +8117,14 @@
               </a:spcAft>
             </a:pPr>
             <a:r>
-              <a:rPr sz="2800" b="1" i="0" u="none">
+              <a:rPr sz="1600" b="0" i="0" u="none">
                 <a:solidFill>
                   <a:srgbClr val="003366"/>
                 </a:solidFill>
               </a:rPr>
-              <a:t>总结与展望</a:t>
-            </a:r>
-            <a:endParaRPr sz="2800" b="1" i="0" u="none">
-              <a:solidFill>
-                <a:srgbClr val="003366"/>
-              </a:solidFill>
-            </a:endParaRPr>
-          </a:p>
-        </p:txBody>
-      </p:sp>
-      <p:sp>
-        <p:nvSpPr>
-          <p:cNvPr id="3" name="Text Placeholder 2"/>
-          <p:cNvSpPr>
-            <a:spLocks noGrp="1"/>
-          </p:cNvSpPr>
-          <p:nvPr>
-            <p:ph type="body" idx="1"/>
-          </p:nvPr>
-        </p:nvSpPr>
-        <p:spPr/>
-        <p:txBody>
-          <a:bodyPr wrap="square" lIns="0" tIns="0" rIns="0" bIns="0" anchor="ctr"/>
-          <a:lstStyle/>
+              <a:t>AOSP 15 官方主线尚未提供 LoongArch 平台 ART 执行引擎实现。</a:t>
+            </a:r>
+          </a:p>
           <a:p>
             <a:pPr algn="l">
               <a:spcBef>
@@ -7578,35 +8135,14 @@
               </a:spcAft>
             </a:pPr>
             <a:r>
-              <a:rPr sz="1900" b="1" i="0" u="none">
-                <a:solidFill>
-                  <a:srgbClr val="002A57"/>
-                </a:solidFill>
-              </a:rPr>
-              <a:t>论文主结论</a:t>
-            </a:r>
-            <a:endParaRPr sz="1900" b="1" i="0" u="none">
-              <a:solidFill>
-                <a:srgbClr val="002A57"/>
-              </a:solidFill>
-            </a:endParaRPr>
-          </a:p>
-        </p:txBody>
-      </p:sp>
-      <p:sp>
-        <p:nvSpPr>
-          <p:cNvPr id="4" name="Content Placeholder 3"/>
-          <p:cNvSpPr>
-            <a:spLocks noGrp="1"/>
-          </p:cNvSpPr>
-          <p:nvPr>
-            <p:ph sz="half" idx="2"/>
-          </p:nvPr>
-        </p:nvSpPr>
-        <p:spPr/>
-        <p:txBody>
-          <a:bodyPr wrap="square" tIns="91440" bIns="91440" anchor="t"/>
-          <a:lstStyle/>
+              <a:rPr sz="1600" b="0" i="0" u="none">
+                <a:solidFill>
+                  <a:srgbClr val="003366"/>
+                </a:solidFill>
+              </a:rPr>
+              <a:t>论文必须同时回答“能运行、能验证、能优化”三个问题。</a:t>
+            </a:r>
+          </a:p>
           <a:p>
             <a:pPr algn="l">
               <a:spcBef>
@@ -7622,14 +8158,25 @@
                   <a:srgbClr val="003366"/>
                 </a:solidFill>
               </a:rPr>
-              <a:t>AOSP 15 ART 在 LoongArch 平台上的执行引擎适配是可行的。</a:t>
-            </a:r>
-            <a:endParaRPr sz="1600" b="0" i="0" u="none">
-              <a:solidFill>
-                <a:srgbClr val="003366"/>
-              </a:solidFill>
-            </a:endParaRPr>
-          </a:p>
+              <a:t>性能结论需要统一 baseline 与可复核证据链支撑。</a:t>
+            </a:r>
+          </a:p>
+        </p:txBody>
+      </p:sp>
+      <p:sp>
+        <p:nvSpPr>
+          <p:cNvPr id="5" name="Text Placeholder 4"/>
+          <p:cNvSpPr>
+            <a:spLocks noGrp="1"/>
+          </p:cNvSpPr>
+          <p:nvPr>
+            <p:ph type="body" idx="3" sz="quarter"/>
+          </p:nvPr>
+        </p:nvSpPr>
+        <p:spPr/>
+        <p:txBody>
+          <a:bodyPr wrap="square" anchor="ctr" lIns="0" rIns="0" tIns="0" bIns="0"/>
+          <a:lstStyle/>
           <a:p>
             <a:pPr algn="l">
               <a:spcBef>
@@ -7640,19 +8187,30 @@
               </a:spcAft>
             </a:pPr>
             <a:r>
-              <a:rPr sz="1600" b="0" i="0" u="none">
-                <a:solidFill>
-                  <a:srgbClr val="003366"/>
-                </a:solidFill>
-              </a:rPr>
-              <a:t>统一验证链路与固定 baseline 是性能研究具备解释价值的前提。</a:t>
-            </a:r>
-            <a:endParaRPr sz="1600" b="0" i="0" u="none">
-              <a:solidFill>
-                <a:srgbClr val="003366"/>
-              </a:solidFill>
-            </a:endParaRPr>
-          </a:p>
+              <a:rPr sz="1900" b="1" i="0" u="none">
+                <a:solidFill>
+                  <a:srgbClr val="002A57"/>
+                </a:solidFill>
+              </a:rPr>
+              <a:t>论文回答</a:t>
+            </a:r>
+          </a:p>
+        </p:txBody>
+      </p:sp>
+      <p:sp>
+        <p:nvSpPr>
+          <p:cNvPr id="6" name="Content Placeholder 5"/>
+          <p:cNvSpPr>
+            <a:spLocks noGrp="1"/>
+          </p:cNvSpPr>
+          <p:nvPr>
+            <p:ph idx="4" sz="quarter"/>
+          </p:nvPr>
+        </p:nvSpPr>
+        <p:spPr/>
+        <p:txBody>
+          <a:bodyPr wrap="square" anchor="t" tIns="91440" bIns="91440"/>
+          <a:lstStyle/>
           <a:p>
             <a:pPr algn="l">
               <a:spcBef>
@@ -7668,30 +8226,9 @@
                   <a:srgbClr val="003366"/>
                 </a:solidFill>
               </a:rPr>
-              <a:t>只有命中主导热点、边界清晰且可复现的方案才值得保留。</a:t>
-            </a:r>
-            <a:endParaRPr sz="1600" b="0" i="0" u="none">
-              <a:solidFill>
-                <a:srgbClr val="003366"/>
-              </a:solidFill>
-            </a:endParaRPr>
-          </a:p>
-        </p:txBody>
-      </p:sp>
-      <p:sp>
-        <p:nvSpPr>
-          <p:cNvPr id="5" name="Text Placeholder 4"/>
-          <p:cNvSpPr>
-            <a:spLocks noGrp="1"/>
-          </p:cNvSpPr>
-          <p:nvPr>
-            <p:ph type="body" sz="quarter" idx="3"/>
-          </p:nvPr>
-        </p:nvSpPr>
-        <p:spPr/>
-        <p:txBody>
-          <a:bodyPr wrap="square" lIns="0" tIns="0" rIns="0" bIns="0" anchor="ctr"/>
-          <a:lstStyle/>
+              <a:t>完成执行引擎关键模块适配，建立 LoongArch 平台 ART 执行闭环。</a:t>
+            </a:r>
+          </a:p>
           <a:p>
             <a:pPr algn="l">
               <a:spcBef>
@@ -7702,35 +8239,14 @@
               </a:spcAft>
             </a:pPr>
             <a:r>
-              <a:rPr sz="1900" b="1" i="0" u="none">
-                <a:solidFill>
-                  <a:srgbClr val="002A57"/>
-                </a:solidFill>
-              </a:rPr>
-              <a:t>后续工作</a:t>
-            </a:r>
-            <a:endParaRPr sz="1900" b="1" i="0" u="none">
-              <a:solidFill>
-                <a:srgbClr val="002A57"/>
-              </a:solidFill>
-            </a:endParaRPr>
-          </a:p>
-        </p:txBody>
-      </p:sp>
-      <p:sp>
-        <p:nvSpPr>
-          <p:cNvPr id="6" name="Content Placeholder 5"/>
-          <p:cNvSpPr>
-            <a:spLocks noGrp="1"/>
-          </p:cNvSpPr>
-          <p:nvPr>
-            <p:ph sz="quarter" idx="4"/>
-          </p:nvPr>
-        </p:nvSpPr>
-        <p:spPr/>
-        <p:txBody>
-          <a:bodyPr wrap="square" tIns="91440" bIns="91440" anchor="t"/>
-          <a:lstStyle/>
+              <a:rPr sz="1600" b="0" i="0" u="none">
+                <a:solidFill>
+                  <a:srgbClr val="003366"/>
+                </a:solidFill>
+              </a:rPr>
+              <a:t>建立编译、部署、run-test、libcore、benchmark 的统一验证链路。</a:t>
+            </a:r>
+          </a:p>
           <a:p>
             <a:pPr algn="l">
               <a:spcBef>
@@ -7746,82 +8262,8 @@
                   <a:srgbClr val="003366"/>
                 </a:solidFill>
               </a:rPr>
-              <a:t>完善 AOT / 安装期编译支持。</a:t>
-            </a:r>
-            <a:endParaRPr sz="1600" b="0" i="0" u="none">
-              <a:solidFill>
-                <a:srgbClr val="003366"/>
-              </a:solidFill>
-            </a:endParaRPr>
-          </a:p>
-          <a:p>
-            <a:pPr algn="l">
-              <a:spcBef>
-                <a:spcPts val="0"/>
-              </a:spcBef>
-              <a:spcAft>
-                <a:spcPts val="500"/>
-              </a:spcAft>
-            </a:pPr>
-            <a:r>
-              <a:rPr sz="1600" b="0" i="0" u="none">
-                <a:solidFill>
-                  <a:srgbClr val="003366"/>
-                </a:solidFill>
-              </a:rPr>
-              <a:t>扩展 LSX / LASX 能力与更高层门控。</a:t>
-            </a:r>
-            <a:endParaRPr sz="1600" b="0" i="0" u="none">
-              <a:solidFill>
-                <a:srgbClr val="003366"/>
-              </a:solidFill>
-            </a:endParaRPr>
-          </a:p>
-          <a:p>
-            <a:pPr algn="l">
-              <a:spcBef>
-                <a:spcPts val="0"/>
-              </a:spcBef>
-              <a:spcAft>
-                <a:spcPts val="500"/>
-              </a:spcAft>
-            </a:pPr>
-            <a:r>
-              <a:rPr sz="1600" b="0" i="0" u="none">
-                <a:solidFill>
-                  <a:srgbClr val="003366"/>
-                </a:solidFill>
-              </a:rPr>
-              <a:t>引入更多 benchmark 与应用级验证。</a:t>
-            </a:r>
-            <a:endParaRPr sz="1600" b="0" i="0" u="none">
-              <a:solidFill>
-                <a:srgbClr val="003366"/>
-              </a:solidFill>
-            </a:endParaRPr>
-          </a:p>
-          <a:p>
-            <a:pPr algn="l">
-              <a:spcBef>
-                <a:spcPts val="0"/>
-              </a:spcBef>
-              <a:spcAft>
-                <a:spcPts val="500"/>
-              </a:spcAft>
-            </a:pPr>
-            <a:r>
-              <a:rPr sz="1600" b="0" i="0" u="none">
-                <a:solidFill>
-                  <a:srgbClr val="003366"/>
-                </a:solidFill>
-              </a:rPr>
-              <a:t>增强低扰动观测与运行时因果分析。</a:t>
-            </a:r>
-            <a:endParaRPr sz="1600" b="0" i="0" u="none">
-              <a:solidFill>
-                <a:srgbClr val="003366"/>
-              </a:solidFill>
-            </a:endParaRPr>
+              <a:t>筛选三项正式方案，并区分稳定收益、边界性收益与失败样本。</a:t>
+            </a:r>
           </a:p>
         </p:txBody>
       </p:sp>
@@ -7833,8 +8275,8 @@
         </p:nvSpPr>
         <p:spPr>
           <a:xfrm>
-            <a:off x="841248" y="5596128"/>
-            <a:ext cx="8732520" cy="347472"/>
+            <a:off x="822960" y="5623560"/>
+            <a:ext cx="8732520" cy="384048"/>
           </a:xfrm>
           <a:prstGeom prst="roundRect">
             <a:avLst/>
@@ -7863,7 +8305,7 @@
           </a:fontRef>
         </p:style>
         <p:txBody>
-          <a:bodyPr wrap="square" lIns="18288" tIns="18288" rIns="18288" bIns="18288" rtlCol="0" anchor="ctr"/>
+          <a:bodyPr rtlCol="0" anchor="ctr" wrap="square" lIns="27432" rIns="27432" tIns="27432" bIns="27432"/>
           <a:lstStyle/>
           <a:p>
             <a:pPr algn="ctr">
@@ -7880,13 +8322,8 @@
                   <a:srgbClr val="002A57"/>
                 </a:solidFill>
               </a:rPr>
-              <a:t>本文的核心产出不仅是工程闭环，更是“什么值得保留、为什么成立、边界在哪里”的研究方法。</a:t>
-            </a:r>
-            <a:endParaRPr sz="1300" b="1" i="0" u="none">
-              <a:solidFill>
-                <a:srgbClr val="002A57"/>
-              </a:solidFill>
-            </a:endParaRPr>
+              <a:t>主线不是零散 patch，而是“适配设计 → 验证收敛 → 优化筛选”的系统闭环。</a:t>
+            </a:r>
           </a:p>
         </p:txBody>
       </p:sp>
@@ -7898,8 +8335,8 @@
 </p:sld>
 </file>
 
-<file path=ppt/slides/slide15.xml><?xml version="1.0" encoding="utf-8"?>
-<p:sld xmlns:a="http://schemas.openxmlformats.org/drawingml/2006/main" xmlns:r="http://schemas.openxmlformats.org/officeDocument/2006/relationships" xmlns:p="http://schemas.openxmlformats.org/presentationml/2006/main">
+<file path=ppt/slides/slide5.xml><?xml version="1.0" encoding="utf-8"?>
+<p:sld xmlns:a="http://schemas.openxmlformats.org/drawingml/2006/main" xmlns:p="http://schemas.openxmlformats.org/presentationml/2006/main" xmlns:r="http://schemas.openxmlformats.org/officeDocument/2006/relationships">
   <p:cSld>
     <p:spTree>
       <p:nvGrpSpPr>
@@ -7920,7 +8357,7 @@
         </p:nvSpPr>
         <p:spPr/>
         <p:txBody>
-          <a:bodyPr wrap="square" lIns="0" tIns="0" rIns="0" bIns="0" anchor="ctr"/>
+          <a:bodyPr wrap="square" anchor="ctr" lIns="0" rIns="0" tIns="0" bIns="0"/>
           <a:lstStyle/>
           <a:p>
             <a:pPr algn="l">
@@ -7932,18 +8369,13 @@
               </a:spcAft>
             </a:pPr>
             <a:r>
-              <a:rPr sz="3000" b="1" i="0" u="none">
-                <a:solidFill>
-                  <a:srgbClr val="002A57"/>
-                </a:solidFill>
-              </a:rPr>
-              <a:t>感谢聆听！</a:t>
-            </a:r>
-            <a:endParaRPr sz="3000" b="1" i="0" u="none">
-              <a:solidFill>
-                <a:srgbClr val="002A57"/>
-              </a:solidFill>
-            </a:endParaRPr>
+              <a:rPr sz="2800" b="1" i="0" u="none">
+                <a:solidFill>
+                  <a:srgbClr val="003366"/>
+                </a:solidFill>
+              </a:rPr>
+              <a:t>整体研究路线</a:t>
+            </a:r>
           </a:p>
         </p:txBody>
       </p:sp>
@@ -7954,12 +8386,12 @@
             <a:spLocks noGrp="1"/>
           </p:cNvSpPr>
           <p:nvPr>
-            <p:ph type="body" idx="1"/>
+            <p:ph type="body" idx="1" sz="half"/>
           </p:nvPr>
         </p:nvSpPr>
         <p:spPr/>
         <p:txBody>
-          <a:bodyPr wrap="square" lIns="0" tIns="0" rIns="0" bIns="0" anchor="ctr"/>
+          <a:bodyPr wrap="square" anchor="t" tIns="91440" bIns="91440"/>
           <a:lstStyle/>
           <a:p>
             <a:pPr algn="l">
@@ -7971,18 +8403,13 @@
               </a:spcAft>
             </a:pPr>
             <a:r>
-              <a:rPr sz="2000" b="1" i="0" u="none">
-                <a:solidFill>
-                  <a:srgbClr val="003366"/>
-                </a:solidFill>
-              </a:rPr>
-              <a:t>请各位老师批评指正</a:t>
-            </a:r>
-            <a:endParaRPr sz="2000" b="1" i="0" u="none">
-              <a:solidFill>
-                <a:srgbClr val="003366"/>
-              </a:solidFill>
-            </a:endParaRPr>
+              <a:rPr sz="1600" b="1" i="0" u="none">
+                <a:solidFill>
+                  <a:srgbClr val="002A57"/>
+                </a:solidFill>
+              </a:rPr>
+              <a:t>本文从“可运行”推进到“可验证”再到“可优化”，最终给出稳定主结论与收益边界。</a:t>
+            </a:r>
           </a:p>
           <a:p>
             <a:pPr algn="l">
@@ -7996,51 +8423,12 @@
             <a:r>
               <a:rPr sz="1600" b="0" i="0" u="none">
                 <a:solidFill>
-                  <a:srgbClr val="5B6470"/>
-                </a:solidFill>
-              </a:rPr>
-              <a:t>Q&amp;A</a:t>
-            </a:r>
-            <a:endParaRPr sz="1600" b="0" i="0" u="none">
-              <a:solidFill>
-                <a:srgbClr val="5B6470"/>
-              </a:solidFill>
-            </a:endParaRPr>
-          </a:p>
-        </p:txBody>
-      </p:sp>
-    </p:spTree>
-  </p:cSld>
-  <p:clrMapOvr>
-    <a:masterClrMapping/>
-  </p:clrMapOvr>
-</p:sld>
-</file>
-
-<file path=ppt/slides/slide2.xml><?xml version="1.0" encoding="utf-8"?>
-<p:sld xmlns:a="http://schemas.openxmlformats.org/drawingml/2006/main" xmlns:r="http://schemas.openxmlformats.org/officeDocument/2006/relationships" xmlns:p="http://schemas.openxmlformats.org/presentationml/2006/main">
-  <p:cSld>
-    <p:spTree>
-      <p:nvGrpSpPr>
-        <p:cNvPr id="1" name=""/>
-        <p:cNvGrpSpPr/>
-        <p:nvPr/>
-      </p:nvGrpSpPr>
-      <p:grpSpPr/>
-      <p:sp>
-        <p:nvSpPr>
-          <p:cNvPr id="2" name="Title 1"/>
-          <p:cNvSpPr>
-            <a:spLocks noGrp="1"/>
-          </p:cNvSpPr>
-          <p:nvPr>
-            <p:ph type="title"/>
-          </p:nvPr>
-        </p:nvSpPr>
-        <p:spPr/>
-        <p:txBody>
-          <a:bodyPr wrap="square" lIns="0" tIns="0" rIns="0" bIns="0" anchor="ctr"/>
-          <a:lstStyle/>
+                  <a:srgbClr val="003366"/>
+                </a:solidFill>
+              </a:rPr>
+              <a:t>执行引擎适配解决平台可用性问题。</a:t>
+            </a:r>
+          </a:p>
           <a:p>
             <a:pPr algn="l">
               <a:spcBef>
@@ -8051,127 +8439,13 @@
               </a:spcAft>
             </a:pPr>
             <a:r>
-              <a:rPr sz="2800" b="1" i="0" u="none">
+              <a:rPr sz="1600" b="0" i="0" u="none">
                 <a:solidFill>
                   <a:srgbClr val="003366"/>
                 </a:solidFill>
               </a:rPr>
-              <a:t>答辩提纲</a:t>
-            </a:r>
-            <a:endParaRPr sz="2800" b="1" i="0" u="none">
-              <a:solidFill>
-                <a:srgbClr val="003366"/>
-              </a:solidFill>
-            </a:endParaRPr>
-          </a:p>
-        </p:txBody>
-      </p:sp>
-      <p:sp>
-        <p:nvSpPr>
-          <p:cNvPr id="3" name="Content Placeholder 2"/>
-          <p:cNvSpPr>
-            <a:spLocks noGrp="1"/>
-          </p:cNvSpPr>
-          <p:nvPr>
-            <p:ph idx="1"/>
-          </p:nvPr>
-        </p:nvSpPr>
-        <p:spPr/>
-        <p:txBody>
-          <a:bodyPr wrap="square" lIns="164592" tIns="164592" rIns="164592" bIns="164592" anchor="ctr"/>
-          <a:lstStyle/>
-          <a:p>
-            <a:pPr algn="l">
-              <a:spcBef>
-                <a:spcPts val="0"/>
-              </a:spcBef>
-              <a:spcAft>
-                <a:spcPts val="1200"/>
-              </a:spcAft>
-            </a:pPr>
-            <a:r>
-              <a:rPr sz="1900" b="1" i="0" u="none">
-                <a:solidFill>
-                  <a:srgbClr val="002A57"/>
-                </a:solidFill>
-              </a:rPr>
-              <a:t>01  </a:t>
-            </a:r>
-            <a:r>
-              <a:rPr sz="1900" b="1" i="0" u="none">
-                <a:solidFill>
-                  <a:srgbClr val="003366"/>
-                </a:solidFill>
-              </a:rPr>
-              <a:t>研究背景与目标</a:t>
-            </a:r>
-            <a:endParaRPr sz="1900" b="1" i="0" u="none">
-              <a:solidFill>
-                <a:srgbClr val="003366"/>
-              </a:solidFill>
-            </a:endParaRPr>
-          </a:p>
-          <a:p>
-            <a:pPr algn="l">
-              <a:spcBef>
-                <a:spcPts val="0"/>
-              </a:spcBef>
-              <a:spcAft>
-                <a:spcPts val="1200"/>
-              </a:spcAft>
-            </a:pPr>
-            <a:r>
-              <a:rPr sz="1900" b="1" i="0" u="none">
-                <a:solidFill>
-                  <a:srgbClr val="002A57"/>
-                </a:solidFill>
-              </a:rPr>
-              <a:t>02  </a:t>
-            </a:r>
-            <a:r>
-              <a:rPr sz="1900" b="1" i="0" u="none">
-                <a:solidFill>
-                  <a:srgbClr val="003366"/>
-                </a:solidFill>
-              </a:rPr>
-              <a:t>执行引擎适配与验证</a:t>
-            </a:r>
-            <a:endParaRPr sz="1900" b="1" i="0" u="none">
-              <a:solidFill>
-                <a:srgbClr val="003366"/>
-              </a:solidFill>
-            </a:endParaRPr>
-          </a:p>
-          <a:p>
-            <a:pPr algn="l">
-              <a:spcBef>
-                <a:spcPts val="0"/>
-              </a:spcBef>
-              <a:spcAft>
-                <a:spcPts val="1200"/>
-              </a:spcAft>
-            </a:pPr>
-            <a:r>
-              <a:rPr sz="1900" b="1" i="0" u="none">
-                <a:solidFill>
-                  <a:srgbClr val="002A57"/>
-                </a:solidFill>
-              </a:rPr>
-              <a:t>03  </a:t>
-            </a:r>
-            <a:r>
-              <a:rPr sz="1900" b="1" i="0" u="none">
-                <a:solidFill>
-                  <a:srgbClr val="003366"/>
-                </a:solidFill>
-              </a:rPr>
-              <a:t>性能优化研究与结果</a:t>
-            </a:r>
-            <a:endParaRPr sz="1900" b="1" i="0" u="none">
-              <a:solidFill>
-                <a:srgbClr val="003366"/>
-              </a:solidFill>
-            </a:endParaRPr>
+              <a:t>统一验证链路保证语义正确与性能比较口径一致。</a:t>
+            </a:r>
           </a:p>
           <a:p>
             <a:pPr algn="l">
@@ -8183,446 +8457,49 @@
               </a:spcAft>
             </a:pPr>
             <a:r>
-              <a:rPr sz="1900" b="1" i="0" u="none">
-                <a:solidFill>
-                  <a:srgbClr val="002A57"/>
-                </a:solidFill>
-              </a:rPr>
-              <a:t>04  </a:t>
-            </a:r>
-            <a:r>
-              <a:rPr sz="1900" b="1" i="0" u="none">
+              <a:rPr sz="1600" b="0" i="0" u="none">
                 <a:solidFill>
                   <a:srgbClr val="003366"/>
                 </a:solidFill>
               </a:rPr>
-              <a:t>总结与展望</a:t>
-            </a:r>
-            <a:endParaRPr sz="1900" b="1" i="0" u="none">
-              <a:solidFill>
-                <a:srgbClr val="003366"/>
-              </a:solidFill>
-            </a:endParaRPr>
-          </a:p>
-        </p:txBody>
-      </p:sp>
-    </p:spTree>
-  </p:cSld>
-  <p:clrMapOvr>
-    <a:masterClrMapping/>
-  </p:clrMapOvr>
-</p:sld>
-</file>
-
-<file path=ppt/slides/slide3.xml><?xml version="1.0" encoding="utf-8"?>
-<p:sld xmlns:a="http://schemas.openxmlformats.org/drawingml/2006/main" xmlns:r="http://schemas.openxmlformats.org/officeDocument/2006/relationships" xmlns:p="http://schemas.openxmlformats.org/presentationml/2006/main">
-  <p:cSld>
-    <p:spTree>
-      <p:nvGrpSpPr>
-        <p:cNvPr id="1" name=""/>
-        <p:cNvGrpSpPr/>
-        <p:nvPr/>
-      </p:nvGrpSpPr>
-      <p:grpSpPr/>
-      <p:sp>
-        <p:nvSpPr>
-          <p:cNvPr id="2" name="Title 1"/>
-          <p:cNvSpPr>
-            <a:spLocks noGrp="1"/>
-          </p:cNvSpPr>
-          <p:nvPr>
-            <p:ph type="title"/>
+              <a:t>正式单次对比与重复测量共同约束优化结论的强度。</a:t>
+            </a:r>
+          </a:p>
+        </p:txBody>
+      </p:sp>
+      <p:sp>
+        <p:nvSpPr>
+          <p:cNvPr id="4" name="Content Placeholder 3"/>
+          <p:cNvSpPr>
+            <a:spLocks noGrp="1"/>
+          </p:cNvSpPr>
+          <p:nvPr>
+            <p:ph idx="2" sz="half"/>
           </p:nvPr>
         </p:nvSpPr>
         <p:spPr/>
         <p:txBody>
-          <a:bodyPr wrap="square" lIns="0" tIns="0" rIns="0" bIns="0" anchor="ctr"/>
-          <a:lstStyle/>
-          <a:p>
-            <a:pPr algn="l">
-              <a:spcBef>
-                <a:spcPts val="0"/>
-              </a:spcBef>
-              <a:spcAft>
-                <a:spcPts val="500"/>
-              </a:spcAft>
-            </a:pPr>
-            <a:r>
-              <a:rPr sz="3000" b="1" i="0" u="none">
-                <a:solidFill>
-                  <a:srgbClr val="002A57"/>
-                </a:solidFill>
-              </a:rPr>
-              <a:t>一、研究背景与目标</a:t>
-            </a:r>
-            <a:endParaRPr sz="3000" b="1" i="0" u="none">
-              <a:solidFill>
-                <a:srgbClr val="002A57"/>
-              </a:solidFill>
-            </a:endParaRPr>
-          </a:p>
-        </p:txBody>
-      </p:sp>
-      <p:sp>
-        <p:nvSpPr>
-          <p:cNvPr id="3" name="Text Placeholder 2"/>
-          <p:cNvSpPr>
-            <a:spLocks noGrp="1"/>
-          </p:cNvSpPr>
-          <p:nvPr>
-            <p:ph type="body" idx="1"/>
-          </p:nvPr>
-        </p:nvSpPr>
-        <p:spPr/>
-        <p:txBody>
-          <a:bodyPr wrap="square" lIns="0" tIns="0" rIns="0" bIns="0" anchor="ctr"/>
-          <a:lstStyle/>
-          <a:p>
-            <a:pPr algn="l">
-              <a:spcBef>
-                <a:spcPts val="0"/>
-              </a:spcBef>
-              <a:spcAft>
-                <a:spcPts val="500"/>
-              </a:spcAft>
-            </a:pPr>
-            <a:r>
-              <a:rPr sz="1800" b="0" i="0" u="none">
-                <a:solidFill>
-                  <a:srgbClr val="5B6470"/>
-                </a:solidFill>
-              </a:rPr>
-              <a:t>问题定义、研究主线与论文贡献</a:t>
-            </a:r>
-            <a:endParaRPr sz="1800" b="0" i="0" u="none">
-              <a:solidFill>
-                <a:srgbClr val="5B6470"/>
-              </a:solidFill>
-            </a:endParaRPr>
-          </a:p>
-        </p:txBody>
-      </p:sp>
-    </p:spTree>
-  </p:cSld>
-  <p:clrMapOvr>
-    <a:masterClrMapping/>
-  </p:clrMapOvr>
-</p:sld>
-</file>
-
-<file path=ppt/slides/slide4.xml><?xml version="1.0" encoding="utf-8"?>
-<p:sld xmlns:a="http://schemas.openxmlformats.org/drawingml/2006/main" xmlns:r="http://schemas.openxmlformats.org/officeDocument/2006/relationships" xmlns:p="http://schemas.openxmlformats.org/presentationml/2006/main">
-  <p:cSld>
-    <p:spTree>
-      <p:nvGrpSpPr>
-        <p:cNvPr id="1" name=""/>
-        <p:cNvGrpSpPr/>
-        <p:nvPr/>
-      </p:nvGrpSpPr>
-      <p:grpSpPr/>
-      <p:sp>
-        <p:nvSpPr>
-          <p:cNvPr id="2" name="Title 1"/>
-          <p:cNvSpPr>
-            <a:spLocks noGrp="1"/>
-          </p:cNvSpPr>
-          <p:nvPr>
-            <p:ph type="title"/>
-          </p:nvPr>
-        </p:nvSpPr>
-        <p:spPr/>
-        <p:txBody>
-          <a:bodyPr wrap="square" lIns="0" tIns="0" rIns="0" bIns="0" anchor="ctr"/>
-          <a:lstStyle/>
-          <a:p>
-            <a:pPr algn="l">
-              <a:spcBef>
-                <a:spcPts val="0"/>
-              </a:spcBef>
-              <a:spcAft>
-                <a:spcPts val="500"/>
-              </a:spcAft>
-            </a:pPr>
-            <a:r>
-              <a:rPr sz="2800" b="1" i="0" u="none">
-                <a:solidFill>
-                  <a:srgbClr val="003366"/>
-                </a:solidFill>
-              </a:rPr>
-              <a:t>问题定义与主要贡献</a:t>
-            </a:r>
-            <a:endParaRPr sz="2800" b="1" i="0" u="none">
-              <a:solidFill>
-                <a:srgbClr val="003366"/>
-              </a:solidFill>
-            </a:endParaRPr>
-          </a:p>
-        </p:txBody>
-      </p:sp>
-      <p:sp>
-        <p:nvSpPr>
-          <p:cNvPr id="3" name="Text Placeholder 2"/>
-          <p:cNvSpPr>
-            <a:spLocks noGrp="1"/>
-          </p:cNvSpPr>
-          <p:nvPr>
-            <p:ph type="body" idx="1"/>
-          </p:nvPr>
-        </p:nvSpPr>
-        <p:spPr/>
-        <p:txBody>
-          <a:bodyPr wrap="square" lIns="0" tIns="0" rIns="0" bIns="0" anchor="ctr"/>
-          <a:lstStyle/>
-          <a:p>
-            <a:pPr algn="l">
-              <a:spcBef>
-                <a:spcPts val="0"/>
-              </a:spcBef>
-              <a:spcAft>
-                <a:spcPts val="500"/>
-              </a:spcAft>
-            </a:pPr>
-            <a:r>
-              <a:rPr sz="1900" b="1" i="0" u="none">
-                <a:solidFill>
-                  <a:srgbClr val="002A57"/>
-                </a:solidFill>
-              </a:rPr>
-              <a:t>核心问题</a:t>
-            </a:r>
-            <a:endParaRPr sz="1900" b="1" i="0" u="none">
-              <a:solidFill>
-                <a:srgbClr val="002A57"/>
-              </a:solidFill>
-            </a:endParaRPr>
-          </a:p>
-        </p:txBody>
-      </p:sp>
-      <p:sp>
-        <p:nvSpPr>
-          <p:cNvPr id="4" name="Content Placeholder 3"/>
-          <p:cNvSpPr>
-            <a:spLocks noGrp="1"/>
-          </p:cNvSpPr>
-          <p:nvPr>
-            <p:ph sz="half" idx="2"/>
-          </p:nvPr>
-        </p:nvSpPr>
-        <p:spPr/>
-        <p:txBody>
-          <a:bodyPr wrap="square" tIns="91440" bIns="91440" anchor="t"/>
-          <a:lstStyle/>
-          <a:p>
-            <a:pPr algn="l">
-              <a:spcBef>
-                <a:spcPts val="0"/>
-              </a:spcBef>
-              <a:spcAft>
-                <a:spcPts val="500"/>
-              </a:spcAft>
-            </a:pPr>
-            <a:r>
-              <a:rPr sz="1600" b="0" i="0" u="none">
-                <a:solidFill>
-                  <a:srgbClr val="003366"/>
-                </a:solidFill>
-              </a:rPr>
-              <a:t>AOSP 15 官方主线尚未提供 LoongArch 平台 ART 执行引擎实现。</a:t>
-            </a:r>
-            <a:endParaRPr sz="1600" b="0" i="0" u="none">
-              <a:solidFill>
-                <a:srgbClr val="003366"/>
-              </a:solidFill>
-            </a:endParaRPr>
-          </a:p>
-          <a:p>
-            <a:pPr algn="l">
-              <a:spcBef>
-                <a:spcPts val="0"/>
-              </a:spcBef>
-              <a:spcAft>
-                <a:spcPts val="500"/>
-              </a:spcAft>
-            </a:pPr>
-            <a:r>
-              <a:rPr sz="1600" b="0" i="0" u="none">
-                <a:solidFill>
-                  <a:srgbClr val="003366"/>
-                </a:solidFill>
-              </a:rPr>
-              <a:t>论文必须同时回答“能运行、能验证、能优化”三个问题。</a:t>
-            </a:r>
-            <a:endParaRPr sz="1600" b="0" i="0" u="none">
-              <a:solidFill>
-                <a:srgbClr val="003366"/>
-              </a:solidFill>
-            </a:endParaRPr>
-          </a:p>
-          <a:p>
-            <a:pPr algn="l">
-              <a:spcBef>
-                <a:spcPts val="0"/>
-              </a:spcBef>
-              <a:spcAft>
-                <a:spcPts val="500"/>
-              </a:spcAft>
-            </a:pPr>
-            <a:r>
-              <a:rPr sz="1600" b="0" i="0" u="none">
-                <a:solidFill>
-                  <a:srgbClr val="003366"/>
-                </a:solidFill>
-              </a:rPr>
-              <a:t>性能结论需要统一 baseline 与可复核证据链支撑。</a:t>
-            </a:r>
-            <a:endParaRPr sz="1600" b="0" i="0" u="none">
-              <a:solidFill>
-                <a:srgbClr val="003366"/>
-              </a:solidFill>
-            </a:endParaRPr>
-          </a:p>
-        </p:txBody>
-      </p:sp>
-      <p:sp>
-        <p:nvSpPr>
-          <p:cNvPr id="5" name="Text Placeholder 4"/>
-          <p:cNvSpPr>
-            <a:spLocks noGrp="1"/>
-          </p:cNvSpPr>
-          <p:nvPr>
-            <p:ph type="body" sz="quarter" idx="3"/>
-          </p:nvPr>
-        </p:nvSpPr>
-        <p:spPr/>
-        <p:txBody>
-          <a:bodyPr wrap="square" lIns="0" tIns="0" rIns="0" bIns="0" anchor="ctr"/>
-          <a:lstStyle/>
-          <a:p>
-            <a:pPr algn="l">
-              <a:spcBef>
-                <a:spcPts val="0"/>
-              </a:spcBef>
-              <a:spcAft>
-                <a:spcPts val="500"/>
-              </a:spcAft>
-            </a:pPr>
-            <a:r>
-              <a:rPr sz="1900" b="1" i="0" u="none">
-                <a:solidFill>
-                  <a:srgbClr val="002A57"/>
-                </a:solidFill>
-              </a:rPr>
-              <a:t>论文回答</a:t>
-            </a:r>
-            <a:endParaRPr sz="1900" b="1" i="0" u="none">
-              <a:solidFill>
-                <a:srgbClr val="002A57"/>
-              </a:solidFill>
-            </a:endParaRPr>
-          </a:p>
-        </p:txBody>
-      </p:sp>
-      <p:sp>
-        <p:nvSpPr>
-          <p:cNvPr id="6" name="Content Placeholder 5"/>
-          <p:cNvSpPr>
-            <a:spLocks noGrp="1"/>
-          </p:cNvSpPr>
-          <p:nvPr>
-            <p:ph sz="quarter" idx="4"/>
-          </p:nvPr>
-        </p:nvSpPr>
-        <p:spPr/>
-        <p:txBody>
-          <a:bodyPr wrap="square" tIns="91440" bIns="91440" anchor="t"/>
-          <a:lstStyle/>
-          <a:p>
-            <a:pPr algn="l">
-              <a:spcBef>
-                <a:spcPts val="0"/>
-              </a:spcBef>
-              <a:spcAft>
-                <a:spcPts val="500"/>
-              </a:spcAft>
-            </a:pPr>
-            <a:r>
-              <a:rPr sz="1600" b="0" i="0" u="none">
-                <a:solidFill>
-                  <a:srgbClr val="003366"/>
-                </a:solidFill>
-              </a:rPr>
-              <a:t>完成执行引擎关键模块适配，建立 LoongArch 平台 ART 执行闭环。</a:t>
-            </a:r>
-            <a:endParaRPr sz="1600" b="0" i="0" u="none">
-              <a:solidFill>
-                <a:srgbClr val="003366"/>
-              </a:solidFill>
-            </a:endParaRPr>
-          </a:p>
-          <a:p>
-            <a:pPr algn="l">
-              <a:spcBef>
-                <a:spcPts val="0"/>
-              </a:spcBef>
-              <a:spcAft>
-                <a:spcPts val="500"/>
-              </a:spcAft>
-            </a:pPr>
-            <a:r>
-              <a:rPr sz="1600" b="0" i="0" u="none">
-                <a:solidFill>
-                  <a:srgbClr val="003366"/>
-                </a:solidFill>
-              </a:rPr>
-              <a:t>建立编译、部署、run-test、libcore、benchmark 的统一验证链路。</a:t>
-            </a:r>
-            <a:endParaRPr sz="1600" b="0" i="0" u="none">
-              <a:solidFill>
-                <a:srgbClr val="003366"/>
-              </a:solidFill>
-            </a:endParaRPr>
-          </a:p>
-          <a:p>
-            <a:pPr algn="l">
-              <a:spcBef>
-                <a:spcPts val="0"/>
-              </a:spcBef>
-              <a:spcAft>
-                <a:spcPts val="500"/>
-              </a:spcAft>
-            </a:pPr>
-            <a:r>
-              <a:rPr sz="1600" b="0" i="0" u="none">
-                <a:solidFill>
-                  <a:srgbClr val="003366"/>
-                </a:solidFill>
-              </a:rPr>
-              <a:t>筛选三项正式方案，并区分稳定收益、边界性收益与失败样本。</a:t>
-            </a:r>
-            <a:endParaRPr sz="1600" b="0" i="0" u="none">
-              <a:solidFill>
-                <a:srgbClr val="003366"/>
-              </a:solidFill>
-            </a:endParaRPr>
-          </a:p>
-        </p:txBody>
-      </p:sp>
-      <p:sp>
-        <p:nvSpPr>
-          <p:cNvPr id="7" name="Rounded Rectangle 6"/>
+          <a:bodyPr/>
+          <a:lstStyle/>
+          <a:p/>
+        </p:txBody>
+      </p:sp>
+      <p:sp>
+        <p:nvSpPr>
+          <p:cNvPr id="5" name="Rounded Rectangle 4"/>
           <p:cNvSpPr/>
           <p:nvPr/>
         </p:nvSpPr>
         <p:spPr>
           <a:xfrm>
-            <a:off x="822960" y="5623560"/>
-            <a:ext cx="8732520" cy="384048"/>
+            <a:off x="752546" y="4040123"/>
+            <a:ext cx="1965960" cy="1078992"/>
           </a:xfrm>
           <a:prstGeom prst="roundRect">
             <a:avLst/>
           </a:prstGeom>
           <a:solidFill>
-            <a:srgbClr val="F7FBFB"/>
+            <a:srgbClr val="DCEFD8"/>
           </a:solidFill>
           <a:ln w="15240">
             <a:solidFill>
@@ -8645,10 +8522,31 @@
           </a:fontRef>
         </p:style>
         <p:txBody>
-          <a:bodyPr wrap="square" lIns="27432" tIns="27432" rIns="27432" bIns="27432" rtlCol="0" anchor="ctr"/>
+          <a:bodyPr rtlCol="0" anchor="ctr" wrap="square" lIns="82296" rIns="82296" tIns="82296" bIns="82296"/>
           <a:lstStyle/>
           <a:p>
             <a:pPr algn="ctr">
+              <a:spcBef>
+                <a:spcPts val="0"/>
+              </a:spcBef>
+              <a:spcAft>
+                <a:spcPts val="600"/>
+              </a:spcAft>
+            </a:pPr>
+            <a:r>
+              <a:rPr sz="1700" b="1" i="0" u="none">
+                <a:solidFill>
+                  <a:srgbClr val="003366"/>
+                </a:solidFill>
+              </a:rPr>
+              <a:t>执行引擎适配</a:t>
+            </a:r>
+          </a:p>
+          <a:p>
+            <a:pPr algn="ctr">
+              <a:lnSpc>
+                <a:spcPct val="110000"/>
+              </a:lnSpc>
               <a:spcBef>
                 <a:spcPts val="0"/>
               </a:spcBef>
@@ -8657,223 +8555,36 @@
               </a:spcAft>
             </a:pPr>
             <a:r>
-              <a:rPr sz="1300" b="1" i="0" u="none">
-                <a:solidFill>
-                  <a:srgbClr val="002A57"/>
-                </a:solidFill>
-              </a:rPr>
-              <a:t>主线不是零散 patch，而是“适配设计 → 验证收敛 → 优化筛选”的系统闭环。</a:t>
-            </a:r>
-            <a:endParaRPr sz="1300" b="1" i="0" u="none">
-              <a:solidFill>
-                <a:srgbClr val="002A57"/>
-              </a:solidFill>
-            </a:endParaRPr>
-          </a:p>
-        </p:txBody>
-      </p:sp>
-    </p:spTree>
-  </p:cSld>
-  <p:clrMapOvr>
-    <a:masterClrMapping/>
-  </p:clrMapOvr>
-</p:sld>
-</file>
-
-<file path=ppt/slides/slide5.xml><?xml version="1.0" encoding="utf-8"?>
-<p:sld xmlns:a="http://schemas.openxmlformats.org/drawingml/2006/main" xmlns:r="http://schemas.openxmlformats.org/officeDocument/2006/relationships" xmlns:p="http://schemas.openxmlformats.org/presentationml/2006/main">
-  <p:cSld>
-    <p:spTree>
-      <p:nvGrpSpPr>
-        <p:cNvPr id="1" name=""/>
-        <p:cNvGrpSpPr/>
-        <p:nvPr/>
-      </p:nvGrpSpPr>
-      <p:grpSpPr/>
-      <p:sp>
-        <p:nvSpPr>
-          <p:cNvPr id="2" name="Title 1"/>
-          <p:cNvSpPr>
-            <a:spLocks noGrp="1"/>
-          </p:cNvSpPr>
-          <p:nvPr>
-            <p:ph type="title"/>
-          </p:nvPr>
-        </p:nvSpPr>
-        <p:spPr/>
-        <p:txBody>
-          <a:bodyPr wrap="square" lIns="0" tIns="0" rIns="0" bIns="0" anchor="ctr"/>
-          <a:lstStyle/>
-          <a:p>
-            <a:pPr algn="l">
-              <a:spcBef>
-                <a:spcPts val="0"/>
-              </a:spcBef>
-              <a:spcAft>
-                <a:spcPts val="500"/>
-              </a:spcAft>
-            </a:pPr>
-            <a:r>
-              <a:rPr sz="2800" b="1" i="0" u="none">
+              <a:rPr sz="1300" b="0" i="0" u="none">
                 <a:solidFill>
                   <a:srgbClr val="003366"/>
                 </a:solidFill>
               </a:rPr>
-              <a:t>整体研究路线</a:t>
-            </a:r>
-            <a:endParaRPr sz="2800" b="1" i="0" u="none">
-              <a:solidFill>
-                <a:srgbClr val="003366"/>
-              </a:solidFill>
-            </a:endParaRPr>
-          </a:p>
-        </p:txBody>
-      </p:sp>
-      <p:sp>
-        <p:nvSpPr>
-          <p:cNvPr id="3" name="Text Placeholder 2"/>
-          <p:cNvSpPr>
-            <a:spLocks noGrp="1"/>
-          </p:cNvSpPr>
-          <p:nvPr>
-            <p:ph type="body" sz="half" idx="1"/>
-          </p:nvPr>
-        </p:nvSpPr>
-        <p:spPr/>
-        <p:txBody>
-          <a:bodyPr wrap="square" tIns="91440" bIns="91440" anchor="t"/>
-          <a:lstStyle/>
-          <a:p>
-            <a:pPr algn="l">
-              <a:spcBef>
-                <a:spcPts val="0"/>
-              </a:spcBef>
-              <a:spcAft>
-                <a:spcPts val="800"/>
-              </a:spcAft>
-            </a:pPr>
-            <a:r>
-              <a:rPr sz="1600" b="1" i="0" u="none">
-                <a:solidFill>
-                  <a:srgbClr val="002A57"/>
-                </a:solidFill>
-              </a:rPr>
-              <a:t>本文从“可运行”推进到“可验证”再到“可优化”，最终给出稳定主结论与收益边界。</a:t>
-            </a:r>
-            <a:endParaRPr sz="1600" b="1" i="0" u="none">
-              <a:solidFill>
-                <a:srgbClr val="002A57"/>
-              </a:solidFill>
-            </a:endParaRPr>
-          </a:p>
-          <a:p>
-            <a:pPr algn="l">
-              <a:spcBef>
-                <a:spcPts val="0"/>
-              </a:spcBef>
-              <a:spcAft>
-                <a:spcPts val="500"/>
-              </a:spcAft>
-            </a:pPr>
-            <a:r>
-              <a:rPr sz="1600" b="0" i="0" u="none">
-                <a:solidFill>
-                  <a:srgbClr val="003366"/>
-                </a:solidFill>
-              </a:rPr>
-              <a:t>执行引擎适配解决平台可用性问题。</a:t>
-            </a:r>
-            <a:endParaRPr sz="1600" b="0" i="0" u="none">
-              <a:solidFill>
-                <a:srgbClr val="003366"/>
-              </a:solidFill>
-            </a:endParaRPr>
-          </a:p>
-          <a:p>
-            <a:pPr algn="l">
-              <a:spcBef>
-                <a:spcPts val="0"/>
-              </a:spcBef>
-              <a:spcAft>
-                <a:spcPts val="500"/>
-              </a:spcAft>
-            </a:pPr>
-            <a:r>
-              <a:rPr sz="1600" b="0" i="0" u="none">
-                <a:solidFill>
-                  <a:srgbClr val="003366"/>
-                </a:solidFill>
-              </a:rPr>
-              <a:t>统一验证链路保证语义正确与性能比较口径一致。</a:t>
-            </a:r>
-            <a:endParaRPr sz="1600" b="0" i="0" u="none">
-              <a:solidFill>
-                <a:srgbClr val="003366"/>
-              </a:solidFill>
-            </a:endParaRPr>
-          </a:p>
-          <a:p>
-            <a:pPr algn="l">
-              <a:spcBef>
-                <a:spcPts val="0"/>
-              </a:spcBef>
-              <a:spcAft>
-                <a:spcPts val="500"/>
-              </a:spcAft>
-            </a:pPr>
-            <a:r>
-              <a:rPr sz="1600" b="0" i="0" u="none">
-                <a:solidFill>
-                  <a:srgbClr val="003366"/>
-                </a:solidFill>
-              </a:rPr>
-              <a:t>正式单次对比与重复测量共同约束优化结论的强度。</a:t>
-            </a:r>
-            <a:endParaRPr sz="1600" b="0" i="0" u="none">
-              <a:solidFill>
-                <a:srgbClr val="003366"/>
-              </a:solidFill>
-            </a:endParaRPr>
-          </a:p>
-        </p:txBody>
-      </p:sp>
-      <p:sp>
-        <p:nvSpPr>
-          <p:cNvPr id="4" name="Content Placeholder 3"/>
-          <p:cNvSpPr>
-            <a:spLocks noGrp="1"/>
-          </p:cNvSpPr>
-          <p:nvPr>
-            <p:ph sz="half" idx="2"/>
-          </p:nvPr>
-        </p:nvSpPr>
-        <p:spPr/>
-        <p:txBody>
-          <a:bodyPr/>
-          <a:lstStyle/>
-          <a:p/>
-        </p:txBody>
-      </p:sp>
-      <p:sp>
-        <p:nvSpPr>
-          <p:cNvPr id="5" name="Rounded Rectangle 4"/>
+              <a:t>补齐关键模块，建立 LoongArch 平台可运行 ART。</a:t>
+            </a:r>
+          </a:p>
+        </p:txBody>
+      </p:sp>
+      <p:sp>
+        <p:nvSpPr>
+          <p:cNvPr id="6" name="Chevron 5"/>
           <p:cNvSpPr/>
           <p:nvPr/>
         </p:nvSpPr>
         <p:spPr>
           <a:xfrm>
-            <a:off x="752546" y="4040123"/>
-            <a:ext cx="1965960" cy="1078992"/>
-          </a:xfrm>
-          <a:prstGeom prst="roundRect">
+            <a:off x="2791657" y="4405884"/>
+            <a:ext cx="379428" cy="347472"/>
+          </a:xfrm>
+          <a:prstGeom prst="chevron">
             <a:avLst/>
           </a:prstGeom>
           <a:solidFill>
-            <a:srgbClr val="DCEFD8"/>
+            <a:srgbClr val="002A57"/>
           </a:solidFill>
-          <a:ln w="15240">
+          <a:ln>
             <a:solidFill>
-              <a:srgbClr val="DCEFD8"/>
+              <a:srgbClr val="002A57"/>
             </a:solidFill>
           </a:ln>
         </p:spPr>
@@ -8892,79 +8603,33 @@
           </a:fontRef>
         </p:style>
         <p:txBody>
-          <a:bodyPr wrap="square" lIns="82296" tIns="82296" rIns="82296" bIns="82296" rtlCol="0" anchor="ctr"/>
-          <a:lstStyle/>
-          <a:p>
-            <a:pPr algn="ctr">
-              <a:spcBef>
-                <a:spcPts val="0"/>
-              </a:spcBef>
-              <a:spcAft>
-                <a:spcPts val="600"/>
-              </a:spcAft>
-            </a:pPr>
-            <a:r>
-              <a:rPr sz="1700" b="1" i="0" u="none">
-                <a:solidFill>
-                  <a:srgbClr val="003366"/>
-                </a:solidFill>
-              </a:rPr>
-              <a:t>执行引擎适配</a:t>
-            </a:r>
-            <a:endParaRPr sz="1700" b="1" i="0" u="none">
-              <a:solidFill>
-                <a:srgbClr val="003366"/>
-              </a:solidFill>
-            </a:endParaRPr>
-          </a:p>
-          <a:p>
-            <a:pPr algn="ctr">
-              <a:lnSpc>
-                <a:spcPct val="110000"/>
-              </a:lnSpc>
-              <a:spcBef>
-                <a:spcPts val="0"/>
-              </a:spcBef>
-              <a:spcAft>
-                <a:spcPts val="500"/>
-              </a:spcAft>
-            </a:pPr>
-            <a:r>
-              <a:rPr sz="1300" b="0" i="0" u="none">
-                <a:solidFill>
-                  <a:srgbClr val="003366"/>
-                </a:solidFill>
-              </a:rPr>
-              <a:t>补齐关键模块，建立 LoongArch 平台可运行 ART。</a:t>
-            </a:r>
-            <a:endParaRPr sz="1300" b="0" i="0" u="none">
-              <a:solidFill>
-                <a:srgbClr val="003366"/>
-              </a:solidFill>
-            </a:endParaRPr>
-          </a:p>
-        </p:txBody>
-      </p:sp>
-      <p:sp>
-        <p:nvSpPr>
-          <p:cNvPr id="6" name="Chevron 5"/>
+          <a:bodyPr rtlCol="0" anchor="ctr"/>
+          <a:lstStyle/>
+          <a:p>
+            <a:pPr algn="ctr"/>
+          </a:p>
+        </p:txBody>
+      </p:sp>
+      <p:sp>
+        <p:nvSpPr>
+          <p:cNvPr id="7" name="Rounded Rectangle 6"/>
           <p:cNvSpPr/>
           <p:nvPr/>
         </p:nvSpPr>
         <p:spPr>
           <a:xfrm>
-            <a:off x="2791657" y="4405884"/>
-            <a:ext cx="379428" cy="347472"/>
-          </a:xfrm>
-          <a:prstGeom prst="chevron">
+            <a:off x="3244238" y="4040123"/>
+            <a:ext cx="1965960" cy="1078992"/>
+          </a:xfrm>
+          <a:prstGeom prst="roundRect">
             <a:avLst/>
           </a:prstGeom>
           <a:solidFill>
-            <a:srgbClr val="002A57"/>
+            <a:srgbClr val="DDF6F6"/>
           </a:solidFill>
-          <a:ln>
+          <a:ln w="15240">
             <a:solidFill>
-              <a:srgbClr val="002A57"/>
+              <a:srgbClr val="DDF6F6"/>
             </a:solidFill>
           </a:ln>
         </p:spPr>
@@ -8983,33 +8648,69 @@
           </a:fontRef>
         </p:style>
         <p:txBody>
-          <a:bodyPr rtlCol="0" anchor="ctr"/>
-          <a:lstStyle/>
-          <a:p>
-            <a:pPr algn="ctr"/>
-          </a:p>
-        </p:txBody>
-      </p:sp>
-      <p:sp>
-        <p:nvSpPr>
-          <p:cNvPr id="7" name="Rounded Rectangle 6"/>
+          <a:bodyPr rtlCol="0" anchor="ctr" wrap="square" lIns="82296" rIns="82296" tIns="82296" bIns="82296"/>
+          <a:lstStyle/>
+          <a:p>
+            <a:pPr algn="ctr">
+              <a:spcBef>
+                <a:spcPts val="0"/>
+              </a:spcBef>
+              <a:spcAft>
+                <a:spcPts val="600"/>
+              </a:spcAft>
+            </a:pPr>
+            <a:r>
+              <a:rPr sz="1700" b="1" i="0" u="none">
+                <a:solidFill>
+                  <a:srgbClr val="003366"/>
+                </a:solidFill>
+              </a:rPr>
+              <a:t>统一验证链路</a:t>
+            </a:r>
+          </a:p>
+          <a:p>
+            <a:pPr algn="ctr">
+              <a:lnSpc>
+                <a:spcPct val="110000"/>
+              </a:lnSpc>
+              <a:spcBef>
+                <a:spcPts val="0"/>
+              </a:spcBef>
+              <a:spcAft>
+                <a:spcPts val="500"/>
+              </a:spcAft>
+            </a:pPr>
+            <a:r>
+              <a:rPr sz="1300" b="0" i="0" u="none">
+                <a:solidFill>
+                  <a:srgbClr val="003366"/>
+                </a:solidFill>
+              </a:rPr>
+              <a:t>以 run-test / libcore / benchmark 建立可复核证据。</a:t>
+            </a:r>
+          </a:p>
+        </p:txBody>
+      </p:sp>
+      <p:sp>
+        <p:nvSpPr>
+          <p:cNvPr id="8" name="Chevron 7"/>
           <p:cNvSpPr/>
           <p:nvPr/>
         </p:nvSpPr>
         <p:spPr>
           <a:xfrm>
-            <a:off x="3244238" y="4040123"/>
-            <a:ext cx="1965960" cy="1078992"/>
-          </a:xfrm>
-          <a:prstGeom prst="roundRect">
+            <a:off x="5283350" y="4405884"/>
+            <a:ext cx="379428" cy="347472"/>
+          </a:xfrm>
+          <a:prstGeom prst="chevron">
             <a:avLst/>
           </a:prstGeom>
           <a:solidFill>
-            <a:srgbClr val="DDF6F6"/>
+            <a:srgbClr val="002A57"/>
           </a:solidFill>
-          <a:ln w="15240">
+          <a:ln>
             <a:solidFill>
-              <a:srgbClr val="DDF6F6"/>
+              <a:srgbClr val="002A57"/>
             </a:solidFill>
           </a:ln>
         </p:spPr>
@@ -9028,79 +8729,33 @@
           </a:fontRef>
         </p:style>
         <p:txBody>
-          <a:bodyPr wrap="square" lIns="82296" tIns="82296" rIns="82296" bIns="82296" rtlCol="0" anchor="ctr"/>
-          <a:lstStyle/>
-          <a:p>
-            <a:pPr algn="ctr">
-              <a:spcBef>
-                <a:spcPts val="0"/>
-              </a:spcBef>
-              <a:spcAft>
-                <a:spcPts val="600"/>
-              </a:spcAft>
-            </a:pPr>
-            <a:r>
-              <a:rPr sz="1700" b="1" i="0" u="none">
-                <a:solidFill>
-                  <a:srgbClr val="003366"/>
-                </a:solidFill>
-              </a:rPr>
-              <a:t>统一验证链路</a:t>
-            </a:r>
-            <a:endParaRPr sz="1700" b="1" i="0" u="none">
-              <a:solidFill>
-                <a:srgbClr val="003366"/>
-              </a:solidFill>
-            </a:endParaRPr>
-          </a:p>
-          <a:p>
-            <a:pPr algn="ctr">
-              <a:lnSpc>
-                <a:spcPct val="110000"/>
-              </a:lnSpc>
-              <a:spcBef>
-                <a:spcPts val="0"/>
-              </a:spcBef>
-              <a:spcAft>
-                <a:spcPts val="500"/>
-              </a:spcAft>
-            </a:pPr>
-            <a:r>
-              <a:rPr sz="1300" b="0" i="0" u="none">
-                <a:solidFill>
-                  <a:srgbClr val="003366"/>
-                </a:solidFill>
-              </a:rPr>
-              <a:t>以 run-test / libcore / benchmark 建立可复核证据。</a:t>
-            </a:r>
-            <a:endParaRPr sz="1300" b="0" i="0" u="none">
-              <a:solidFill>
-                <a:srgbClr val="003366"/>
-              </a:solidFill>
-            </a:endParaRPr>
-          </a:p>
-        </p:txBody>
-      </p:sp>
-      <p:sp>
-        <p:nvSpPr>
-          <p:cNvPr id="8" name="Chevron 7"/>
+          <a:bodyPr rtlCol="0" anchor="ctr"/>
+          <a:lstStyle/>
+          <a:p>
+            <a:pPr algn="ctr"/>
+          </a:p>
+        </p:txBody>
+      </p:sp>
+      <p:sp>
+        <p:nvSpPr>
+          <p:cNvPr id="9" name="Rounded Rectangle 8"/>
           <p:cNvSpPr/>
           <p:nvPr/>
         </p:nvSpPr>
         <p:spPr>
           <a:xfrm>
-            <a:off x="5283350" y="4405884"/>
-            <a:ext cx="379428" cy="347472"/>
-          </a:xfrm>
-          <a:prstGeom prst="chevron">
+            <a:off x="5735930" y="4040123"/>
+            <a:ext cx="1965960" cy="1078992"/>
+          </a:xfrm>
+          <a:prstGeom prst="roundRect">
             <a:avLst/>
           </a:prstGeom>
           <a:solidFill>
-            <a:srgbClr val="002A57"/>
+            <a:srgbClr val="DCEFD8"/>
           </a:solidFill>
-          <a:ln>
+          <a:ln w="15240">
             <a:solidFill>
-              <a:srgbClr val="002A57"/>
+              <a:srgbClr val="DCEFD8"/>
             </a:solidFill>
           </a:ln>
         </p:spPr>
@@ -9119,33 +8774,69 @@
           </a:fontRef>
         </p:style>
         <p:txBody>
-          <a:bodyPr rtlCol="0" anchor="ctr"/>
-          <a:lstStyle/>
-          <a:p>
-            <a:pPr algn="ctr"/>
-          </a:p>
-        </p:txBody>
-      </p:sp>
-      <p:sp>
-        <p:nvSpPr>
-          <p:cNvPr id="9" name="Rounded Rectangle 8"/>
+          <a:bodyPr rtlCol="0" anchor="ctr" wrap="square" lIns="82296" rIns="82296" tIns="82296" bIns="82296"/>
+          <a:lstStyle/>
+          <a:p>
+            <a:pPr algn="ctr">
+              <a:spcBef>
+                <a:spcPts val="0"/>
+              </a:spcBef>
+              <a:spcAft>
+                <a:spcPts val="600"/>
+              </a:spcAft>
+            </a:pPr>
+            <a:r>
+              <a:rPr sz="1700" b="1" i="0" u="none">
+                <a:solidFill>
+                  <a:srgbClr val="003366"/>
+                </a:solidFill>
+              </a:rPr>
+              <a:t>热点分析筛选</a:t>
+            </a:r>
+          </a:p>
+          <a:p>
+            <a:pPr algn="ctr">
+              <a:lnSpc>
+                <a:spcPct val="110000"/>
+              </a:lnSpc>
+              <a:spcBef>
+                <a:spcPts val="0"/>
+              </a:spcBef>
+              <a:spcAft>
+                <a:spcPts val="500"/>
+              </a:spcAft>
+            </a:pPr>
+            <a:r>
+              <a:rPr sz="1300" b="0" i="0" u="none">
+                <a:solidFill>
+                  <a:srgbClr val="003366"/>
+                </a:solidFill>
+              </a:rPr>
+              <a:t>固定 baseline，定位真正影响 workload 的主导热点。</a:t>
+            </a:r>
+          </a:p>
+        </p:txBody>
+      </p:sp>
+      <p:sp>
+        <p:nvSpPr>
+          <p:cNvPr id="10" name="Chevron 9"/>
           <p:cNvSpPr/>
           <p:nvPr/>
         </p:nvSpPr>
         <p:spPr>
           <a:xfrm>
-            <a:off x="5735930" y="4040123"/>
-            <a:ext cx="1965960" cy="1078992"/>
-          </a:xfrm>
-          <a:prstGeom prst="roundRect">
+            <a:off x="7775042" y="4405884"/>
+            <a:ext cx="379428" cy="347472"/>
+          </a:xfrm>
+          <a:prstGeom prst="chevron">
             <a:avLst/>
           </a:prstGeom>
           <a:solidFill>
-            <a:srgbClr val="DCEFD8"/>
+            <a:srgbClr val="002A57"/>
           </a:solidFill>
-          <a:ln w="15240">
+          <a:ln>
             <a:solidFill>
-              <a:srgbClr val="DCEFD8"/>
+              <a:srgbClr val="002A57"/>
             </a:solidFill>
           </a:ln>
         </p:spPr>
@@ -9164,79 +8855,33 @@
           </a:fontRef>
         </p:style>
         <p:txBody>
-          <a:bodyPr wrap="square" lIns="82296" tIns="82296" rIns="82296" bIns="82296" rtlCol="0" anchor="ctr"/>
-          <a:lstStyle/>
-          <a:p>
-            <a:pPr algn="ctr">
-              <a:spcBef>
-                <a:spcPts val="0"/>
-              </a:spcBef>
-              <a:spcAft>
-                <a:spcPts val="600"/>
-              </a:spcAft>
-            </a:pPr>
-            <a:r>
-              <a:rPr sz="1700" b="1" i="0" u="none">
-                <a:solidFill>
-                  <a:srgbClr val="003366"/>
-                </a:solidFill>
-              </a:rPr>
-              <a:t>热点分析筛选</a:t>
-            </a:r>
-            <a:endParaRPr sz="1700" b="1" i="0" u="none">
-              <a:solidFill>
-                <a:srgbClr val="003366"/>
-              </a:solidFill>
-            </a:endParaRPr>
-          </a:p>
-          <a:p>
-            <a:pPr algn="ctr">
-              <a:lnSpc>
-                <a:spcPct val="110000"/>
-              </a:lnSpc>
-              <a:spcBef>
-                <a:spcPts val="0"/>
-              </a:spcBef>
-              <a:spcAft>
-                <a:spcPts val="500"/>
-              </a:spcAft>
-            </a:pPr>
-            <a:r>
-              <a:rPr sz="1300" b="0" i="0" u="none">
-                <a:solidFill>
-                  <a:srgbClr val="003366"/>
-                </a:solidFill>
-              </a:rPr>
-              <a:t>固定 baseline，定位真正影响 workload 的主导热点。</a:t>
-            </a:r>
-            <a:endParaRPr sz="1300" b="0" i="0" u="none">
-              <a:solidFill>
-                <a:srgbClr val="003366"/>
-              </a:solidFill>
-            </a:endParaRPr>
-          </a:p>
-        </p:txBody>
-      </p:sp>
-      <p:sp>
-        <p:nvSpPr>
-          <p:cNvPr id="10" name="Chevron 9"/>
+          <a:bodyPr rtlCol="0" anchor="ctr"/>
+          <a:lstStyle/>
+          <a:p>
+            <a:pPr algn="ctr"/>
+          </a:p>
+        </p:txBody>
+      </p:sp>
+      <p:sp>
+        <p:nvSpPr>
+          <p:cNvPr id="11" name="Rounded Rectangle 10"/>
           <p:cNvSpPr/>
           <p:nvPr/>
         </p:nvSpPr>
         <p:spPr>
           <a:xfrm>
-            <a:off x="7775042" y="4405884"/>
-            <a:ext cx="379428" cy="347472"/>
-          </a:xfrm>
-          <a:prstGeom prst="chevron">
+            <a:off x="8227623" y="4040123"/>
+            <a:ext cx="1965960" cy="1078992"/>
+          </a:xfrm>
+          <a:prstGeom prst="roundRect">
             <a:avLst/>
           </a:prstGeom>
           <a:solidFill>
-            <a:srgbClr val="002A57"/>
+            <a:srgbClr val="DDF6F6"/>
           </a:solidFill>
-          <a:ln>
+          <a:ln w="15240">
             <a:solidFill>
-              <a:srgbClr val="002A57"/>
+              <a:srgbClr val="DDF6F6"/>
             </a:solidFill>
           </a:ln>
         </p:spPr>
@@ -9255,33 +8900,69 @@
           </a:fontRef>
         </p:style>
         <p:txBody>
-          <a:bodyPr rtlCol="0" anchor="ctr"/>
-          <a:lstStyle/>
-          <a:p>
-            <a:pPr algn="ctr"/>
-          </a:p>
-        </p:txBody>
-      </p:sp>
-      <p:sp>
-        <p:nvSpPr>
-          <p:cNvPr id="11" name="Rounded Rectangle 10"/>
+          <a:bodyPr rtlCol="0" anchor="ctr" wrap="square" lIns="82296" rIns="82296" tIns="82296" bIns="82296"/>
+          <a:lstStyle/>
+          <a:p>
+            <a:pPr algn="ctr">
+              <a:spcBef>
+                <a:spcPts val="0"/>
+              </a:spcBef>
+              <a:spcAft>
+                <a:spcPts val="600"/>
+              </a:spcAft>
+            </a:pPr>
+            <a:r>
+              <a:rPr sz="1700" b="1" i="0" u="none">
+                <a:solidFill>
+                  <a:srgbClr val="003366"/>
+                </a:solidFill>
+              </a:rPr>
+              <a:t>正式结论形成</a:t>
+            </a:r>
+          </a:p>
+          <a:p>
+            <a:pPr algn="ctr">
+              <a:lnSpc>
+                <a:spcPct val="110000"/>
+              </a:lnSpc>
+              <a:spcBef>
+                <a:spcPts val="0"/>
+              </a:spcBef>
+              <a:spcAft>
+                <a:spcPts val="500"/>
+              </a:spcAft>
+            </a:pPr>
+            <a:r>
+              <a:rPr sz="1300" b="0" i="0" u="none">
+                <a:solidFill>
+                  <a:srgbClr val="003366"/>
+                </a:solidFill>
+              </a:rPr>
+              <a:t>区分稳定收益、边界性收益与失败样本。</a:t>
+            </a:r>
+          </a:p>
+        </p:txBody>
+      </p:sp>
+      <p:sp>
+        <p:nvSpPr>
+          <p:cNvPr id="12" name="Rounded Rectangle 11"/>
           <p:cNvSpPr/>
           <p:nvPr/>
         </p:nvSpPr>
         <p:spPr>
           <a:xfrm>
-            <a:off x="8227623" y="4040123"/>
-            <a:ext cx="1965960" cy="1078992"/>
+            <a:off x="960120" y="5230368"/>
+            <a:ext cx="2560320" cy="621792"/>
           </a:xfrm>
           <a:prstGeom prst="roundRect">
             <a:avLst/>
           </a:prstGeom>
           <a:solidFill>
-            <a:srgbClr val="DDF6F6"/>
+            <a:srgbClr val="DCEFD8"/>
           </a:solidFill>
           <a:ln w="15240">
             <a:solidFill>
-              <a:srgbClr val="DDF6F6"/>
+              <a:srgbClr val="DCEFD8"/>
             </a:solidFill>
           </a:ln>
         </p:spPr>
@@ -9300,7 +8981,7 @@
           </a:fontRef>
         </p:style>
         <p:txBody>
-          <a:bodyPr wrap="square" lIns="82296" tIns="82296" rIns="82296" bIns="82296" rtlCol="0" anchor="ctr"/>
+          <a:bodyPr rtlCol="0" anchor="ctr" wrap="square" lIns="45720" rIns="45720"/>
           <a:lstStyle/>
           <a:p>
             <a:pPr algn="ctr">
@@ -9308,28 +8989,20 @@
                 <a:spcPts val="0"/>
               </a:spcBef>
               <a:spcAft>
-                <a:spcPts val="600"/>
+                <a:spcPts val="200"/>
               </a:spcAft>
             </a:pPr>
             <a:r>
-              <a:rPr sz="1700" b="1" i="0" u="none">
+              <a:rPr sz="1300" b="1" i="0" u="none">
                 <a:solidFill>
                   <a:srgbClr val="003366"/>
                 </a:solidFill>
               </a:rPr>
-              <a:t>正式结论形成</a:t>
-            </a:r>
-            <a:endParaRPr sz="1700" b="1" i="0" u="none">
-              <a:solidFill>
-                <a:srgbClr val="003366"/>
-              </a:solidFill>
-            </a:endParaRPr>
+              <a:t>工程产出</a:t>
+            </a:r>
           </a:p>
           <a:p>
             <a:pPr algn="ctr">
-              <a:lnSpc>
-                <a:spcPct val="110000"/>
-              </a:lnSpc>
               <a:spcBef>
                 <a:spcPts val="0"/>
               </a:spcBef>
@@ -9338,41 +9011,36 @@
               </a:spcAft>
             </a:pPr>
             <a:r>
-              <a:rPr sz="1300" b="0" i="0" u="none">
-                <a:solidFill>
-                  <a:srgbClr val="003366"/>
-                </a:solidFill>
-              </a:rPr>
-              <a:t>区分稳定收益、边界性收益与失败样本。</a:t>
-            </a:r>
-            <a:endParaRPr sz="1300" b="0" i="0" u="none">
-              <a:solidFill>
-                <a:srgbClr val="003366"/>
-              </a:solidFill>
-            </a:endParaRPr>
-          </a:p>
-        </p:txBody>
-      </p:sp>
-      <p:sp>
-        <p:nvSpPr>
-          <p:cNvPr id="12" name="Rounded Rectangle 11"/>
+              <a:rPr sz="2000" b="1" i="0" u="none">
+                <a:solidFill>
+                  <a:srgbClr val="002A57"/>
+                </a:solidFill>
+              </a:rPr>
+              <a:t>执行闭环</a:t>
+            </a:r>
+          </a:p>
+        </p:txBody>
+      </p:sp>
+      <p:sp>
+        <p:nvSpPr>
+          <p:cNvPr id="13" name="Rounded Rectangle 12"/>
           <p:cNvSpPr/>
           <p:nvPr/>
         </p:nvSpPr>
         <p:spPr>
           <a:xfrm>
-            <a:off x="960120" y="5230368"/>
+            <a:off x="3703320" y="5230368"/>
             <a:ext cx="2560320" cy="621792"/>
           </a:xfrm>
           <a:prstGeom prst="roundRect">
             <a:avLst/>
           </a:prstGeom>
           <a:solidFill>
-            <a:srgbClr val="DCEFD8"/>
+            <a:srgbClr val="DDF6F6"/>
           </a:solidFill>
           <a:ln w="15240">
             <a:solidFill>
-              <a:srgbClr val="DCEFD8"/>
+              <a:srgbClr val="DDF6F6"/>
             </a:solidFill>
           </a:ln>
         </p:spPr>
@@ -9391,7 +9059,7 @@
           </a:fontRef>
         </p:style>
         <p:txBody>
-          <a:bodyPr wrap="square" lIns="45720" rIns="45720" rtlCol="0" anchor="ctr"/>
+          <a:bodyPr rtlCol="0" anchor="ctr" wrap="square" lIns="45720" rIns="45720"/>
           <a:lstStyle/>
           <a:p>
             <a:pPr algn="ctr">
@@ -9408,13 +9076,8 @@
                   <a:srgbClr val="003366"/>
                 </a:solidFill>
               </a:rPr>
-              <a:t>工程产出</a:t>
-            </a:r>
-            <a:endParaRPr sz="1300" b="1" i="0" u="none">
-              <a:solidFill>
-                <a:srgbClr val="003366"/>
-              </a:solidFill>
-            </a:endParaRPr>
+              <a:t>方法产出</a:t>
+            </a:r>
           </a:p>
           <a:p>
             <a:pPr algn="ctr">
@@ -9431,36 +9094,31 @@
                   <a:srgbClr val="002A57"/>
                 </a:solidFill>
               </a:rPr>
-              <a:t>执行闭环</a:t>
-            </a:r>
-            <a:endParaRPr sz="2000" b="1" i="0" u="none">
-              <a:solidFill>
-                <a:srgbClr val="002A57"/>
-              </a:solidFill>
-            </a:endParaRPr>
-          </a:p>
-        </p:txBody>
-      </p:sp>
-      <p:sp>
-        <p:nvSpPr>
-          <p:cNvPr id="13" name="Rounded Rectangle 12"/>
+              <a:t>统一验证链路</a:t>
+            </a:r>
+          </a:p>
+        </p:txBody>
+      </p:sp>
+      <p:sp>
+        <p:nvSpPr>
+          <p:cNvPr id="14" name="Rounded Rectangle 13"/>
           <p:cNvSpPr/>
           <p:nvPr/>
         </p:nvSpPr>
         <p:spPr>
           <a:xfrm>
-            <a:off x="3703320" y="5230368"/>
+            <a:off x="6446520" y="5230368"/>
             <a:ext cx="2560320" cy="621792"/>
           </a:xfrm>
           <a:prstGeom prst="roundRect">
             <a:avLst/>
           </a:prstGeom>
           <a:solidFill>
-            <a:srgbClr val="DDF6F6"/>
+            <a:srgbClr val="DCEFD8"/>
           </a:solidFill>
           <a:ln w="15240">
             <a:solidFill>
-              <a:srgbClr val="DDF6F6"/>
+              <a:srgbClr val="DCEFD8"/>
             </a:solidFill>
           </a:ln>
         </p:spPr>
@@ -9479,7 +9137,7 @@
           </a:fontRef>
         </p:style>
         <p:txBody>
-          <a:bodyPr wrap="square" lIns="45720" rIns="45720" rtlCol="0" anchor="ctr"/>
+          <a:bodyPr rtlCol="0" anchor="ctr" wrap="square" lIns="45720" rIns="45720"/>
           <a:lstStyle/>
           <a:p>
             <a:pPr algn="ctr">
@@ -9496,13 +9154,8 @@
                   <a:srgbClr val="003366"/>
                 </a:solidFill>
               </a:rPr>
-              <a:t>方法产出</a:t>
-            </a:r>
-            <a:endParaRPr sz="1300" b="1" i="0" u="none">
-              <a:solidFill>
-                <a:srgbClr val="003366"/>
-              </a:solidFill>
-            </a:endParaRPr>
+              <a:t>研究产出</a:t>
+            </a:r>
           </a:p>
           <a:p>
             <a:pPr algn="ctr">
@@ -9519,36 +9172,169 @@
                   <a:srgbClr val="002A57"/>
                 </a:solidFill>
               </a:rPr>
-              <a:t>统一验证链路</a:t>
-            </a:r>
-            <a:endParaRPr sz="2000" b="1" i="0" u="none">
-              <a:solidFill>
-                <a:srgbClr val="002A57"/>
-              </a:solidFill>
-            </a:endParaRPr>
-          </a:p>
-        </p:txBody>
-      </p:sp>
-      <p:sp>
-        <p:nvSpPr>
-          <p:cNvPr id="14" name="Rounded Rectangle 13"/>
+              <a:t>稳定主收益结论</a:t>
+            </a:r>
+          </a:p>
+        </p:txBody>
+      </p:sp>
+    </p:spTree>
+  </p:cSld>
+  <p:clrMapOvr>
+    <a:masterClrMapping/>
+  </p:clrMapOvr>
+</p:sld>
+</file>
+
+<file path=ppt/slides/slide6.xml><?xml version="1.0" encoding="utf-8"?>
+<p:sld xmlns:a="http://schemas.openxmlformats.org/drawingml/2006/main" xmlns:p="http://schemas.openxmlformats.org/presentationml/2006/main" xmlns:r="http://schemas.openxmlformats.org/officeDocument/2006/relationships">
+  <p:cSld>
+    <p:spTree>
+      <p:nvGrpSpPr>
+        <p:cNvPr id="1" name=""/>
+        <p:cNvGrpSpPr/>
+        <p:nvPr/>
+      </p:nvGrpSpPr>
+      <p:grpSpPr/>
+      <p:sp>
+        <p:nvSpPr>
+          <p:cNvPr id="2" name="Title 1"/>
+          <p:cNvSpPr>
+            <a:spLocks noGrp="1"/>
+          </p:cNvSpPr>
+          <p:nvPr>
+            <p:ph type="title"/>
+          </p:nvPr>
+        </p:nvSpPr>
+        <p:spPr/>
+        <p:txBody>
+          <a:bodyPr wrap="square" anchor="ctr" lIns="0" rIns="0" tIns="0" bIns="0"/>
+          <a:lstStyle/>
+          <a:p>
+            <a:pPr algn="l">
+              <a:spcBef>
+                <a:spcPts val="0"/>
+              </a:spcBef>
+              <a:spcAft>
+                <a:spcPts val="500"/>
+              </a:spcAft>
+            </a:pPr>
+            <a:r>
+              <a:rPr sz="3000" b="1" i="0" u="none">
+                <a:solidFill>
+                  <a:srgbClr val="002A57"/>
+                </a:solidFill>
+              </a:rPr>
+              <a:t>二、执行引擎适配与验证</a:t>
+            </a:r>
+          </a:p>
+        </p:txBody>
+      </p:sp>
+      <p:sp>
+        <p:nvSpPr>
+          <p:cNvPr id="3" name="Text Placeholder 2"/>
+          <p:cNvSpPr>
+            <a:spLocks noGrp="1"/>
+          </p:cNvSpPr>
+          <p:nvPr>
+            <p:ph type="body" idx="1"/>
+          </p:nvPr>
+        </p:nvSpPr>
+        <p:spPr/>
+        <p:txBody>
+          <a:bodyPr wrap="square" anchor="ctr" lIns="0" rIns="0" tIns="0" bIns="0"/>
+          <a:lstStyle/>
+          <a:p>
+            <a:pPr algn="l">
+              <a:spcBef>
+                <a:spcPts val="0"/>
+              </a:spcBef>
+              <a:spcAft>
+                <a:spcPts val="500"/>
+              </a:spcAft>
+            </a:pPr>
+            <a:r>
+              <a:rPr sz="1800" b="0" i="0" u="none">
+                <a:solidFill>
+                  <a:srgbClr val="5B6470"/>
+                </a:solidFill>
+              </a:rPr>
+              <a:t>建立可运行、可验证的 LoongArch 平台 ART</a:t>
+            </a:r>
+          </a:p>
+        </p:txBody>
+      </p:sp>
+    </p:spTree>
+  </p:cSld>
+  <p:clrMapOvr>
+    <a:masterClrMapping/>
+  </p:clrMapOvr>
+</p:sld>
+</file>
+
+<file path=ppt/slides/slide7.xml><?xml version="1.0" encoding="utf-8"?>
+<p:sld xmlns:a="http://schemas.openxmlformats.org/drawingml/2006/main" xmlns:p="http://schemas.openxmlformats.org/presentationml/2006/main" xmlns:r="http://schemas.openxmlformats.org/officeDocument/2006/relationships">
+  <p:cSld>
+    <p:spTree>
+      <p:nvGrpSpPr>
+        <p:cNvPr id="1" name=""/>
+        <p:cNvGrpSpPr/>
+        <p:nvPr/>
+      </p:nvGrpSpPr>
+      <p:grpSpPr/>
+      <p:sp>
+        <p:nvSpPr>
+          <p:cNvPr id="2" name="Title 1"/>
+          <p:cNvSpPr>
+            <a:spLocks noGrp="1"/>
+          </p:cNvSpPr>
+          <p:nvPr>
+            <p:ph type="title"/>
+          </p:nvPr>
+        </p:nvSpPr>
+        <p:spPr/>
+        <p:txBody>
+          <a:bodyPr wrap="square" anchor="ctr" lIns="0" rIns="0" tIns="0" bIns="0"/>
+          <a:lstStyle/>
+          <a:p>
+            <a:pPr algn="l">
+              <a:spcBef>
+                <a:spcPts val="0"/>
+              </a:spcBef>
+              <a:spcAft>
+                <a:spcPts val="500"/>
+              </a:spcAft>
+            </a:pPr>
+            <a:r>
+              <a:rPr sz="2800" b="1" i="0" u="none">
+                <a:solidFill>
+                  <a:srgbClr val="003366"/>
+                </a:solidFill>
+              </a:rPr>
+              <a:t>执行引擎适配的系统闭环</a:t>
+            </a:r>
+          </a:p>
+        </p:txBody>
+      </p:sp>
+      <p:sp>
+        <p:nvSpPr>
+          <p:cNvPr id="3" name="Rounded Rectangle 2"/>
           <p:cNvSpPr/>
           <p:nvPr/>
         </p:nvSpPr>
         <p:spPr>
           <a:xfrm>
-            <a:off x="6446520" y="5230368"/>
-            <a:ext cx="2560320" cy="621792"/>
+            <a:off x="749808" y="1078992"/>
+            <a:ext cx="8732520" cy="384048"/>
           </a:xfrm>
           <a:prstGeom prst="roundRect">
             <a:avLst/>
           </a:prstGeom>
           <a:solidFill>
-            <a:srgbClr val="DCEFD8"/>
+            <a:srgbClr val="002A57"/>
           </a:solidFill>
           <a:ln w="15240">
             <a:solidFill>
-              <a:srgbClr val="DCEFD8"/>
+              <a:srgbClr val="002A57"/>
             </a:solidFill>
           </a:ln>
         </p:spPr>
@@ -9567,31 +9353,8 @@
           </a:fontRef>
         </p:style>
         <p:txBody>
-          <a:bodyPr wrap="square" lIns="45720" rIns="45720" rtlCol="0" anchor="ctr"/>
-          <a:lstStyle/>
-          <a:p>
-            <a:pPr algn="ctr">
-              <a:spcBef>
-                <a:spcPts val="0"/>
-              </a:spcBef>
-              <a:spcAft>
-                <a:spcPts val="200"/>
-              </a:spcAft>
-            </a:pPr>
-            <a:r>
-              <a:rPr sz="1300" b="1" i="0" u="none">
-                <a:solidFill>
-                  <a:srgbClr val="003366"/>
-                </a:solidFill>
-              </a:rPr>
-              <a:t>研究产出</a:t>
-            </a:r>
-            <a:endParaRPr sz="1300" b="1" i="0" u="none">
-              <a:solidFill>
-                <a:srgbClr val="003366"/>
-              </a:solidFill>
-            </a:endParaRPr>
-          </a:p>
+          <a:bodyPr rtlCol="0" anchor="ctr" wrap="square" lIns="18288" rIns="18288" tIns="18288" bIns="18288"/>
+          <a:lstStyle/>
           <a:p>
             <a:pPr algn="ctr">
               <a:spcBef>
@@ -9602,194 +9365,36 @@
               </a:spcAft>
             </a:pPr>
             <a:r>
-              <a:rPr sz="2000" b="1" i="0" u="none">
-                <a:solidFill>
-                  <a:srgbClr val="002A57"/>
-                </a:solidFill>
-              </a:rPr>
-              <a:t>稳定主收益结论</a:t>
-            </a:r>
-            <a:endParaRPr sz="2000" b="1" i="0" u="none">
-              <a:solidFill>
-                <a:srgbClr val="002A57"/>
-              </a:solidFill>
-            </a:endParaRPr>
-          </a:p>
-        </p:txBody>
-      </p:sp>
-    </p:spTree>
-  </p:cSld>
-  <p:clrMapOvr>
-    <a:masterClrMapping/>
-  </p:clrMapOvr>
-</p:sld>
-</file>
-
-<file path=ppt/slides/slide6.xml><?xml version="1.0" encoding="utf-8"?>
-<p:sld xmlns:a="http://schemas.openxmlformats.org/drawingml/2006/main" xmlns:r="http://schemas.openxmlformats.org/officeDocument/2006/relationships" xmlns:p="http://schemas.openxmlformats.org/presentationml/2006/main">
-  <p:cSld>
-    <p:spTree>
-      <p:nvGrpSpPr>
-        <p:cNvPr id="1" name=""/>
-        <p:cNvGrpSpPr/>
-        <p:nvPr/>
-      </p:nvGrpSpPr>
-      <p:grpSpPr/>
-      <p:sp>
-        <p:nvSpPr>
-          <p:cNvPr id="2" name="Title 1"/>
-          <p:cNvSpPr>
-            <a:spLocks noGrp="1"/>
-          </p:cNvSpPr>
-          <p:nvPr>
-            <p:ph type="title"/>
-          </p:nvPr>
-        </p:nvSpPr>
-        <p:spPr/>
-        <p:txBody>
-          <a:bodyPr wrap="square" lIns="0" tIns="0" rIns="0" bIns="0" anchor="ctr"/>
-          <a:lstStyle/>
-          <a:p>
-            <a:pPr algn="l">
-              <a:spcBef>
-                <a:spcPts val="0"/>
-              </a:spcBef>
-              <a:spcAft>
-                <a:spcPts val="500"/>
-              </a:spcAft>
-            </a:pPr>
-            <a:r>
-              <a:rPr sz="3000" b="1" i="0" u="none">
-                <a:solidFill>
-                  <a:srgbClr val="002A57"/>
-                </a:solidFill>
-              </a:rPr>
-              <a:t>二、执行引擎适配与验证</a:t>
-            </a:r>
-            <a:endParaRPr sz="3000" b="1" i="0" u="none">
-              <a:solidFill>
-                <a:srgbClr val="002A57"/>
-              </a:solidFill>
-            </a:endParaRPr>
-          </a:p>
-        </p:txBody>
-      </p:sp>
-      <p:sp>
-        <p:nvSpPr>
-          <p:cNvPr id="3" name="Text Placeholder 2"/>
-          <p:cNvSpPr>
-            <a:spLocks noGrp="1"/>
-          </p:cNvSpPr>
-          <p:nvPr>
-            <p:ph type="body" idx="1"/>
-          </p:nvPr>
-        </p:nvSpPr>
-        <p:spPr/>
-        <p:txBody>
-          <a:bodyPr wrap="square" lIns="0" tIns="0" rIns="0" bIns="0" anchor="ctr"/>
-          <a:lstStyle/>
-          <a:p>
-            <a:pPr algn="l">
-              <a:spcBef>
-                <a:spcPts val="0"/>
-              </a:spcBef>
-              <a:spcAft>
-                <a:spcPts val="500"/>
-              </a:spcAft>
-            </a:pPr>
-            <a:r>
-              <a:rPr sz="1800" b="0" i="0" u="none">
-                <a:solidFill>
-                  <a:srgbClr val="5B6470"/>
-                </a:solidFill>
-              </a:rPr>
-              <a:t>建立可运行、可验证的 LoongArch 平台 ART</a:t>
-            </a:r>
-            <a:endParaRPr sz="1800" b="0" i="0" u="none">
-              <a:solidFill>
-                <a:srgbClr val="5B6470"/>
-              </a:solidFill>
-            </a:endParaRPr>
-          </a:p>
-        </p:txBody>
-      </p:sp>
-    </p:spTree>
-  </p:cSld>
-  <p:clrMapOvr>
-    <a:masterClrMapping/>
-  </p:clrMapOvr>
-</p:sld>
-</file>
-
-<file path=ppt/slides/slide7.xml><?xml version="1.0" encoding="utf-8"?>
-<p:sld xmlns:a="http://schemas.openxmlformats.org/drawingml/2006/main" xmlns:r="http://schemas.openxmlformats.org/officeDocument/2006/relationships" xmlns:p="http://schemas.openxmlformats.org/presentationml/2006/main">
-  <p:cSld>
-    <p:spTree>
-      <p:nvGrpSpPr>
-        <p:cNvPr id="1" name=""/>
-        <p:cNvGrpSpPr/>
-        <p:nvPr/>
-      </p:nvGrpSpPr>
-      <p:grpSpPr/>
-      <p:sp>
-        <p:nvSpPr>
-          <p:cNvPr id="2" name="Title 1"/>
-          <p:cNvSpPr>
-            <a:spLocks noGrp="1"/>
-          </p:cNvSpPr>
-          <p:nvPr>
-            <p:ph type="title"/>
-          </p:nvPr>
-        </p:nvSpPr>
-        <p:spPr/>
-        <p:txBody>
-          <a:bodyPr wrap="square" lIns="0" tIns="0" rIns="0" bIns="0" anchor="ctr"/>
-          <a:lstStyle/>
-          <a:p>
-            <a:pPr algn="l">
-              <a:spcBef>
-                <a:spcPts val="0"/>
-              </a:spcBef>
-              <a:spcAft>
-                <a:spcPts val="500"/>
-              </a:spcAft>
-            </a:pPr>
-            <a:r>
-              <a:rPr sz="2800" b="1" i="0" u="none">
-                <a:solidFill>
-                  <a:srgbClr val="003366"/>
-                </a:solidFill>
-              </a:rPr>
-              <a:t>执行引擎适配的系统闭环</a:t>
-            </a:r>
-            <a:endParaRPr sz="2800" b="1" i="0" u="none">
-              <a:solidFill>
-                <a:srgbClr val="003366"/>
-              </a:solidFill>
-            </a:endParaRPr>
-          </a:p>
-        </p:txBody>
-      </p:sp>
-      <p:sp>
-        <p:nvSpPr>
-          <p:cNvPr id="3" name="Rounded Rectangle 2"/>
+              <a:rPr sz="1300" b="1" i="0" u="none">
+                <a:solidFill>
+                  <a:srgbClr val="FFFFFF"/>
+                </a:solidFill>
+              </a:rPr>
+              <a:t>核心目标：以执行路径为主线补齐关键模块，形成可运行、可验证的 LoongArch 平台 ART 执行闭环</a:t>
+            </a:r>
+          </a:p>
+        </p:txBody>
+      </p:sp>
+      <p:sp>
+        <p:nvSpPr>
+          <p:cNvPr id="4" name="Rounded Rectangle 3"/>
           <p:cNvSpPr/>
           <p:nvPr/>
         </p:nvSpPr>
         <p:spPr>
           <a:xfrm>
-            <a:off x="749808" y="1078992"/>
-            <a:ext cx="8732520" cy="384048"/>
+            <a:off x="868680" y="1664208"/>
+            <a:ext cx="8641080" cy="502920"/>
           </a:xfrm>
           <a:prstGeom prst="roundRect">
             <a:avLst/>
           </a:prstGeom>
           <a:solidFill>
-            <a:srgbClr val="002A57"/>
+            <a:srgbClr val="F7FBFB"/>
           </a:solidFill>
           <a:ln w="15240">
             <a:solidFill>
-              <a:srgbClr val="002A57"/>
+              <a:srgbClr val="FFFFFF"/>
             </a:solidFill>
           </a:ln>
         </p:spPr>
@@ -9808,10 +9413,13 @@
           </a:fontRef>
         </p:style>
         <p:txBody>
-          <a:bodyPr wrap="square" lIns="18288" tIns="18288" rIns="18288" bIns="18288" rtlCol="0" anchor="ctr"/>
+          <a:bodyPr rtlCol="0" anchor="ctr" wrap="square" lIns="18288" rIns="18288" tIns="18288" bIns="18288"/>
           <a:lstStyle/>
           <a:p>
             <a:pPr algn="ctr">
+              <a:lnSpc>
+                <a:spcPct val="105000"/>
+              </a:lnSpc>
               <a:spcBef>
                 <a:spcPts val="0"/>
               </a:spcBef>
@@ -9820,41 +9428,36 @@
               </a:spcAft>
             </a:pPr>
             <a:r>
-              <a:rPr sz="1300" b="1" i="0" u="none">
-                <a:solidFill>
-                  <a:srgbClr val="FFFFFF"/>
-                </a:solidFill>
-              </a:rPr>
-              <a:t>核心目标：以执行路径为主线补齐关键模块，形成可运行、可验证的 LoongArch 平台 ART 执行闭环</a:t>
-            </a:r>
-            <a:endParaRPr sz="1300" b="1" i="0" u="none">
-              <a:solidFill>
-                <a:srgbClr val="FFFFFF"/>
-              </a:solidFill>
-            </a:endParaRPr>
-          </a:p>
-        </p:txBody>
-      </p:sp>
-      <p:sp>
-        <p:nvSpPr>
-          <p:cNvPr id="4" name="Rounded Rectangle 3"/>
+              <a:rPr sz="1500" b="1" i="0" u="none">
+                <a:solidFill>
+                  <a:srgbClr val="002A57"/>
+                </a:solidFill>
+              </a:rPr>
+              <a:t>从汇编器、解释器到 JIT、JNI 与运行时入口，关键不是单点可跑，而是整条执行链条同时闭合。</a:t>
+            </a:r>
+          </a:p>
+        </p:txBody>
+      </p:sp>
+      <p:sp>
+        <p:nvSpPr>
+          <p:cNvPr id="5" name="Rounded Rectangle 4"/>
           <p:cNvSpPr/>
           <p:nvPr/>
         </p:nvSpPr>
         <p:spPr>
           <a:xfrm>
-            <a:off x="868680" y="1664208"/>
-            <a:ext cx="8641080" cy="502920"/>
+            <a:off x="868680" y="2487168"/>
+            <a:ext cx="2240280" cy="1078992"/>
           </a:xfrm>
           <a:prstGeom prst="roundRect">
             <a:avLst/>
           </a:prstGeom>
           <a:solidFill>
-            <a:srgbClr val="F7FBFB"/>
+            <a:srgbClr val="DCEFD8"/>
           </a:solidFill>
           <a:ln w="15240">
             <a:solidFill>
-              <a:srgbClr val="FFFFFF"/>
+              <a:srgbClr val="DCEFD8"/>
             </a:solidFill>
           </a:ln>
         </p:spPr>
@@ -9873,12 +9476,30 @@
           </a:fontRef>
         </p:style>
         <p:txBody>
-          <a:bodyPr wrap="square" lIns="18288" tIns="18288" rIns="18288" bIns="18288" rtlCol="0" anchor="ctr"/>
-          <a:lstStyle/>
+          <a:bodyPr rtlCol="0" anchor="ctr" wrap="square" lIns="82296" rIns="82296" tIns="82296" bIns="82296"/>
+          <a:lstStyle/>
+          <a:p>
+            <a:pPr algn="ctr">
+              <a:spcBef>
+                <a:spcPts val="0"/>
+              </a:spcBef>
+              <a:spcAft>
+                <a:spcPts val="600"/>
+              </a:spcAft>
+            </a:pPr>
+            <a:r>
+              <a:rPr sz="1700" b="1" i="0" u="none">
+                <a:solidFill>
+                  <a:srgbClr val="003366"/>
+                </a:solidFill>
+              </a:rPr>
+              <a:t>Assembler 与基础生成</a:t>
+            </a:r>
+          </a:p>
           <a:p>
             <a:pPr algn="ctr">
               <a:lnSpc>
-                <a:spcPct val="105000"/>
+                <a:spcPct val="110000"/>
               </a:lnSpc>
               <a:spcBef>
                 <a:spcPts val="0"/>
@@ -9888,41 +9509,36 @@
               </a:spcAft>
             </a:pPr>
             <a:r>
-              <a:rPr sz="1500" b="1" i="0" u="none">
-                <a:solidFill>
-                  <a:srgbClr val="002A57"/>
-                </a:solidFill>
-              </a:rPr>
-              <a:t>从汇编器、解释器到 JIT、JNI 与运行时入口，关键不是单点可跑，而是整条执行链条同时闭合。</a:t>
-            </a:r>
-            <a:endParaRPr sz="1500" b="1" i="0" u="none">
-              <a:solidFill>
-                <a:srgbClr val="002A57"/>
-              </a:solidFill>
-            </a:endParaRPr>
-          </a:p>
-        </p:txBody>
-      </p:sp>
-      <p:sp>
-        <p:nvSpPr>
-          <p:cNvPr id="5" name="Rounded Rectangle 4"/>
+              <a:rPr sz="1300" b="0" i="0" u="none">
+                <a:solidFill>
+                  <a:srgbClr val="003366"/>
+                </a:solidFill>
+              </a:rPr>
+              <a:t>寄存器、指令编码、分支与链接修补能力。</a:t>
+            </a:r>
+          </a:p>
+        </p:txBody>
+      </p:sp>
+      <p:sp>
+        <p:nvSpPr>
+          <p:cNvPr id="6" name="Rounded Rectangle 5"/>
           <p:cNvSpPr/>
           <p:nvPr/>
         </p:nvSpPr>
         <p:spPr>
           <a:xfrm>
-            <a:off x="868680" y="2487168"/>
+            <a:off x="3657600" y="2487168"/>
             <a:ext cx="2240280" cy="1078992"/>
           </a:xfrm>
           <a:prstGeom prst="roundRect">
             <a:avLst/>
           </a:prstGeom>
           <a:solidFill>
-            <a:srgbClr val="DCEFD8"/>
+            <a:srgbClr val="DDF6F6"/>
           </a:solidFill>
           <a:ln w="15240">
             <a:solidFill>
-              <a:srgbClr val="DCEFD8"/>
+              <a:srgbClr val="DDF6F6"/>
             </a:solidFill>
           </a:ln>
         </p:spPr>
@@ -9941,7 +9557,7 @@
           </a:fontRef>
         </p:style>
         <p:txBody>
-          <a:bodyPr wrap="square" lIns="82296" tIns="82296" rIns="82296" bIns="82296" rtlCol="0" anchor="ctr"/>
+          <a:bodyPr rtlCol="0" anchor="ctr" wrap="square" lIns="82296" rIns="82296" tIns="82296" bIns="82296"/>
           <a:lstStyle/>
           <a:p>
             <a:pPr algn="ctr">
@@ -9958,13 +9574,8 @@
                   <a:srgbClr val="003366"/>
                 </a:solidFill>
               </a:rPr>
-              <a:t>Assembler 与基础生成</a:t>
-            </a:r>
-            <a:endParaRPr sz="1700" b="1" i="0" u="none">
-              <a:solidFill>
-                <a:srgbClr val="003366"/>
-              </a:solidFill>
-            </a:endParaRPr>
+              <a:t>C++ 解释器与 Nterp</a:t>
+            </a:r>
           </a:p>
           <a:p>
             <a:pPr algn="ctr">
@@ -9984,36 +9595,31 @@
                   <a:srgbClr val="003366"/>
                 </a:solidFill>
               </a:rPr>
-              <a:t>寄存器、指令编码、分支与链接修补能力。</a:t>
-            </a:r>
-            <a:endParaRPr sz="1300" b="0" i="0" u="none">
-              <a:solidFill>
-                <a:srgbClr val="003366"/>
-              </a:solidFill>
-            </a:endParaRPr>
-          </a:p>
-        </p:txBody>
-      </p:sp>
-      <p:sp>
-        <p:nvSpPr>
-          <p:cNvPr id="6" name="Rounded Rectangle 5"/>
+              <a:t>补齐解释执行与字节码派发的关键路径。</a:t>
+            </a:r>
+          </a:p>
+        </p:txBody>
+      </p:sp>
+      <p:sp>
+        <p:nvSpPr>
+          <p:cNvPr id="7" name="Rounded Rectangle 6"/>
           <p:cNvSpPr/>
           <p:nvPr/>
         </p:nvSpPr>
         <p:spPr>
           <a:xfrm>
-            <a:off x="3657600" y="2487168"/>
+            <a:off x="6446520" y="2487168"/>
             <a:ext cx="2240280" cy="1078992"/>
           </a:xfrm>
           <a:prstGeom prst="roundRect">
             <a:avLst/>
           </a:prstGeom>
           <a:solidFill>
-            <a:srgbClr val="DDF6F6"/>
+            <a:srgbClr val="DCEFD8"/>
           </a:solidFill>
           <a:ln w="15240">
             <a:solidFill>
-              <a:srgbClr val="DDF6F6"/>
+              <a:srgbClr val="DCEFD8"/>
             </a:solidFill>
           </a:ln>
         </p:spPr>
@@ -10032,7 +9638,7 @@
           </a:fontRef>
         </p:style>
         <p:txBody>
-          <a:bodyPr wrap="square" lIns="82296" tIns="82296" rIns="82296" bIns="82296" rtlCol="0" anchor="ctr"/>
+          <a:bodyPr rtlCol="0" anchor="ctr" wrap="square" lIns="82296" rIns="82296" tIns="82296" bIns="82296"/>
           <a:lstStyle/>
           <a:p>
             <a:pPr algn="ctr">
@@ -10049,13 +9655,8 @@
                   <a:srgbClr val="003366"/>
                 </a:solidFill>
               </a:rPr>
-              <a:t>C++ 解释器与 Nterp</a:t>
-            </a:r>
-            <a:endParaRPr sz="1700" b="1" i="0" u="none">
-              <a:solidFill>
-                <a:srgbClr val="003366"/>
-              </a:solidFill>
-            </a:endParaRPr>
+              <a:t>JIT 后端与 OSR</a:t>
+            </a:r>
           </a:p>
           <a:p>
             <a:pPr algn="ctr">
@@ -10075,36 +9676,31 @@
                   <a:srgbClr val="003366"/>
                 </a:solidFill>
               </a:rPr>
-              <a:t>补齐解释执行与字节码派发的关键路径。</a:t>
-            </a:r>
-            <a:endParaRPr sz="1300" b="0" i="0" u="none">
-              <a:solidFill>
-                <a:srgbClr val="003366"/>
-              </a:solidFill>
-            </a:endParaRPr>
-          </a:p>
-        </p:txBody>
-      </p:sp>
-      <p:sp>
-        <p:nvSpPr>
-          <p:cNvPr id="7" name="Rounded Rectangle 6"/>
+              <a:t>打通 HIR 到 LoongArch64 机器码生成。</a:t>
+            </a:r>
+          </a:p>
+        </p:txBody>
+      </p:sp>
+      <p:sp>
+        <p:nvSpPr>
+          <p:cNvPr id="8" name="Rounded Rectangle 7"/>
           <p:cNvSpPr/>
           <p:nvPr/>
         </p:nvSpPr>
         <p:spPr>
           <a:xfrm>
-            <a:off x="6446520" y="2487168"/>
+            <a:off x="868680" y="3950208"/>
             <a:ext cx="2240280" cy="1078992"/>
           </a:xfrm>
           <a:prstGeom prst="roundRect">
             <a:avLst/>
           </a:prstGeom>
           <a:solidFill>
-            <a:srgbClr val="DCEFD8"/>
+            <a:srgbClr val="DDF6F6"/>
           </a:solidFill>
           <a:ln w="15240">
             <a:solidFill>
-              <a:srgbClr val="DCEFD8"/>
+              <a:srgbClr val="DDF6F6"/>
             </a:solidFill>
           </a:ln>
         </p:spPr>
@@ -10123,7 +9719,7 @@
           </a:fontRef>
         </p:style>
         <p:txBody>
-          <a:bodyPr wrap="square" lIns="82296" tIns="82296" rIns="82296" bIns="82296" rtlCol="0" anchor="ctr"/>
+          <a:bodyPr rtlCol="0" anchor="ctr" wrap="square" lIns="82296" rIns="82296" tIns="82296" bIns="82296"/>
           <a:lstStyle/>
           <a:p>
             <a:pPr algn="ctr">
@@ -10140,13 +9736,8 @@
                   <a:srgbClr val="003366"/>
                 </a:solidFill>
               </a:rPr>
-              <a:t>JIT 后端与 OSR</a:t>
-            </a:r>
-            <a:endParaRPr sz="1700" b="1" i="0" u="none">
-              <a:solidFill>
-                <a:srgbClr val="003366"/>
-              </a:solidFill>
-            </a:endParaRPr>
+              <a:t>JNI 编译器与桥接</a:t>
+            </a:r>
           </a:p>
           <a:p>
             <a:pPr algn="ctr">
@@ -10166,36 +9757,31 @@
                   <a:srgbClr val="003366"/>
                 </a:solidFill>
               </a:rPr>
-              <a:t>打通 HIR 到 LoongArch64 机器码生成。</a:t>
-            </a:r>
-            <a:endParaRPr sz="1300" b="0" i="0" u="none">
-              <a:solidFill>
-                <a:srgbClr val="003366"/>
-              </a:solidFill>
-            </a:endParaRPr>
-          </a:p>
-        </p:txBody>
-      </p:sp>
-      <p:sp>
-        <p:nvSpPr>
-          <p:cNvPr id="8" name="Rounded Rectangle 7"/>
+              <a:t>闭合 Java / native 调用链与栈帧约定。</a:t>
+            </a:r>
+          </a:p>
+        </p:txBody>
+      </p:sp>
+      <p:sp>
+        <p:nvSpPr>
+          <p:cNvPr id="9" name="Rounded Rectangle 8"/>
           <p:cNvSpPr/>
           <p:nvPr/>
         </p:nvSpPr>
         <p:spPr>
           <a:xfrm>
-            <a:off x="868680" y="3950208"/>
+            <a:off x="3657600" y="3950208"/>
             <a:ext cx="2240280" cy="1078992"/>
           </a:xfrm>
           <a:prstGeom prst="roundRect">
             <a:avLst/>
           </a:prstGeom>
           <a:solidFill>
-            <a:srgbClr val="DDF6F6"/>
+            <a:srgbClr val="DCEFD8"/>
           </a:solidFill>
           <a:ln w="15240">
             <a:solidFill>
-              <a:srgbClr val="DDF6F6"/>
+              <a:srgbClr val="DCEFD8"/>
             </a:solidFill>
           </a:ln>
         </p:spPr>
@@ -10214,7 +9800,7 @@
           </a:fontRef>
         </p:style>
         <p:txBody>
-          <a:bodyPr wrap="square" lIns="82296" tIns="82296" rIns="82296" bIns="82296" rtlCol="0" anchor="ctr"/>
+          <a:bodyPr rtlCol="0" anchor="ctr" wrap="square" lIns="82296" rIns="82296" tIns="82296" bIns="82296"/>
           <a:lstStyle/>
           <a:p>
             <a:pPr algn="ctr">
@@ -10231,13 +9817,8 @@
                   <a:srgbClr val="003366"/>
                 </a:solidFill>
               </a:rPr>
-              <a:t>JNI 编译器与桥接</a:t>
-            </a:r>
-            <a:endParaRPr sz="1700" b="1" i="0" u="none">
-              <a:solidFill>
-                <a:srgbClr val="003366"/>
-              </a:solidFill>
-            </a:endParaRPr>
+              <a:t>Runtime Fast Path</a:t>
+            </a:r>
           </a:p>
           <a:p>
             <a:pPr algn="ctr">
@@ -10257,36 +9838,31 @@
                   <a:srgbClr val="003366"/>
                 </a:solidFill>
               </a:rPr>
-              <a:t>闭合 Java / native 调用链与栈帧约定。</a:t>
-            </a:r>
-            <a:endParaRPr sz="1300" b="0" i="0" u="none">
-              <a:solidFill>
-                <a:srgbClr val="003366"/>
-              </a:solidFill>
-            </a:endParaRPr>
-          </a:p>
-        </p:txBody>
-      </p:sp>
-      <p:sp>
-        <p:nvSpPr>
-          <p:cNvPr id="9" name="Rounded Rectangle 8"/>
+              <a:t>补齐字符串、调用桩、deopt 等运行时入口。</a:t>
+            </a:r>
+          </a:p>
+        </p:txBody>
+      </p:sp>
+      <p:sp>
+        <p:nvSpPr>
+          <p:cNvPr id="10" name="Rounded Rectangle 9"/>
           <p:cNvSpPr/>
           <p:nvPr/>
         </p:nvSpPr>
         <p:spPr>
           <a:xfrm>
-            <a:off x="3657600" y="3950208"/>
+            <a:off x="6446520" y="3950208"/>
             <a:ext cx="2240280" cy="1078992"/>
           </a:xfrm>
           <a:prstGeom prst="roundRect">
             <a:avLst/>
           </a:prstGeom>
           <a:solidFill>
-            <a:srgbClr val="DCEFD8"/>
+            <a:srgbClr val="DDF6F6"/>
           </a:solidFill>
           <a:ln w="15240">
             <a:solidFill>
-              <a:srgbClr val="DCEFD8"/>
+              <a:srgbClr val="DDF6F6"/>
             </a:solidFill>
           </a:ln>
         </p:spPr>
@@ -10305,7 +9881,7 @@
           </a:fontRef>
         </p:style>
         <p:txBody>
-          <a:bodyPr wrap="square" lIns="82296" tIns="82296" rIns="82296" bIns="82296" rtlCol="0" anchor="ctr"/>
+          <a:bodyPr rtlCol="0" anchor="ctr" wrap="square" lIns="82296" rIns="82296" tIns="82296" bIns="82296"/>
           <a:lstStyle/>
           <a:p>
             <a:pPr algn="ctr">
@@ -10322,13 +9898,8 @@
                   <a:srgbClr val="003366"/>
                 </a:solidFill>
               </a:rPr>
-              <a:t>Runtime Fast Path</a:t>
-            </a:r>
-            <a:endParaRPr sz="1700" b="1" i="0" u="none">
-              <a:solidFill>
-                <a:srgbClr val="003366"/>
-              </a:solidFill>
-            </a:endParaRPr>
+              <a:t>Intrinsic 与能力扩展</a:t>
+            </a:r>
           </a:p>
           <a:p>
             <a:pPr algn="ctr">
@@ -10348,36 +9919,31 @@
                   <a:srgbClr val="003366"/>
                 </a:solidFill>
               </a:rPr>
-              <a:t>补齐字符串、调用桩、deopt 等运行时入口。</a:t>
-            </a:r>
-            <a:endParaRPr sz="1300" b="0" i="0" u="none">
-              <a:solidFill>
-                <a:srgbClr val="003366"/>
-              </a:solidFill>
-            </a:endParaRPr>
-          </a:p>
-        </p:txBody>
-      </p:sp>
-      <p:sp>
-        <p:nvSpPr>
-          <p:cNvPr id="10" name="Rounded Rectangle 9"/>
+              <a:t>补充标准库热点路径与执行引擎成熟度。</a:t>
+            </a:r>
+          </a:p>
+        </p:txBody>
+      </p:sp>
+      <p:sp>
+        <p:nvSpPr>
+          <p:cNvPr id="11" name="Rounded Rectangle 10"/>
           <p:cNvSpPr/>
           <p:nvPr/>
         </p:nvSpPr>
         <p:spPr>
           <a:xfrm>
-            <a:off x="6446520" y="3950208"/>
-            <a:ext cx="2240280" cy="1078992"/>
+            <a:off x="868680" y="5486400"/>
+            <a:ext cx="8641080" cy="384048"/>
           </a:xfrm>
           <a:prstGeom prst="roundRect">
             <a:avLst/>
           </a:prstGeom>
           <a:solidFill>
-            <a:srgbClr val="DDF6F6"/>
+            <a:srgbClr val="F7FBFB"/>
           </a:solidFill>
           <a:ln w="15240">
             <a:solidFill>
-              <a:srgbClr val="DDF6F6"/>
+              <a:srgbClr val="DCEFD8"/>
             </a:solidFill>
           </a:ln>
         </p:spPr>
@@ -10396,98 +9962,7 @@
           </a:fontRef>
         </p:style>
         <p:txBody>
-          <a:bodyPr wrap="square" lIns="82296" tIns="82296" rIns="82296" bIns="82296" rtlCol="0" anchor="ctr"/>
-          <a:lstStyle/>
-          <a:p>
-            <a:pPr algn="ctr">
-              <a:spcBef>
-                <a:spcPts val="0"/>
-              </a:spcBef>
-              <a:spcAft>
-                <a:spcPts val="600"/>
-              </a:spcAft>
-            </a:pPr>
-            <a:r>
-              <a:rPr sz="1700" b="1" i="0" u="none">
-                <a:solidFill>
-                  <a:srgbClr val="003366"/>
-                </a:solidFill>
-              </a:rPr>
-              <a:t>Intrinsic 与能力扩展</a:t>
-            </a:r>
-            <a:endParaRPr sz="1700" b="1" i="0" u="none">
-              <a:solidFill>
-                <a:srgbClr val="003366"/>
-              </a:solidFill>
-            </a:endParaRPr>
-          </a:p>
-          <a:p>
-            <a:pPr algn="ctr">
-              <a:lnSpc>
-                <a:spcPct val="110000"/>
-              </a:lnSpc>
-              <a:spcBef>
-                <a:spcPts val="0"/>
-              </a:spcBef>
-              <a:spcAft>
-                <a:spcPts val="500"/>
-              </a:spcAft>
-            </a:pPr>
-            <a:r>
-              <a:rPr sz="1300" b="0" i="0" u="none">
-                <a:solidFill>
-                  <a:srgbClr val="003366"/>
-                </a:solidFill>
-              </a:rPr>
-              <a:t>补充标准库热点路径与执行引擎成熟度。</a:t>
-            </a:r>
-            <a:endParaRPr sz="1300" b="0" i="0" u="none">
-              <a:solidFill>
-                <a:srgbClr val="003366"/>
-              </a:solidFill>
-            </a:endParaRPr>
-          </a:p>
-        </p:txBody>
-      </p:sp>
-      <p:sp>
-        <p:nvSpPr>
-          <p:cNvPr id="11" name="Rounded Rectangle 10"/>
-          <p:cNvSpPr/>
-          <p:nvPr/>
-        </p:nvSpPr>
-        <p:spPr>
-          <a:xfrm>
-            <a:off x="868680" y="5486400"/>
-            <a:ext cx="8641080" cy="384048"/>
-          </a:xfrm>
-          <a:prstGeom prst="roundRect">
-            <a:avLst/>
-          </a:prstGeom>
-          <a:solidFill>
-            <a:srgbClr val="F7FBFB"/>
-          </a:solidFill>
-          <a:ln w="15240">
-            <a:solidFill>
-              <a:srgbClr val="DCEFD8"/>
-            </a:solidFill>
-          </a:ln>
-        </p:spPr>
-        <p:style>
-          <a:lnRef idx="1">
-            <a:schemeClr val="accent1"/>
-          </a:lnRef>
-          <a:fillRef idx="3">
-            <a:schemeClr val="accent1"/>
-          </a:fillRef>
-          <a:effectRef idx="2">
-            <a:schemeClr val="accent1"/>
-          </a:effectRef>
-          <a:fontRef idx="minor">
-            <a:schemeClr val="lt1"/>
-          </a:fontRef>
-        </p:style>
-        <p:txBody>
-          <a:bodyPr wrap="square" lIns="18288" tIns="18288" rIns="18288" bIns="18288" rtlCol="0" anchor="ctr"/>
+          <a:bodyPr rtlCol="0" anchor="ctr" wrap="square" lIns="18288" rIns="18288" tIns="18288" bIns="18288"/>
           <a:lstStyle/>
           <a:p>
             <a:pPr algn="ctr">
@@ -10506,11 +9981,6 @@
               </a:rPr>
               <a:t>结论：适配结果是执行引擎系统闭环，不是若干体系结构相关文件的零散移植。</a:t>
             </a:r>
-            <a:endParaRPr sz="1300" b="1" i="0" u="none">
-              <a:solidFill>
-                <a:srgbClr val="002A57"/>
-              </a:solidFill>
-            </a:endParaRPr>
           </a:p>
         </p:txBody>
       </p:sp>
@@ -10523,7 +9993,7 @@
 </file>
 
 <file path=ppt/slides/slide8.xml><?xml version="1.0" encoding="utf-8"?>
-<p:sld xmlns:a="http://schemas.openxmlformats.org/drawingml/2006/main" xmlns:r="http://schemas.openxmlformats.org/officeDocument/2006/relationships" xmlns:p="http://schemas.openxmlformats.org/presentationml/2006/main">
+<p:sld xmlns:a="http://schemas.openxmlformats.org/drawingml/2006/main" xmlns:p="http://schemas.openxmlformats.org/presentationml/2006/main" xmlns:r="http://schemas.openxmlformats.org/officeDocument/2006/relationships">
   <p:cSld>
     <p:spTree>
       <p:nvGrpSpPr>
@@ -10544,7 +10014,7 @@
         </p:nvSpPr>
         <p:spPr/>
         <p:txBody>
-          <a:bodyPr wrap="square" lIns="0" tIns="0" rIns="0" bIns="0" anchor="ctr"/>
+          <a:bodyPr wrap="square" anchor="ctr" lIns="0" rIns="0" tIns="0" bIns="0"/>
           <a:lstStyle/>
           <a:p>
             <a:pPr algn="l">
@@ -10563,11 +10033,6 @@
               </a:rPr>
               <a:t>统一验证链路与正确性结果</a:t>
             </a:r>
-            <a:endParaRPr sz="2800" b="1" i="0" u="none">
-              <a:solidFill>
-                <a:srgbClr val="003366"/>
-              </a:solidFill>
-            </a:endParaRPr>
           </a:p>
         </p:txBody>
       </p:sp>
@@ -10599,7 +10064,7 @@
               <a:tr h="370840">
                 <a:tc>
                   <a:txBody>
-                    <a:bodyPr wrap="square"/>
+                    <a:bodyPr wrap="square" lIns="45720" rIns="45720" tIns="27432" bIns="27432"/>
                     <a:lstStyle/>
                     <a:p>
                       <a:pPr algn="ctr"/>
@@ -10611,14 +10076,9 @@
                         </a:rPr>
                         <a:t>验证对象</a:t>
                       </a:r>
-                      <a:endParaRPr sz="1300" b="1">
-                        <a:solidFill>
-                          <a:srgbClr val="FFFFFF"/>
-                        </a:solidFill>
-                      </a:endParaRPr>
                     </a:p>
                   </a:txBody>
-                  <a:tcPr marL="45720" marR="45720" marT="27432" marB="27432">
+                  <a:tcPr>
                     <a:solidFill>
                       <a:srgbClr val="002A57"/>
                     </a:solidFill>
@@ -10626,7 +10086,7 @@
                 </a:tc>
                 <a:tc>
                   <a:txBody>
-                    <a:bodyPr wrap="square"/>
+                    <a:bodyPr wrap="square" lIns="45720" rIns="45720" tIns="27432" bIns="27432"/>
                     <a:lstStyle/>
                     <a:p>
                       <a:pPr algn="ctr"/>
@@ -10638,14 +10098,9 @@
                         </a:rPr>
                         <a:t>结果</a:t>
                       </a:r>
-                      <a:endParaRPr sz="1300" b="1">
-                        <a:solidFill>
-                          <a:srgbClr val="FFFFFF"/>
-                        </a:solidFill>
-                      </a:endParaRPr>
                     </a:p>
                   </a:txBody>
-                  <a:tcPr marL="45720" marR="45720" marT="27432" marB="27432">
+                  <a:tcPr>
                     <a:solidFill>
                       <a:srgbClr val="002A57"/>
                     </a:solidFill>
@@ -10653,7 +10108,7 @@
                 </a:tc>
                 <a:tc>
                   <a:txBody>
-                    <a:bodyPr wrap="square"/>
+                    <a:bodyPr wrap="square" lIns="45720" rIns="45720" tIns="27432" bIns="27432"/>
                     <a:lstStyle/>
                     <a:p>
                       <a:pPr algn="ctr"/>
@@ -10665,14 +10120,9 @@
                         </a:rPr>
                         <a:t>说明</a:t>
                       </a:r>
-                      <a:endParaRPr sz="1300" b="1">
-                        <a:solidFill>
-                          <a:srgbClr val="FFFFFF"/>
-                        </a:solidFill>
-                      </a:endParaRPr>
                     </a:p>
                   </a:txBody>
-                  <a:tcPr marL="45720" marR="45720" marT="27432" marB="27432">
+                  <a:tcPr>
                     <a:solidFill>
                       <a:srgbClr val="002A57"/>
                     </a:solidFill>
@@ -10682,7 +10132,7 @@
               <a:tr h="370840">
                 <a:tc>
                   <a:txBody>
-                    <a:bodyPr wrap="square"/>
+                    <a:bodyPr wrap="square" lIns="45720" rIns="45720" tIns="27432" bIns="27432"/>
                     <a:lstStyle/>
                     <a:p>
                       <a:pPr algn="ctr"/>
@@ -10694,14 +10144,9 @@
                         </a:rPr>
                         <a:t>C++ 解释器</a:t>
                       </a:r>
-                      <a:endParaRPr sz="1200" b="0">
-                        <a:solidFill>
-                          <a:srgbClr val="003366"/>
-                        </a:solidFill>
-                      </a:endParaRPr>
                     </a:p>
                   </a:txBody>
-                  <a:tcPr marL="45720" marR="45720" marT="27432" marB="27432">
+                  <a:tcPr>
                     <a:solidFill>
                       <a:srgbClr val="F7FBFB"/>
                     </a:solidFill>
@@ -10709,7 +10154,7 @@
                 </a:tc>
                 <a:tc>
                   <a:txBody>
-                    <a:bodyPr wrap="square"/>
+                    <a:bodyPr wrap="square" lIns="45720" rIns="45720" tIns="27432" bIns="27432"/>
                     <a:lstStyle/>
                     <a:p>
                       <a:pPr algn="ctr"/>
@@ -10721,14 +10166,9 @@
                         </a:rPr>
                         <a:t>1033/1033</a:t>
                       </a:r>
-                      <a:endParaRPr sz="1200" b="0">
-                        <a:solidFill>
-                          <a:srgbClr val="003366"/>
-                        </a:solidFill>
-                      </a:endParaRPr>
                     </a:p>
                   </a:txBody>
-                  <a:tcPr marL="45720" marR="45720" marT="27432" marB="27432">
+                  <a:tcPr>
                     <a:solidFill>
                       <a:srgbClr val="F7FBFB"/>
                     </a:solidFill>
@@ -10736,7 +10176,7 @@
                 </a:tc>
                 <a:tc>
                   <a:txBody>
-                    <a:bodyPr wrap="square"/>
+                    <a:bodyPr wrap="square" lIns="45720" rIns="45720" tIns="27432" bIns="27432"/>
                     <a:lstStyle/>
                     <a:p>
                       <a:pPr algn="ctr"/>
@@ -10748,14 +10188,9 @@
                         </a:rPr>
                         <a:t>通过率 100%</a:t>
                       </a:r>
-                      <a:endParaRPr sz="1200" b="0">
-                        <a:solidFill>
-                          <a:srgbClr val="003366"/>
-                        </a:solidFill>
-                      </a:endParaRPr>
                     </a:p>
                   </a:txBody>
-                  <a:tcPr marL="45720" marR="45720" marT="27432" marB="27432">
+                  <a:tcPr>
                     <a:solidFill>
                       <a:srgbClr val="F7FBFB"/>
                     </a:solidFill>
@@ -10765,7 +10200,7 @@
               <a:tr h="370840">
                 <a:tc>
                   <a:txBody>
-                    <a:bodyPr wrap="square"/>
+                    <a:bodyPr wrap="square" lIns="45720" rIns="45720" tIns="27432" bIns="27432"/>
                     <a:lstStyle/>
                     <a:p>
                       <a:pPr algn="ctr"/>
@@ -10777,14 +10212,9 @@
                         </a:rPr>
                         <a:t>Nterp 解释器</a:t>
                       </a:r>
-                      <a:endParaRPr sz="1200" b="0">
-                        <a:solidFill>
-                          <a:srgbClr val="003366"/>
-                        </a:solidFill>
-                      </a:endParaRPr>
                     </a:p>
                   </a:txBody>
-                  <a:tcPr marL="45720" marR="45720" marT="27432" marB="27432">
+                  <a:tcPr>
                     <a:solidFill>
                       <a:srgbClr val="FFFFFF"/>
                     </a:solidFill>
@@ -10792,7 +10222,7 @@
                 </a:tc>
                 <a:tc>
                   <a:txBody>
-                    <a:bodyPr wrap="square"/>
+                    <a:bodyPr wrap="square" lIns="45720" rIns="45720" tIns="27432" bIns="27432"/>
                     <a:lstStyle/>
                     <a:p>
                       <a:pPr algn="ctr"/>
@@ -10804,14 +10234,9 @@
                         </a:rPr>
                         <a:t>1033/1033</a:t>
                       </a:r>
-                      <a:endParaRPr sz="1200" b="0">
-                        <a:solidFill>
-                          <a:srgbClr val="003366"/>
-                        </a:solidFill>
-                      </a:endParaRPr>
                     </a:p>
                   </a:txBody>
-                  <a:tcPr marL="45720" marR="45720" marT="27432" marB="27432">
+                  <a:tcPr>
                     <a:solidFill>
                       <a:srgbClr val="FFFFFF"/>
                     </a:solidFill>
@@ -10819,7 +10244,7 @@
                 </a:tc>
                 <a:tc>
                   <a:txBody>
-                    <a:bodyPr wrap="square"/>
+                    <a:bodyPr wrap="square" lIns="45720" rIns="45720" tIns="27432" bIns="27432"/>
                     <a:lstStyle/>
                     <a:p>
                       <a:pPr algn="ctr"/>
@@ -10831,14 +10256,9 @@
                         </a:rPr>
                         <a:t>通过率 100%</a:t>
                       </a:r>
-                      <a:endParaRPr sz="1200" b="0">
-                        <a:solidFill>
-                          <a:srgbClr val="003366"/>
-                        </a:solidFill>
-                      </a:endParaRPr>
                     </a:p>
                   </a:txBody>
-                  <a:tcPr marL="45720" marR="45720" marT="27432" marB="27432">
+                  <a:tcPr>
                     <a:solidFill>
                       <a:srgbClr val="FFFFFF"/>
                     </a:solidFill>
@@ -10848,7 +10268,7 @@
               <a:tr h="370840">
                 <a:tc>
                   <a:txBody>
-                    <a:bodyPr wrap="square"/>
+                    <a:bodyPr wrap="square" lIns="45720" rIns="45720" tIns="27432" bIns="27432"/>
                     <a:lstStyle/>
                     <a:p>
                       <a:pPr algn="ctr"/>
@@ -10860,14 +10280,9 @@
                         </a:rPr>
                         <a:t>JIT 编译器</a:t>
                       </a:r>
-                      <a:endParaRPr sz="1200" b="0">
-                        <a:solidFill>
-                          <a:srgbClr val="003366"/>
-                        </a:solidFill>
-                      </a:endParaRPr>
                     </a:p>
                   </a:txBody>
-                  <a:tcPr marL="45720" marR="45720" marT="27432" marB="27432">
+                  <a:tcPr>
                     <a:solidFill>
                       <a:srgbClr val="F7FBFB"/>
                     </a:solidFill>
@@ -10875,7 +10290,7 @@
                 </a:tc>
                 <a:tc>
                   <a:txBody>
-                    <a:bodyPr wrap="square"/>
+                    <a:bodyPr wrap="square" lIns="45720" rIns="45720" tIns="27432" bIns="27432"/>
                     <a:lstStyle/>
                     <a:p>
                       <a:pPr algn="ctr"/>
@@ -10887,14 +10302,9 @@
                         </a:rPr>
                         <a:t>1033/1033</a:t>
                       </a:r>
-                      <a:endParaRPr sz="1200" b="0">
-                        <a:solidFill>
-                          <a:srgbClr val="003366"/>
-                        </a:solidFill>
-                      </a:endParaRPr>
                     </a:p>
                   </a:txBody>
-                  <a:tcPr marL="45720" marR="45720" marT="27432" marB="27432">
+                  <a:tcPr>
                     <a:solidFill>
                       <a:srgbClr val="F7FBFB"/>
                     </a:solidFill>
@@ -10902,7 +10312,7 @@
                 </a:tc>
                 <a:tc>
                   <a:txBody>
-                    <a:bodyPr wrap="square"/>
+                    <a:bodyPr wrap="square" lIns="45720" rIns="45720" tIns="27432" bIns="27432"/>
                     <a:lstStyle/>
                     <a:p>
                       <a:pPr algn="ctr"/>
@@ -10914,14 +10324,9 @@
                         </a:rPr>
                         <a:t>通过率 100%</a:t>
                       </a:r>
-                      <a:endParaRPr sz="1200" b="0">
-                        <a:solidFill>
-                          <a:srgbClr val="003366"/>
-                        </a:solidFill>
-                      </a:endParaRPr>
                     </a:p>
                   </a:txBody>
-                  <a:tcPr marL="45720" marR="45720" marT="27432" marB="27432">
+                  <a:tcPr>
                     <a:solidFill>
                       <a:srgbClr val="F7FBFB"/>
                     </a:solidFill>
@@ -10931,7 +10336,7 @@
               <a:tr h="370840">
                 <a:tc>
                   <a:txBody>
-                    <a:bodyPr wrap="square"/>
+                    <a:bodyPr wrap="square" lIns="45720" rIns="45720" tIns="27432" bIns="27432"/>
                     <a:lstStyle/>
                     <a:p>
                       <a:pPr algn="ctr"/>
@@ -10943,14 +10348,9 @@
                         </a:rPr>
                         <a:t>libcore</a:t>
                       </a:r>
-                      <a:endParaRPr sz="1200" b="0">
-                        <a:solidFill>
-                          <a:srgbClr val="003366"/>
-                        </a:solidFill>
-                      </a:endParaRPr>
                     </a:p>
                   </a:txBody>
-                  <a:tcPr marL="45720" marR="45720" marT="27432" marB="27432">
+                  <a:tcPr>
                     <a:solidFill>
                       <a:srgbClr val="FFFFFF"/>
                     </a:solidFill>
@@ -10958,7 +10358,7 @@
                 </a:tc>
                 <a:tc>
                   <a:txBody>
-                    <a:bodyPr wrap="square"/>
+                    <a:bodyPr wrap="square" lIns="45720" rIns="45720" tIns="27432" bIns="27432"/>
                     <a:lstStyle/>
                     <a:p>
                       <a:pPr algn="ctr"/>
@@ -10970,14 +10370,9 @@
                         </a:rPr>
                         <a:t>主要包级测试通过</a:t>
                       </a:r>
-                      <a:endParaRPr sz="1200" b="0">
-                        <a:solidFill>
-                          <a:srgbClr val="003366"/>
-                        </a:solidFill>
-                      </a:endParaRPr>
                     </a:p>
                   </a:txBody>
-                  <a:tcPr marL="45720" marR="45720" marT="27432" marB="27432">
+                  <a:tcPr>
                     <a:solidFill>
                       <a:srgbClr val="FFFFFF"/>
                     </a:solidFill>
@@ -10985,7 +10380,7 @@
                 </a:tc>
                 <a:tc>
                   <a:txBody>
-                    <a:bodyPr wrap="square"/>
+                    <a:bodyPr wrap="square" lIns="45720" rIns="45720" tIns="27432" bIns="27432"/>
                     <a:lstStyle/>
                     <a:p>
                       <a:pPr algn="ctr"/>
@@ -10997,14 +10392,9 @@
                         </a:rPr>
                         <a:t>少量自动跳过，不影响主结论</a:t>
                       </a:r>
-                      <a:endParaRPr sz="1200" b="0">
-                        <a:solidFill>
-                          <a:srgbClr val="003366"/>
-                        </a:solidFill>
-                      </a:endParaRPr>
                     </a:p>
                   </a:txBody>
-                  <a:tcPr marL="45720" marR="45720" marT="27432" marB="27432">
+                  <a:tcPr>
                     <a:solidFill>
                       <a:srgbClr val="FFFFFF"/>
                     </a:solidFill>
@@ -11053,7 +10443,7 @@
           </a:fontRef>
         </p:style>
         <p:txBody>
-          <a:bodyPr wrap="square" lIns="18288" tIns="18288" rIns="18288" bIns="18288" rtlCol="0" anchor="ctr"/>
+          <a:bodyPr rtlCol="0" anchor="ctr" wrap="square" lIns="18288" rIns="18288" tIns="18288" bIns="18288"/>
           <a:lstStyle/>
           <a:p>
             <a:pPr algn="ctr">
@@ -11072,11 +10462,6 @@
               </a:rPr>
               <a:t>先证明语义正确，再讨论 benchmark 收益</a:t>
             </a:r>
-            <a:endParaRPr sz="1300" b="1" i="0" u="none">
-              <a:solidFill>
-                <a:srgbClr val="FFFFFF"/>
-              </a:solidFill>
-            </a:endParaRPr>
           </a:p>
         </p:txBody>
       </p:sp>
@@ -11118,7 +10503,7 @@
           </a:fontRef>
         </p:style>
         <p:txBody>
-          <a:bodyPr wrap="square" lIns="18288" tIns="18288" rIns="18288" bIns="18288" rtlCol="0" anchor="ctr"/>
+          <a:bodyPr rtlCol="0" anchor="ctr" wrap="square" lIns="18288" rIns="18288" tIns="18288" bIns="18288"/>
           <a:lstStyle/>
           <a:p>
             <a:pPr algn="ctr">
@@ -11137,11 +10522,6 @@
               </a:rPr>
               <a:t>结论：三条主要执行路径均通过系统性目标机回归，ART 已具备进入性能研究阶段的语义基础。</a:t>
             </a:r>
-            <a:endParaRPr sz="1300" b="1" i="0" u="none">
-              <a:solidFill>
-                <a:srgbClr val="002A57"/>
-              </a:solidFill>
-            </a:endParaRPr>
           </a:p>
         </p:txBody>
       </p:sp>
@@ -11154,7 +10534,7 @@
 </file>
 
 <file path=ppt/slides/slide9.xml><?xml version="1.0" encoding="utf-8"?>
-<p:sld xmlns:a="http://schemas.openxmlformats.org/drawingml/2006/main" xmlns:r="http://schemas.openxmlformats.org/officeDocument/2006/relationships" xmlns:p="http://schemas.openxmlformats.org/presentationml/2006/main">
+<p:sld xmlns:a="http://schemas.openxmlformats.org/drawingml/2006/main" xmlns:p="http://schemas.openxmlformats.org/presentationml/2006/main" xmlns:r="http://schemas.openxmlformats.org/officeDocument/2006/relationships">
   <p:cSld>
     <p:spTree>
       <p:nvGrpSpPr>
@@ -11175,7 +10555,7 @@
         </p:nvSpPr>
         <p:spPr/>
         <p:txBody>
-          <a:bodyPr wrap="square" lIns="0" tIns="0" rIns="0" bIns="0" anchor="ctr"/>
+          <a:bodyPr wrap="square" anchor="ctr" lIns="0" rIns="0" tIns="0" bIns="0"/>
           <a:lstStyle/>
           <a:p>
             <a:pPr algn="l">
@@ -11194,11 +10574,6 @@
               </a:rPr>
               <a:t>三、性能优化研究</a:t>
             </a:r>
-            <a:endParaRPr sz="3000" b="1" i="0" u="none">
-              <a:solidFill>
-                <a:srgbClr val="002A57"/>
-              </a:solidFill>
-            </a:endParaRPr>
           </a:p>
         </p:txBody>
       </p:sp>
@@ -11214,7 +10589,7 @@
         </p:nvSpPr>
         <p:spPr/>
         <p:txBody>
-          <a:bodyPr wrap="square" lIns="0" tIns="0" rIns="0" bIns="0" anchor="ctr"/>
+          <a:bodyPr wrap="square" anchor="ctr" lIns="0" rIns="0" tIns="0" bIns="0"/>
           <a:lstStyle/>
           <a:p>
             <a:pPr algn="l">
@@ -11233,11 +10608,6 @@
               </a:rPr>
               <a:t>统一 baseline、热点驱动与收益边界</a:t>
             </a:r>
-            <a:endParaRPr sz="1800" b="0" i="0" u="none">
-              <a:solidFill>
-                <a:srgbClr val="5B6470"/>
-              </a:solidFill>
-            </a:endParaRPr>
           </a:p>
         </p:txBody>
       </p:sp>

--- a/Report/03-毕业答辩/鄢玺毕业答辩.pptx
+++ b/Report/03-毕业答辩/鄢玺毕业答辩.pptx
@@ -10031,7 +10031,7 @@
                   <a:srgbClr val="003366"/>
                 </a:solidFill>
               </a:rPr>
-              <a:t>统一验证链路与正确性结果</a:t>
+              <a:t>正确性验证结果</a:t>
             </a:r>
           </a:p>
         </p:txBody>
@@ -10048,7 +10048,7 @@
         </p:nvGraphicFramePr>
         <p:xfrm>
           <a:off x="819150" y="1697038"/>
-          <a:ext cx="7589520" cy="1854200"/>
+          <a:ext cx="9372600" cy="4160520"/>
         </p:xfrm>
         <a:graphic>
           <a:graphicData uri="http://schemas.openxmlformats.org/drawingml/2006/table">
@@ -10057,11 +10057,11 @@
                 <a:tableStyleId>{5C22544A-7EE6-4342-B048-85BDC9FD1C3A}</a:tableStyleId>
               </a:tblPr>
               <a:tblGrid>
-                <a:gridCol w="2240280"/>
-                <a:gridCol w="2240280"/>
-                <a:gridCol w="3108960"/>
+                <a:gridCol w="2148840"/>
+                <a:gridCol w="1508760"/>
+                <a:gridCol w="5715000"/>
               </a:tblGrid>
-              <a:tr h="370840">
+              <a:tr h="594360">
                 <a:tc>
                   <a:txBody>
                     <a:bodyPr wrap="square" lIns="45720" rIns="45720" tIns="27432" bIns="27432"/>
@@ -10074,7 +10074,7 @@
                             <a:srgbClr val="FFFFFF"/>
                           </a:solidFill>
                         </a:rPr>
-                        <a:t>验证对象</a:t>
+                        <a:t>验证项</a:t>
                       </a:r>
                     </a:p>
                   </a:txBody>
@@ -10129,7 +10129,7 @@
                   </a:tcPr>
                 </a:tc>
               </a:tr>
-              <a:tr h="370840">
+              <a:tr h="594360">
                 <a:tc>
                   <a:txBody>
                     <a:bodyPr wrap="square" lIns="45720" rIns="45720" tIns="27432" bIns="27432"/>
@@ -10142,7 +10142,7 @@
                             <a:srgbClr val="003366"/>
                           </a:solidFill>
                         </a:rPr>
-                        <a:t>C++ 解释器</a:t>
+                        <a:t>run-test 用例总数</a:t>
                       </a:r>
                     </a:p>
                   </a:txBody>
@@ -10164,7 +10164,121 @@
                             <a:srgbClr val="003366"/>
                           </a:solidFill>
                         </a:rPr>
-                        <a:t>1033/1033</a:t>
+                        <a:t>1033</a:t>
+                      </a:r>
+                    </a:p>
+                  </a:txBody>
+                  <a:tcPr>
+                    <a:solidFill>
+                      <a:srgbClr val="F7FBFB"/>
+                    </a:solidFill>
+                  </a:tcPr>
+                </a:tc>
+                <a:tc>
+                  <a:txBody>
+                    <a:bodyPr wrap="square" lIns="45720" rIns="45720" tIns="27432" bIns="27432"/>
+                    <a:lstStyle/>
+                    <a:p>
+                      <a:pPr algn="l"/>
+                      <a:r>
+                        <a:rPr sz="1150" b="0">
+                          <a:solidFill>
+                            <a:srgbClr val="003366"/>
+                          </a:solidFill>
+                        </a:rPr>
+                        <a:t>art/test 当前 run-test 用例总数</a:t>
+                      </a:r>
+                    </a:p>
+                  </a:txBody>
+                  <a:tcPr>
+                    <a:solidFill>
+                      <a:srgbClr val="F7FBFB"/>
+                    </a:solidFill>
+                  </a:tcPr>
+                </a:tc>
+              </a:tr>
+              <a:tr h="594360">
+                <a:tc>
+                  <a:txBody>
+                    <a:bodyPr wrap="square" lIns="45720" rIns="45720" tIns="27432" bIns="27432"/>
+                    <a:lstStyle/>
+                    <a:p>
+                      <a:pPr algn="ctr"/>
+                      <a:r>
+                        <a:rPr sz="1200" b="0">
+                          <a:solidFill>
+                            <a:srgbClr val="003366"/>
+                          </a:solidFill>
+                        </a:rPr>
+                        <a:t>compiler 变体</a:t>
+                      </a:r>
+                    </a:p>
+                  </a:txBody>
+                  <a:tcPr>
+                    <a:solidFill>
+                      <a:srgbClr val="FFFFFF"/>
+                    </a:solidFill>
+                  </a:tcPr>
+                </a:tc>
+                <a:tc>
+                  <a:txBody>
+                    <a:bodyPr wrap="square" lIns="45720" rIns="45720" tIns="27432" bIns="27432"/>
+                    <a:lstStyle/>
+                    <a:p>
+                      <a:pPr algn="ctr"/>
+                      <a:r>
+                        <a:rPr sz="1200" b="0">
+                          <a:solidFill>
+                            <a:srgbClr val="003366"/>
+                          </a:solidFill>
+                        </a:rPr>
+                        <a:t>7 类</a:t>
+                      </a:r>
+                    </a:p>
+                  </a:txBody>
+                  <a:tcPr>
+                    <a:solidFill>
+                      <a:srgbClr val="FFFFFF"/>
+                    </a:solidFill>
+                  </a:tcPr>
+                </a:tc>
+                <a:tc>
+                  <a:txBody>
+                    <a:bodyPr wrap="square" lIns="45720" rIns="45720" tIns="27432" bIns="27432"/>
+                    <a:lstStyle/>
+                    <a:p>
+                      <a:pPr algn="l"/>
+                      <a:r>
+                        <a:rPr sz="1150" b="0">
+                          <a:solidFill>
+                            <a:srgbClr val="003366"/>
+                          </a:solidFill>
+                        </a:rPr>
+                        <a:t>interp-ac、interpreter、jit、jit-on-first-use、optimizing、speed-profile、baseline</a:t>
+                      </a:r>
+                    </a:p>
+                  </a:txBody>
+                  <a:tcPr>
+                    <a:solidFill>
+                      <a:srgbClr val="FFFFFF"/>
+                    </a:solidFill>
+                  </a:tcPr>
+                </a:tc>
+              </a:tr>
+              <a:tr h="594360">
+                <a:tc>
+                  <a:txBody>
+                    <a:bodyPr wrap="square" lIns="45720" rIns="45720" tIns="27432" bIns="27432"/>
+                    <a:lstStyle/>
+                    <a:p>
+                      <a:pPr algn="ctr"/>
+                      <a:r>
+                        <a:rPr sz="1200" b="0">
+                          <a:solidFill>
+                            <a:srgbClr val="003366"/>
+                          </a:solidFill>
+                        </a:rPr>
+                        <a:t>理论配置数</a:t>
                       </a:r>
                     </a:p>
                   </a:txBody>
@@ -10186,7 +10300,29 @@
                             <a:srgbClr val="003366"/>
                           </a:solidFill>
                         </a:rPr>
-                        <a:t>通过率 100%</a:t>
+                        <a:t>7231</a:t>
+                      </a:r>
+                    </a:p>
+                  </a:txBody>
+                  <a:tcPr>
+                    <a:solidFill>
+                      <a:srgbClr val="F7FBFB"/>
+                    </a:solidFill>
+                  </a:tcPr>
+                </a:tc>
+                <a:tc>
+                  <a:txBody>
+                    <a:bodyPr wrap="square" lIns="45720" rIns="45720" tIns="27432" bIns="27432"/>
+                    <a:lstStyle/>
+                    <a:p>
+                      <a:pPr algn="l"/>
+                      <a:r>
+                        <a:rPr sz="1150" b="0">
+                          <a:solidFill>
+                            <a:srgbClr val="003366"/>
+                          </a:solidFill>
+                        </a:rPr>
+                        <a:t>1033 × 7</a:t>
                       </a:r>
                     </a:p>
                   </a:txBody>
@@ -10197,7 +10333,7 @@
                   </a:tcPr>
                 </a:tc>
               </a:tr>
-              <a:tr h="370840">
+              <a:tr h="594360">
                 <a:tc>
                   <a:txBody>
                     <a:bodyPr wrap="square" lIns="45720" rIns="45720" tIns="27432" bIns="27432"/>
@@ -10210,7 +10346,7 @@
                             <a:srgbClr val="003366"/>
                           </a:solidFill>
                         </a:rPr>
-                        <a:t>Nterp 解释器</a:t>
+                        <a:t>自动 skip</a:t>
                       </a:r>
                     </a:p>
                   </a:txBody>
@@ -10232,7 +10368,7 @@
                             <a:srgbClr val="003366"/>
                           </a:solidFill>
                         </a:rPr>
-                        <a:t>1033/1033</a:t>
+                        <a:t>430</a:t>
                       </a:r>
                     </a:p>
                   </a:txBody>
@@ -10247,14 +10383,14 @@
                     <a:bodyPr wrap="square" lIns="45720" rIns="45720" tIns="27432" bIns="27432"/>
                     <a:lstStyle/>
                     <a:p>
-                      <a:pPr algn="ctr"/>
+                      <a:pPr algn="l"/>
                       <a:r>
-                        <a:rPr sz="1200" b="0">
+                        <a:rPr sz="1150" b="0">
                           <a:solidFill>
                             <a:srgbClr val="003366"/>
                           </a:solidFill>
                         </a:rPr>
-                        <a:t>通过率 100%</a:t>
+                        <a:t>根据 knownfailures 规则自动跳过</a:t>
                       </a:r>
                     </a:p>
                   </a:txBody>
@@ -10265,7 +10401,7 @@
                   </a:tcPr>
                 </a:tc>
               </a:tr>
-              <a:tr h="370840">
+              <a:tr h="594360">
                 <a:tc>
                   <a:txBody>
                     <a:bodyPr wrap="square" lIns="45720" rIns="45720" tIns="27432" bIns="27432"/>
@@ -10278,7 +10414,7 @@
                             <a:srgbClr val="003366"/>
                           </a:solidFill>
                         </a:rPr>
-                        <a:t>JIT 编译器</a:t>
+                        <a:t>实际执行数</a:t>
                       </a:r>
                     </a:p>
                   </a:txBody>
@@ -10300,7 +10436,7 @@
                             <a:srgbClr val="003366"/>
                           </a:solidFill>
                         </a:rPr>
-                        <a:t>1033/1033</a:t>
+                        <a:t>6801</a:t>
                       </a:r>
                     </a:p>
                   </a:txBody>
@@ -10315,14 +10451,14 @@
                     <a:bodyPr wrap="square" lIns="45720" rIns="45720" tIns="27432" bIns="27432"/>
                     <a:lstStyle/>
                     <a:p>
-                      <a:pPr algn="ctr"/>
+                      <a:pPr algn="l"/>
                       <a:r>
-                        <a:rPr sz="1200" b="0">
+                        <a:rPr sz="1150" b="0">
                           <a:solidFill>
                             <a:srgbClr val="003366"/>
                           </a:solidFill>
                         </a:rPr>
-                        <a:t>通过率 100%</a:t>
+                        <a:t>系统级目标机回归实际执行集合</a:t>
                       </a:r>
                     </a:p>
                   </a:txBody>
@@ -10333,7 +10469,7 @@
                   </a:tcPr>
                 </a:tc>
               </a:tr>
-              <a:tr h="370840">
+              <a:tr h="594360">
                 <a:tc>
                   <a:txBody>
                     <a:bodyPr wrap="square" lIns="45720" rIns="45720" tIns="27432" bIns="27432"/>
@@ -10368,7 +10504,7 @@
                             <a:srgbClr val="003366"/>
                           </a:solidFill>
                         </a:rPr>
-                        <a:t>主要包级测试通过</a:t>
+                        <a:t>主要测试包通过</a:t>
                       </a:r>
                     </a:p>
                   </a:txBody>
@@ -10383,14 +10519,14 @@
                     <a:bodyPr wrap="square" lIns="45720" rIns="45720" tIns="27432" bIns="27432"/>
                     <a:lstStyle/>
                     <a:p>
-                      <a:pPr algn="ctr"/>
+                      <a:pPr algn="l"/>
                       <a:r>
-                        <a:rPr sz="1200" b="0">
+                        <a:rPr sz="1150" b="0">
                           <a:solidFill>
                             <a:srgbClr val="003366"/>
                           </a:solidFill>
                         </a:rPr>
-                        <a:t>少量自动跳过，不影响主结论</a:t>
+                        <a:t>少量因架构条件限制自动跳过，不影响主要正确性结论</a:t>
                       </a:r>
                     </a:p>
                   </a:txBody>
@@ -10405,126 +10541,6 @@
           </a:graphicData>
         </a:graphic>
       </p:graphicFrame>
-      <p:sp>
-        <p:nvSpPr>
-          <p:cNvPr id="4" name="Rounded Rectangle 3"/>
-          <p:cNvSpPr/>
-          <p:nvPr/>
-        </p:nvSpPr>
-        <p:spPr>
-          <a:xfrm>
-            <a:off x="749808" y="1078992"/>
-            <a:ext cx="8732520" cy="384048"/>
-          </a:xfrm>
-          <a:prstGeom prst="roundRect">
-            <a:avLst/>
-          </a:prstGeom>
-          <a:solidFill>
-            <a:srgbClr val="002A57"/>
-          </a:solidFill>
-          <a:ln w="15240">
-            <a:solidFill>
-              <a:srgbClr val="002A57"/>
-            </a:solidFill>
-          </a:ln>
-        </p:spPr>
-        <p:style>
-          <a:lnRef idx="1">
-            <a:schemeClr val="accent1"/>
-          </a:lnRef>
-          <a:fillRef idx="3">
-            <a:schemeClr val="accent1"/>
-          </a:fillRef>
-          <a:effectRef idx="2">
-            <a:schemeClr val="accent1"/>
-          </a:effectRef>
-          <a:fontRef idx="minor">
-            <a:schemeClr val="lt1"/>
-          </a:fontRef>
-        </p:style>
-        <p:txBody>
-          <a:bodyPr rtlCol="0" anchor="ctr" wrap="square" lIns="18288" rIns="18288" tIns="18288" bIns="18288"/>
-          <a:lstStyle/>
-          <a:p>
-            <a:pPr algn="ctr">
-              <a:spcBef>
-                <a:spcPts val="0"/>
-              </a:spcBef>
-              <a:spcAft>
-                <a:spcPts val="500"/>
-              </a:spcAft>
-            </a:pPr>
-            <a:r>
-              <a:rPr sz="1300" b="1" i="0" u="none">
-                <a:solidFill>
-                  <a:srgbClr val="FFFFFF"/>
-                </a:solidFill>
-              </a:rPr>
-              <a:t>先证明语义正确，再讨论 benchmark 收益</a:t>
-            </a:r>
-          </a:p>
-        </p:txBody>
-      </p:sp>
-      <p:sp>
-        <p:nvSpPr>
-          <p:cNvPr id="5" name="Rounded Rectangle 4"/>
-          <p:cNvSpPr/>
-          <p:nvPr/>
-        </p:nvSpPr>
-        <p:spPr>
-          <a:xfrm>
-            <a:off x="841248" y="5596128"/>
-            <a:ext cx="8732520" cy="347472"/>
-          </a:xfrm>
-          <a:prstGeom prst="roundRect">
-            <a:avLst/>
-          </a:prstGeom>
-          <a:solidFill>
-            <a:srgbClr val="F7FBFB"/>
-          </a:solidFill>
-          <a:ln w="15240">
-            <a:solidFill>
-              <a:srgbClr val="DCEFD8"/>
-            </a:solidFill>
-          </a:ln>
-        </p:spPr>
-        <p:style>
-          <a:lnRef idx="1">
-            <a:schemeClr val="accent1"/>
-          </a:lnRef>
-          <a:fillRef idx="3">
-            <a:schemeClr val="accent1"/>
-          </a:fillRef>
-          <a:effectRef idx="2">
-            <a:schemeClr val="accent1"/>
-          </a:effectRef>
-          <a:fontRef idx="minor">
-            <a:schemeClr val="lt1"/>
-          </a:fontRef>
-        </p:style>
-        <p:txBody>
-          <a:bodyPr rtlCol="0" anchor="ctr" wrap="square" lIns="18288" rIns="18288" tIns="18288" bIns="18288"/>
-          <a:lstStyle/>
-          <a:p>
-            <a:pPr algn="ctr">
-              <a:spcBef>
-                <a:spcPts val="0"/>
-              </a:spcBef>
-              <a:spcAft>
-                <a:spcPts val="500"/>
-              </a:spcAft>
-            </a:pPr>
-            <a:r>
-              <a:rPr sz="1300" b="1" i="0" u="none">
-                <a:solidFill>
-                  <a:srgbClr val="002A57"/>
-                </a:solidFill>
-              </a:rPr>
-              <a:t>结论：三条主要执行路径均通过系统性目标机回归，ART 已具备进入性能研究阶段的语义基础。</a:t>
-            </a:r>
-          </a:p>
-        </p:txBody>
-      </p:sp>
     </p:spTree>
   </p:cSld>
   <p:clrMapOvr>
